--- a/student result system ppt.pptx
+++ b/student result system ppt.pptx
@@ -5,36 +5,44 @@
     <p:sldMasterId id="2147483648" r:id="rId1"/>
   </p:sldMasterIdLst>
   <p:notesMasterIdLst>
-    <p:notesMasterId r:id="rId14"/>
+    <p:notesMasterId r:id="rId22"/>
   </p:notesMasterIdLst>
   <p:sldIdLst>
     <p:sldId id="256" r:id="rId2"/>
     <p:sldId id="325" r:id="rId3"/>
     <p:sldId id="326" r:id="rId4"/>
-    <p:sldId id="327" r:id="rId5"/>
-    <p:sldId id="328" r:id="rId6"/>
-    <p:sldId id="329" r:id="rId7"/>
-    <p:sldId id="330" r:id="rId8"/>
-    <p:sldId id="331" r:id="rId9"/>
-    <p:sldId id="335" r:id="rId10"/>
-    <p:sldId id="333" r:id="rId11"/>
-    <p:sldId id="334" r:id="rId12"/>
-    <p:sldId id="324" r:id="rId13"/>
+    <p:sldId id="336" r:id="rId5"/>
+    <p:sldId id="327" r:id="rId6"/>
+    <p:sldId id="337" r:id="rId7"/>
+    <p:sldId id="328" r:id="rId8"/>
+    <p:sldId id="329" r:id="rId9"/>
+    <p:sldId id="330" r:id="rId10"/>
+    <p:sldId id="338" r:id="rId11"/>
+    <p:sldId id="339" r:id="rId12"/>
+    <p:sldId id="340" r:id="rId13"/>
+    <p:sldId id="341" r:id="rId14"/>
+    <p:sldId id="331" r:id="rId15"/>
+    <p:sldId id="342" r:id="rId16"/>
+    <p:sldId id="333" r:id="rId17"/>
+    <p:sldId id="334" r:id="rId18"/>
+    <p:sldId id="343" r:id="rId19"/>
+    <p:sldId id="344" r:id="rId20"/>
+    <p:sldId id="324" r:id="rId21"/>
   </p:sldIdLst>
   <p:sldSz cx="12192000" cy="6858000"/>
   <p:notesSz cx="6858000" cy="12192000"/>
   <p:embeddedFontLst>
     <p:embeddedFont>
       <p:font typeface="Aharoni" panose="02010803020104030203" pitchFamily="2" charset="-79"/>
-      <p:bold r:id="rId15"/>
+      <p:bold r:id="rId23"/>
     </p:embeddedFont>
     <p:embeddedFont>
       <p:font typeface="Arial Rounded MT Bold" panose="020F0704030504030204" pitchFamily="34" charset="0"/>
-      <p:regular r:id="rId16"/>
+      <p:regular r:id="rId24"/>
     </p:embeddedFont>
     <p:embeddedFont>
       <p:font typeface="Maiandra GD" panose="020E0502030308020204" pitchFamily="34" charset="0"/>
-      <p:regular r:id="rId17"/>
+      <p:regular r:id="rId25"/>
     </p:embeddedFont>
   </p:embeddedFontLst>
   <p:defaultTextStyle>
@@ -141,773 +149,6 @@
 </p1510:revInfo>
 </file>
 
-<file path=ppt/changesInfos/changesInfo1.xml><?xml version="1.0" encoding="utf-8"?>
-<pc:chgInfo xmlns:a="http://schemas.openxmlformats.org/drawingml/2006/main" xmlns:r="http://schemas.openxmlformats.org/officeDocument/2006/relationships" xmlns:ac="http://schemas.microsoft.com/office/drawing/2013/main/command" xmlns:pc="http://schemas.microsoft.com/office/powerpoint/2013/main/command">
-  <pc:docChgLst>
-    <pc:chgData name="saipasupuleti314@gmail.com" userId="35baae21e35ed96b" providerId="LiveId" clId="{DD9318BD-C817-49CB-810D-50BB27F8EEFA}"/>
-    <pc:docChg chg="undo custSel modSld sldOrd">
-      <pc:chgData name="saipasupuleti314@gmail.com" userId="35baae21e35ed96b" providerId="LiveId" clId="{DD9318BD-C817-49CB-810D-50BB27F8EEFA}" dt="2026-08-25T04:47:09.434" v="716" actId="20577"/>
-      <pc:docMkLst>
-        <pc:docMk/>
-      </pc:docMkLst>
-      <pc:sldChg chg="ord">
-        <pc:chgData name="saipasupuleti314@gmail.com" userId="35baae21e35ed96b" providerId="LiveId" clId="{DD9318BD-C817-49CB-810D-50BB27F8EEFA}" dt="2026-08-24T12:21:02.229" v="40"/>
-        <pc:sldMkLst>
-          <pc:docMk/>
-          <pc:sldMk cId="1780977059" sldId="325"/>
-        </pc:sldMkLst>
-      </pc:sldChg>
-      <pc:sldChg chg="addSp delSp modSp mod">
-        <pc:chgData name="saipasupuleti314@gmail.com" userId="35baae21e35ed96b" providerId="LiveId" clId="{DD9318BD-C817-49CB-810D-50BB27F8EEFA}" dt="2026-08-24T12:36:05.988" v="116" actId="2711"/>
-        <pc:sldMkLst>
-          <pc:docMk/>
-          <pc:sldMk cId="1780977059" sldId="326"/>
-        </pc:sldMkLst>
-        <pc:spChg chg="del mod">
-          <ac:chgData name="saipasupuleti314@gmail.com" userId="35baae21e35ed96b" providerId="LiveId" clId="{DD9318BD-C817-49CB-810D-50BB27F8EEFA}" dt="2026-08-24T12:35:11.720" v="109" actId="478"/>
-          <ac:spMkLst>
-            <pc:docMk/>
-            <pc:sldMk cId="1780977059" sldId="326"/>
-            <ac:spMk id="2" creationId="{CCBC3698-B926-FCD8-3E34-A0BCA597160E}"/>
-          </ac:spMkLst>
-        </pc:spChg>
-        <pc:spChg chg="add mod">
-          <ac:chgData name="saipasupuleti314@gmail.com" userId="35baae21e35ed96b" providerId="LiveId" clId="{DD9318BD-C817-49CB-810D-50BB27F8EEFA}" dt="2026-08-24T12:36:05.988" v="116" actId="2711"/>
-          <ac:spMkLst>
-            <pc:docMk/>
-            <pc:sldMk cId="1780977059" sldId="326"/>
-            <ac:spMk id="6" creationId="{FFA82E74-A1DE-B714-2BC1-EF2D794AC9E3}"/>
-          </ac:spMkLst>
-        </pc:spChg>
-      </pc:sldChg>
-      <pc:sldChg chg="modSp mod">
-        <pc:chgData name="saipasupuleti314@gmail.com" userId="35baae21e35ed96b" providerId="LiveId" clId="{DD9318BD-C817-49CB-810D-50BB27F8EEFA}" dt="2026-08-25T04:47:09.434" v="716" actId="20577"/>
-        <pc:sldMkLst>
-          <pc:docMk/>
-          <pc:sldMk cId="1780977059" sldId="329"/>
-        </pc:sldMkLst>
-        <pc:spChg chg="mod">
-          <ac:chgData name="saipasupuleti314@gmail.com" userId="35baae21e35ed96b" providerId="LiveId" clId="{DD9318BD-C817-49CB-810D-50BB27F8EEFA}" dt="2026-08-25T04:47:09.434" v="716" actId="20577"/>
-          <ac:spMkLst>
-            <pc:docMk/>
-            <pc:sldMk cId="1780977059" sldId="329"/>
-            <ac:spMk id="2" creationId="{CCBC3698-B926-FCD8-3E34-A0BCA597160E}"/>
-          </ac:spMkLst>
-        </pc:spChg>
-      </pc:sldChg>
-      <pc:sldChg chg="addSp delSp modSp mod">
-        <pc:chgData name="saipasupuleti314@gmail.com" userId="35baae21e35ed96b" providerId="LiveId" clId="{DD9318BD-C817-49CB-810D-50BB27F8EEFA}" dt="2026-08-24T10:19:42.529" v="33" actId="1076"/>
-        <pc:sldMkLst>
-          <pc:docMk/>
-          <pc:sldMk cId="1780977059" sldId="331"/>
-        </pc:sldMkLst>
-        <pc:spChg chg="del">
-          <ac:chgData name="saipasupuleti314@gmail.com" userId="35baae21e35ed96b" providerId="LiveId" clId="{DD9318BD-C817-49CB-810D-50BB27F8EEFA}" dt="2026-08-24T10:15:01.081" v="0" actId="478"/>
-          <ac:spMkLst>
-            <pc:docMk/>
-            <pc:sldMk cId="1780977059" sldId="331"/>
-            <ac:spMk id="8" creationId="{00000000-0000-0000-0000-000000000000}"/>
-          </ac:spMkLst>
-        </pc:spChg>
-        <pc:spChg chg="del">
-          <ac:chgData name="saipasupuleti314@gmail.com" userId="35baae21e35ed96b" providerId="LiveId" clId="{DD9318BD-C817-49CB-810D-50BB27F8EEFA}" dt="2026-08-24T10:15:02.763" v="1" actId="478"/>
-          <ac:spMkLst>
-            <pc:docMk/>
-            <pc:sldMk cId="1780977059" sldId="331"/>
-            <ac:spMk id="10" creationId="{00000000-0000-0000-0000-000000000000}"/>
-          </ac:spMkLst>
-        </pc:spChg>
-        <pc:spChg chg="del">
-          <ac:chgData name="saipasupuleti314@gmail.com" userId="35baae21e35ed96b" providerId="LiveId" clId="{DD9318BD-C817-49CB-810D-50BB27F8EEFA}" dt="2026-08-24T10:15:04.445" v="2" actId="478"/>
-          <ac:spMkLst>
-            <pc:docMk/>
-            <pc:sldMk cId="1780977059" sldId="331"/>
-            <ac:spMk id="12" creationId="{00000000-0000-0000-0000-000000000000}"/>
-          </ac:spMkLst>
-        </pc:spChg>
-        <pc:spChg chg="add mod">
-          <ac:chgData name="saipasupuleti314@gmail.com" userId="35baae21e35ed96b" providerId="LiveId" clId="{DD9318BD-C817-49CB-810D-50BB27F8EEFA}" dt="2026-08-24T10:16:19.847" v="23"/>
-          <ac:spMkLst>
-            <pc:docMk/>
-            <pc:sldMk cId="1780977059" sldId="331"/>
-            <ac:spMk id="13" creationId="{774176BE-6834-7BA4-A4E5-892E04C97D83}"/>
-          </ac:spMkLst>
-        </pc:spChg>
-        <pc:picChg chg="add del mod">
-          <ac:chgData name="saipasupuleti314@gmail.com" userId="35baae21e35ed96b" providerId="LiveId" clId="{DD9318BD-C817-49CB-810D-50BB27F8EEFA}" dt="2026-08-24T10:15:52.219" v="20" actId="931"/>
-          <ac:picMkLst>
-            <pc:docMk/>
-            <pc:sldMk cId="1780977059" sldId="331"/>
-            <ac:picMk id="6" creationId="{1C3B1D2B-B1C7-DE64-8695-348A4D534CC9}"/>
-          </ac:picMkLst>
-        </pc:picChg>
-        <pc:picChg chg="add mod">
-          <ac:chgData name="saipasupuleti314@gmail.com" userId="35baae21e35ed96b" providerId="LiveId" clId="{DD9318BD-C817-49CB-810D-50BB27F8EEFA}" dt="2026-08-24T10:19:42.529" v="33" actId="1076"/>
-          <ac:picMkLst>
-            <pc:docMk/>
-            <pc:sldMk cId="1780977059" sldId="331"/>
-            <ac:picMk id="14" creationId="{9EB23971-2E20-E2AD-DEC4-EA6847198325}"/>
-          </ac:picMkLst>
-        </pc:picChg>
-        <pc:cxnChg chg="del">
-          <ac:chgData name="saipasupuleti314@gmail.com" userId="35baae21e35ed96b" providerId="LiveId" clId="{DD9318BD-C817-49CB-810D-50BB27F8EEFA}" dt="2026-08-24T10:15:08.910" v="4" actId="478"/>
-          <ac:cxnSpMkLst>
-            <pc:docMk/>
-            <pc:sldMk cId="1780977059" sldId="331"/>
-            <ac:cxnSpMk id="9" creationId="{00000000-0000-0000-0000-000000000000}"/>
-          </ac:cxnSpMkLst>
-        </pc:cxnChg>
-        <pc:cxnChg chg="del">
-          <ac:chgData name="saipasupuleti314@gmail.com" userId="35baae21e35ed96b" providerId="LiveId" clId="{DD9318BD-C817-49CB-810D-50BB27F8EEFA}" dt="2026-08-24T10:15:06.715" v="3" actId="478"/>
-          <ac:cxnSpMkLst>
-            <pc:docMk/>
-            <pc:sldMk cId="1780977059" sldId="331"/>
-            <ac:cxnSpMk id="11" creationId="{00000000-0000-0000-0000-000000000000}"/>
-          </ac:cxnSpMkLst>
-        </pc:cxnChg>
-      </pc:sldChg>
-      <pc:sldChg chg="addSp delSp modSp mod ord">
-        <pc:chgData name="saipasupuleti314@gmail.com" userId="35baae21e35ed96b" providerId="LiveId" clId="{DD9318BD-C817-49CB-810D-50BB27F8EEFA}" dt="2026-08-25T01:01:46.333" v="712" actId="478"/>
-        <pc:sldMkLst>
-          <pc:docMk/>
-          <pc:sldMk cId="1780977059" sldId="333"/>
-        </pc:sldMkLst>
-        <pc:spChg chg="add del mod">
-          <ac:chgData name="saipasupuleti314@gmail.com" userId="35baae21e35ed96b" providerId="LiveId" clId="{DD9318BD-C817-49CB-810D-50BB27F8EEFA}" dt="2026-08-24T12:19:26.708" v="36"/>
-          <ac:spMkLst>
-            <pc:docMk/>
-            <pc:sldMk cId="1780977059" sldId="333"/>
-            <ac:spMk id="2" creationId="{79C51FC1-AC45-17C3-C1F4-C00596A3AFAE}"/>
-          </ac:spMkLst>
-        </pc:spChg>
-        <pc:spChg chg="mod">
-          <ac:chgData name="saipasupuleti314@gmail.com" userId="35baae21e35ed96b" providerId="LiveId" clId="{DD9318BD-C817-49CB-810D-50BB27F8EEFA}" dt="2026-08-25T01:01:30.046" v="710" actId="1076"/>
-          <ac:spMkLst>
-            <pc:docMk/>
-            <pc:sldMk cId="1780977059" sldId="333"/>
-            <ac:spMk id="9" creationId="{00000000-0000-0000-0000-000000000000}"/>
-          </ac:spMkLst>
-        </pc:spChg>
-        <pc:spChg chg="mod">
-          <ac:chgData name="saipasupuleti314@gmail.com" userId="35baae21e35ed96b" providerId="LiveId" clId="{DD9318BD-C817-49CB-810D-50BB27F8EEFA}" dt="2026-08-25T01:01:26.315" v="709" actId="1076"/>
-          <ac:spMkLst>
-            <pc:docMk/>
-            <pc:sldMk cId="1780977059" sldId="333"/>
-            <ac:spMk id="10" creationId="{00000000-0000-0000-0000-000000000000}"/>
-          </ac:spMkLst>
-        </pc:spChg>
-        <pc:spChg chg="mod">
-          <ac:chgData name="saipasupuleti314@gmail.com" userId="35baae21e35ed96b" providerId="LiveId" clId="{DD9318BD-C817-49CB-810D-50BB27F8EEFA}" dt="2026-08-25T01:01:22.155" v="708" actId="1076"/>
-          <ac:spMkLst>
-            <pc:docMk/>
-            <pc:sldMk cId="1780977059" sldId="333"/>
-            <ac:spMk id="11" creationId="{00000000-0000-0000-0000-000000000000}"/>
-          </ac:spMkLst>
-        </pc:spChg>
-        <pc:spChg chg="mod">
-          <ac:chgData name="saipasupuleti314@gmail.com" userId="35baae21e35ed96b" providerId="LiveId" clId="{DD9318BD-C817-49CB-810D-50BB27F8EEFA}" dt="2026-08-25T01:01:16.432" v="707" actId="1076"/>
-          <ac:spMkLst>
-            <pc:docMk/>
-            <pc:sldMk cId="1780977059" sldId="333"/>
-            <ac:spMk id="12" creationId="{00000000-0000-0000-0000-000000000000}"/>
-          </ac:spMkLst>
-        </pc:spChg>
-        <pc:spChg chg="del mod">
-          <ac:chgData name="saipasupuleti314@gmail.com" userId="35baae21e35ed96b" providerId="LiveId" clId="{DD9318BD-C817-49CB-810D-50BB27F8EEFA}" dt="2026-08-25T01:01:43.454" v="711" actId="478"/>
-          <ac:spMkLst>
-            <pc:docMk/>
-            <pc:sldMk cId="1780977059" sldId="333"/>
-            <ac:spMk id="13" creationId="{00000000-0000-0000-0000-000000000000}"/>
-          </ac:spMkLst>
-        </pc:spChg>
-        <pc:spChg chg="del mod">
-          <ac:chgData name="saipasupuleti314@gmail.com" userId="35baae21e35ed96b" providerId="LiveId" clId="{DD9318BD-C817-49CB-810D-50BB27F8EEFA}" dt="2026-08-25T01:01:46.333" v="712" actId="478"/>
-          <ac:spMkLst>
-            <pc:docMk/>
-            <pc:sldMk cId="1780977059" sldId="333"/>
-            <ac:spMk id="14" creationId="{00000000-0000-0000-0000-000000000000}"/>
-          </ac:spMkLst>
-        </pc:spChg>
-      </pc:sldChg>
-      <pc:sldChg chg="modSp mod">
-        <pc:chgData name="saipasupuleti314@gmail.com" userId="35baae21e35ed96b" providerId="LiveId" clId="{DD9318BD-C817-49CB-810D-50BB27F8EEFA}" dt="2026-08-24T13:24:41.070" v="704"/>
-        <pc:sldMkLst>
-          <pc:docMk/>
-          <pc:sldMk cId="1780977059" sldId="334"/>
-        </pc:sldMkLst>
-        <pc:graphicFrameChg chg="mod modGraphic">
-          <ac:chgData name="saipasupuleti314@gmail.com" userId="35baae21e35ed96b" providerId="LiveId" clId="{DD9318BD-C817-49CB-810D-50BB27F8EEFA}" dt="2026-08-24T13:24:41.070" v="704"/>
-          <ac:graphicFrameMkLst>
-            <pc:docMk/>
-            <pc:sldMk cId="1780977059" sldId="334"/>
-            <ac:graphicFrameMk id="8" creationId="{00000000-0000-0000-0000-000000000000}"/>
-          </ac:graphicFrameMkLst>
-        </pc:graphicFrameChg>
-      </pc:sldChg>
-      <pc:sldChg chg="addSp delSp modSp mod">
-        <pc:chgData name="saipasupuleti314@gmail.com" userId="35baae21e35ed96b" providerId="LiveId" clId="{DD9318BD-C817-49CB-810D-50BB27F8EEFA}" dt="2026-08-24T13:13:06.926" v="700" actId="120"/>
-        <pc:sldMkLst>
-          <pc:docMk/>
-          <pc:sldMk cId="2026700312" sldId="335"/>
-        </pc:sldMkLst>
-        <pc:spChg chg="mod">
-          <ac:chgData name="saipasupuleti314@gmail.com" userId="35baae21e35ed96b" providerId="LiveId" clId="{DD9318BD-C817-49CB-810D-50BB27F8EEFA}" dt="2026-08-24T12:48:15.368" v="189" actId="1076"/>
-          <ac:spMkLst>
-            <pc:docMk/>
-            <pc:sldMk cId="2026700312" sldId="335"/>
-            <ac:spMk id="8" creationId="{00000000-0000-0000-0000-000000000000}"/>
-          </ac:spMkLst>
-        </pc:spChg>
-        <pc:spChg chg="del">
-          <ac:chgData name="saipasupuleti314@gmail.com" userId="35baae21e35ed96b" providerId="LiveId" clId="{DD9318BD-C817-49CB-810D-50BB27F8EEFA}" dt="2026-08-24T12:44:20.483" v="117" actId="478"/>
-          <ac:spMkLst>
-            <pc:docMk/>
-            <pc:sldMk cId="2026700312" sldId="335"/>
-            <ac:spMk id="9" creationId="{00000000-0000-0000-0000-000000000000}"/>
-          </ac:spMkLst>
-        </pc:spChg>
-        <pc:spChg chg="mod">
-          <ac:chgData name="saipasupuleti314@gmail.com" userId="35baae21e35ed96b" providerId="LiveId" clId="{DD9318BD-C817-49CB-810D-50BB27F8EEFA}" dt="2026-08-24T12:47:58.436" v="186" actId="14100"/>
-          <ac:spMkLst>
-            <pc:docMk/>
-            <pc:sldMk cId="2026700312" sldId="335"/>
-            <ac:spMk id="10" creationId="{00000000-0000-0000-0000-000000000000}"/>
-          </ac:spMkLst>
-        </pc:spChg>
-        <pc:spChg chg="mod">
-          <ac:chgData name="saipasupuleti314@gmail.com" userId="35baae21e35ed96b" providerId="LiveId" clId="{DD9318BD-C817-49CB-810D-50BB27F8EEFA}" dt="2026-08-24T12:47:50.555" v="185" actId="14100"/>
-          <ac:spMkLst>
-            <pc:docMk/>
-            <pc:sldMk cId="2026700312" sldId="335"/>
-            <ac:spMk id="11" creationId="{00000000-0000-0000-0000-000000000000}"/>
-          </ac:spMkLst>
-        </pc:spChg>
-        <pc:spChg chg="del">
-          <ac:chgData name="saipasupuleti314@gmail.com" userId="35baae21e35ed96b" providerId="LiveId" clId="{DD9318BD-C817-49CB-810D-50BB27F8EEFA}" dt="2026-08-24T12:45:28.608" v="131" actId="478"/>
-          <ac:spMkLst>
-            <pc:docMk/>
-            <pc:sldMk cId="2026700312" sldId="335"/>
-            <ac:spMk id="12" creationId="{00000000-0000-0000-0000-000000000000}"/>
-          </ac:spMkLst>
-        </pc:spChg>
-        <pc:spChg chg="del mod">
-          <ac:chgData name="saipasupuleti314@gmail.com" userId="35baae21e35ed96b" providerId="LiveId" clId="{DD9318BD-C817-49CB-810D-50BB27F8EEFA}" dt="2026-08-24T12:48:53.986" v="194" actId="478"/>
-          <ac:spMkLst>
-            <pc:docMk/>
-            <pc:sldMk cId="2026700312" sldId="335"/>
-            <ac:spMk id="17" creationId="{00000000-0000-0000-0000-000000000000}"/>
-          </ac:spMkLst>
-        </pc:spChg>
-        <pc:spChg chg="del mod">
-          <ac:chgData name="saipasupuleti314@gmail.com" userId="35baae21e35ed96b" providerId="LiveId" clId="{DD9318BD-C817-49CB-810D-50BB27F8EEFA}" dt="2026-08-24T12:48:59.839" v="196" actId="478"/>
-          <ac:spMkLst>
-            <pc:docMk/>
-            <pc:sldMk cId="2026700312" sldId="335"/>
-            <ac:spMk id="18" creationId="{00000000-0000-0000-0000-000000000000}"/>
-          </ac:spMkLst>
-        </pc:spChg>
-        <pc:spChg chg="del mod">
-          <ac:chgData name="saipasupuleti314@gmail.com" userId="35baae21e35ed96b" providerId="LiveId" clId="{DD9318BD-C817-49CB-810D-50BB27F8EEFA}" dt="2026-08-24T12:49:07.367" v="198" actId="478"/>
-          <ac:spMkLst>
-            <pc:docMk/>
-            <pc:sldMk cId="2026700312" sldId="335"/>
-            <ac:spMk id="19" creationId="{00000000-0000-0000-0000-000000000000}"/>
-          </ac:spMkLst>
-        </pc:spChg>
-        <pc:spChg chg="del mod">
-          <ac:chgData name="saipasupuleti314@gmail.com" userId="35baae21e35ed96b" providerId="LiveId" clId="{DD9318BD-C817-49CB-810D-50BB27F8EEFA}" dt="2026-08-24T12:49:17.297" v="200" actId="478"/>
-          <ac:spMkLst>
-            <pc:docMk/>
-            <pc:sldMk cId="2026700312" sldId="335"/>
-            <ac:spMk id="20" creationId="{00000000-0000-0000-0000-000000000000}"/>
-          </ac:spMkLst>
-        </pc:spChg>
-        <pc:spChg chg="del">
-          <ac:chgData name="saipasupuleti314@gmail.com" userId="35baae21e35ed96b" providerId="LiveId" clId="{DD9318BD-C817-49CB-810D-50BB27F8EEFA}" dt="2026-08-24T12:45:31.643" v="132" actId="478"/>
-          <ac:spMkLst>
-            <pc:docMk/>
-            <pc:sldMk cId="2026700312" sldId="335"/>
-            <ac:spMk id="21" creationId="{00000000-0000-0000-0000-000000000000}"/>
-          </ac:spMkLst>
-        </pc:spChg>
-        <pc:spChg chg="mod">
-          <ac:chgData name="saipasupuleti314@gmail.com" userId="35baae21e35ed96b" providerId="LiveId" clId="{DD9318BD-C817-49CB-810D-50BB27F8EEFA}" dt="2026-08-24T12:57:29.419" v="381" actId="1076"/>
-          <ac:spMkLst>
-            <pc:docMk/>
-            <pc:sldMk cId="2026700312" sldId="335"/>
-            <ac:spMk id="22" creationId="{00000000-0000-0000-0000-000000000000}"/>
-          </ac:spMkLst>
-        </pc:spChg>
-        <pc:spChg chg="del mod">
-          <ac:chgData name="saipasupuleti314@gmail.com" userId="35baae21e35ed96b" providerId="LiveId" clId="{DD9318BD-C817-49CB-810D-50BB27F8EEFA}" dt="2026-08-24T12:54:07.847" v="321" actId="478"/>
-          <ac:spMkLst>
-            <pc:docMk/>
-            <pc:sldMk cId="2026700312" sldId="335"/>
-            <ac:spMk id="25" creationId="{00000000-0000-0000-0000-000000000000}"/>
-          </ac:spMkLst>
-        </pc:spChg>
-        <pc:spChg chg="mod">
-          <ac:chgData name="saipasupuleti314@gmail.com" userId="35baae21e35ed96b" providerId="LiveId" clId="{DD9318BD-C817-49CB-810D-50BB27F8EEFA}" dt="2026-08-24T12:52:00.519" v="266" actId="115"/>
-          <ac:spMkLst>
-            <pc:docMk/>
-            <pc:sldMk cId="2026700312" sldId="335"/>
-            <ac:spMk id="27" creationId="{00000000-0000-0000-0000-000000000000}"/>
-          </ac:spMkLst>
-        </pc:spChg>
-        <pc:spChg chg="mod">
-          <ac:chgData name="saipasupuleti314@gmail.com" userId="35baae21e35ed96b" providerId="LiveId" clId="{DD9318BD-C817-49CB-810D-50BB27F8EEFA}" dt="2026-08-24T12:52:12.817" v="276" actId="20577"/>
-          <ac:spMkLst>
-            <pc:docMk/>
-            <pc:sldMk cId="2026700312" sldId="335"/>
-            <ac:spMk id="28" creationId="{00000000-0000-0000-0000-000000000000}"/>
-          </ac:spMkLst>
-        </pc:spChg>
-        <pc:spChg chg="mod">
-          <ac:chgData name="saipasupuleti314@gmail.com" userId="35baae21e35ed96b" providerId="LiveId" clId="{DD9318BD-C817-49CB-810D-50BB27F8EEFA}" dt="2026-08-24T12:51:26.731" v="246" actId="115"/>
-          <ac:spMkLst>
-            <pc:docMk/>
-            <pc:sldMk cId="2026700312" sldId="335"/>
-            <ac:spMk id="31" creationId="{00000000-0000-0000-0000-000000000000}"/>
-          </ac:spMkLst>
-        </pc:spChg>
-        <pc:spChg chg="mod">
-          <ac:chgData name="saipasupuleti314@gmail.com" userId="35baae21e35ed96b" providerId="LiveId" clId="{DD9318BD-C817-49CB-810D-50BB27F8EEFA}" dt="2026-08-24T12:52:28.195" v="299" actId="20577"/>
-          <ac:spMkLst>
-            <pc:docMk/>
-            <pc:sldMk cId="2026700312" sldId="335"/>
-            <ac:spMk id="32" creationId="{00000000-0000-0000-0000-000000000000}"/>
-          </ac:spMkLst>
-        </pc:spChg>
-        <pc:spChg chg="mod">
-          <ac:chgData name="saipasupuleti314@gmail.com" userId="35baae21e35ed96b" providerId="LiveId" clId="{DD9318BD-C817-49CB-810D-50BB27F8EEFA}" dt="2026-08-24T13:08:50.775" v="594" actId="20577"/>
-          <ac:spMkLst>
-            <pc:docMk/>
-            <pc:sldMk cId="2026700312" sldId="335"/>
-            <ac:spMk id="33" creationId="{00000000-0000-0000-0000-000000000000}"/>
-          </ac:spMkLst>
-        </pc:spChg>
-        <pc:spChg chg="add del mod">
-          <ac:chgData name="saipasupuleti314@gmail.com" userId="35baae21e35ed96b" providerId="LiveId" clId="{DD9318BD-C817-49CB-810D-50BB27F8EEFA}" dt="2026-08-24T13:10:30.325" v="669" actId="115"/>
-          <ac:spMkLst>
-            <pc:docMk/>
-            <pc:sldMk cId="2026700312" sldId="335"/>
-            <ac:spMk id="37" creationId="{00000000-0000-0000-0000-000000000000}"/>
-          </ac:spMkLst>
-        </pc:spChg>
-        <pc:spChg chg="mod">
-          <ac:chgData name="saipasupuleti314@gmail.com" userId="35baae21e35ed96b" providerId="LiveId" clId="{DD9318BD-C817-49CB-810D-50BB27F8EEFA}" dt="2026-08-24T13:10:25.133" v="668" actId="20577"/>
-          <ac:spMkLst>
-            <pc:docMk/>
-            <pc:sldMk cId="2026700312" sldId="335"/>
-            <ac:spMk id="38" creationId="{00000000-0000-0000-0000-000000000000}"/>
-          </ac:spMkLst>
-        </pc:spChg>
-        <pc:spChg chg="mod">
-          <ac:chgData name="saipasupuleti314@gmail.com" userId="35baae21e35ed96b" providerId="LiveId" clId="{DD9318BD-C817-49CB-810D-50BB27F8EEFA}" dt="2026-08-24T13:09:29.863" v="622" actId="255"/>
-          <ac:spMkLst>
-            <pc:docMk/>
-            <pc:sldMk cId="2026700312" sldId="335"/>
-            <ac:spMk id="41" creationId="{00000000-0000-0000-0000-000000000000}"/>
-          </ac:spMkLst>
-        </pc:spChg>
-        <pc:spChg chg="add del">
-          <ac:chgData name="saipasupuleti314@gmail.com" userId="35baae21e35ed96b" providerId="LiveId" clId="{DD9318BD-C817-49CB-810D-50BB27F8EEFA}" dt="2026-08-24T12:55:41.914" v="344" actId="478"/>
-          <ac:spMkLst>
-            <pc:docMk/>
-            <pc:sldMk cId="2026700312" sldId="335"/>
-            <ac:spMk id="64" creationId="{CE4D542D-6BD1-BC02-BF12-773519161551}"/>
-          </ac:spMkLst>
-        </pc:spChg>
-        <pc:spChg chg="add del">
-          <ac:chgData name="saipasupuleti314@gmail.com" userId="35baae21e35ed96b" providerId="LiveId" clId="{DD9318BD-C817-49CB-810D-50BB27F8EEFA}" dt="2026-08-24T12:56:01.188" v="347" actId="478"/>
-          <ac:spMkLst>
-            <pc:docMk/>
-            <pc:sldMk cId="2026700312" sldId="335"/>
-            <ac:spMk id="65" creationId="{D2BA3368-99FB-185C-C755-C24A7247E692}"/>
-          </ac:spMkLst>
-        </pc:spChg>
-        <pc:spChg chg="add mod">
-          <ac:chgData name="saipasupuleti314@gmail.com" userId="35baae21e35ed96b" providerId="LiveId" clId="{DD9318BD-C817-49CB-810D-50BB27F8EEFA}" dt="2026-08-24T13:12:31.392" v="695" actId="20577"/>
-          <ac:spMkLst>
-            <pc:docMk/>
-            <pc:sldMk cId="2026700312" sldId="335"/>
-            <ac:spMk id="67" creationId="{371FC798-A912-6001-A7BD-8A147ADFA3B7}"/>
-          </ac:spMkLst>
-        </pc:spChg>
-        <pc:spChg chg="add del mod">
-          <ac:chgData name="saipasupuleti314@gmail.com" userId="35baae21e35ed96b" providerId="LiveId" clId="{DD9318BD-C817-49CB-810D-50BB27F8EEFA}" dt="2026-08-24T13:00:04.995" v="400" actId="478"/>
-          <ac:spMkLst>
-            <pc:docMk/>
-            <pc:sldMk cId="2026700312" sldId="335"/>
-            <ac:spMk id="80" creationId="{BD4F035A-9868-7A7F-09DB-C4E8B760379A}"/>
-          </ac:spMkLst>
-        </pc:spChg>
-        <pc:spChg chg="add mod">
-          <ac:chgData name="saipasupuleti314@gmail.com" userId="35baae21e35ed96b" providerId="LiveId" clId="{DD9318BD-C817-49CB-810D-50BB27F8EEFA}" dt="2026-08-24T13:12:37.268" v="696" actId="123"/>
-          <ac:spMkLst>
-            <pc:docMk/>
-            <pc:sldMk cId="2026700312" sldId="335"/>
-            <ac:spMk id="81" creationId="{ECD71292-0814-C0FB-F398-AA1BBBACD106}"/>
-          </ac:spMkLst>
-        </pc:spChg>
-        <pc:spChg chg="add del">
-          <ac:chgData name="saipasupuleti314@gmail.com" userId="35baae21e35ed96b" providerId="LiveId" clId="{DD9318BD-C817-49CB-810D-50BB27F8EEFA}" dt="2026-08-24T13:00:46.991" v="404" actId="478"/>
-          <ac:spMkLst>
-            <pc:docMk/>
-            <pc:sldMk cId="2026700312" sldId="335"/>
-            <ac:spMk id="82" creationId="{BB4F923C-09CE-E280-2776-520B6B061D33}"/>
-          </ac:spMkLst>
-        </pc:spChg>
-        <pc:spChg chg="add mod">
-          <ac:chgData name="saipasupuleti314@gmail.com" userId="35baae21e35ed96b" providerId="LiveId" clId="{DD9318BD-C817-49CB-810D-50BB27F8EEFA}" dt="2026-08-24T13:12:45.016" v="697" actId="123"/>
-          <ac:spMkLst>
-            <pc:docMk/>
-            <pc:sldMk cId="2026700312" sldId="335"/>
-            <ac:spMk id="84" creationId="{C2E550DC-1123-0707-9E41-A40DFF8F8C14}"/>
-          </ac:spMkLst>
-        </pc:spChg>
-        <pc:spChg chg="add mod">
-          <ac:chgData name="saipasupuleti314@gmail.com" userId="35baae21e35ed96b" providerId="LiveId" clId="{DD9318BD-C817-49CB-810D-50BB27F8EEFA}" dt="2026-08-24T13:12:55.030" v="698" actId="120"/>
-          <ac:spMkLst>
-            <pc:docMk/>
-            <pc:sldMk cId="2026700312" sldId="335"/>
-            <ac:spMk id="86" creationId="{618BB2AA-5F46-5241-F067-FE137B66FCFD}"/>
-          </ac:spMkLst>
-        </pc:spChg>
-        <pc:spChg chg="add mod">
-          <ac:chgData name="saipasupuleti314@gmail.com" userId="35baae21e35ed96b" providerId="LiveId" clId="{DD9318BD-C817-49CB-810D-50BB27F8EEFA}" dt="2026-08-24T13:13:01.141" v="699" actId="120"/>
-          <ac:spMkLst>
-            <pc:docMk/>
-            <pc:sldMk cId="2026700312" sldId="335"/>
-            <ac:spMk id="88" creationId="{276D2753-340F-8A13-5963-653A50C771B6}"/>
-          </ac:spMkLst>
-        </pc:spChg>
-        <pc:spChg chg="add mod">
-          <ac:chgData name="saipasupuleti314@gmail.com" userId="35baae21e35ed96b" providerId="LiveId" clId="{DD9318BD-C817-49CB-810D-50BB27F8EEFA}" dt="2026-08-24T13:07:51.956" v="576" actId="255"/>
-          <ac:spMkLst>
-            <pc:docMk/>
-            <pc:sldMk cId="2026700312" sldId="335"/>
-            <ac:spMk id="90" creationId="{DCCAF9F4-0700-84A6-B772-146F1DD1A4EE}"/>
-          </ac:spMkLst>
-        </pc:spChg>
-        <pc:spChg chg="add mod">
-          <ac:chgData name="saipasupuleti314@gmail.com" userId="35baae21e35ed96b" providerId="LiveId" clId="{DD9318BD-C817-49CB-810D-50BB27F8EEFA}" dt="2026-08-24T13:13:06.926" v="700" actId="120"/>
-          <ac:spMkLst>
-            <pc:docMk/>
-            <pc:sldMk cId="2026700312" sldId="335"/>
-            <ac:spMk id="92" creationId="{66DA8FE2-BECB-2D04-4562-A6AB10602C7A}"/>
-          </ac:spMkLst>
-        </pc:spChg>
-        <pc:spChg chg="add del">
-          <ac:chgData name="saipasupuleti314@gmail.com" userId="35baae21e35ed96b" providerId="LiveId" clId="{DD9318BD-C817-49CB-810D-50BB27F8EEFA}" dt="2026-08-24T13:04:24.334" v="466" actId="478"/>
-          <ac:spMkLst>
-            <pc:docMk/>
-            <pc:sldMk cId="2026700312" sldId="335"/>
-            <ac:spMk id="108" creationId="{BCB814A0-B8F8-4019-6385-B390674BD3CB}"/>
-          </ac:spMkLst>
-        </pc:spChg>
-        <pc:cxnChg chg="add del mod">
-          <ac:chgData name="saipasupuleti314@gmail.com" userId="35baae21e35ed96b" providerId="LiveId" clId="{DD9318BD-C817-49CB-810D-50BB27F8EEFA}" dt="2026-08-24T12:47:43.033" v="183" actId="478"/>
-          <ac:cxnSpMkLst>
-            <pc:docMk/>
-            <pc:sldMk cId="2026700312" sldId="335"/>
-            <ac:cxnSpMk id="6" creationId="{8D5C79B4-D9B0-0B9F-A21B-3F0909F7967B}"/>
-          </ac:cxnSpMkLst>
-        </pc:cxnChg>
-        <pc:cxnChg chg="del mod">
-          <ac:chgData name="saipasupuleti314@gmail.com" userId="35baae21e35ed96b" providerId="LiveId" clId="{DD9318BD-C817-49CB-810D-50BB27F8EEFA}" dt="2026-08-24T12:54:10.868" v="322" actId="478"/>
-          <ac:cxnSpMkLst>
-            <pc:docMk/>
-            <pc:sldMk cId="2026700312" sldId="335"/>
-            <ac:cxnSpMk id="13" creationId="{00000000-0000-0000-0000-000000000000}"/>
-          </ac:cxnSpMkLst>
-        </pc:cxnChg>
-        <pc:cxnChg chg="del mod">
-          <ac:chgData name="saipasupuleti314@gmail.com" userId="35baae21e35ed96b" providerId="LiveId" clId="{DD9318BD-C817-49CB-810D-50BB27F8EEFA}" dt="2026-08-24T12:54:00.488" v="318" actId="478"/>
-          <ac:cxnSpMkLst>
-            <pc:docMk/>
-            <pc:sldMk cId="2026700312" sldId="335"/>
-            <ac:cxnSpMk id="14" creationId="{00000000-0000-0000-0000-000000000000}"/>
-          </ac:cxnSpMkLst>
-        </pc:cxnChg>
-        <pc:cxnChg chg="del">
-          <ac:chgData name="saipasupuleti314@gmail.com" userId="35baae21e35ed96b" providerId="LiveId" clId="{DD9318BD-C817-49CB-810D-50BB27F8EEFA}" dt="2026-08-24T12:54:03.036" v="319" actId="478"/>
-          <ac:cxnSpMkLst>
-            <pc:docMk/>
-            <pc:sldMk cId="2026700312" sldId="335"/>
-            <ac:cxnSpMk id="15" creationId="{00000000-0000-0000-0000-000000000000}"/>
-          </ac:cxnSpMkLst>
-        </pc:cxnChg>
-        <pc:cxnChg chg="del">
-          <ac:chgData name="saipasupuleti314@gmail.com" userId="35baae21e35ed96b" providerId="LiveId" clId="{DD9318BD-C817-49CB-810D-50BB27F8EEFA}" dt="2026-08-24T12:54:13.460" v="323" actId="478"/>
-          <ac:cxnSpMkLst>
-            <pc:docMk/>
-            <pc:sldMk cId="2026700312" sldId="335"/>
-            <ac:cxnSpMk id="16" creationId="{00000000-0000-0000-0000-000000000000}"/>
-          </ac:cxnSpMkLst>
-        </pc:cxnChg>
-        <pc:cxnChg chg="del">
-          <ac:chgData name="saipasupuleti314@gmail.com" userId="35baae21e35ed96b" providerId="LiveId" clId="{DD9318BD-C817-49CB-810D-50BB27F8EEFA}" dt="2026-08-24T12:53:58.485" v="317" actId="478"/>
-          <ac:cxnSpMkLst>
-            <pc:docMk/>
-            <pc:sldMk cId="2026700312" sldId="335"/>
-            <ac:cxnSpMk id="23" creationId="{00000000-0000-0000-0000-000000000000}"/>
-          </ac:cxnSpMkLst>
-        </pc:cxnChg>
-        <pc:cxnChg chg="del">
-          <ac:chgData name="saipasupuleti314@gmail.com" userId="35baae21e35ed96b" providerId="LiveId" clId="{DD9318BD-C817-49CB-810D-50BB27F8EEFA}" dt="2026-08-24T12:53:56.071" v="316" actId="478"/>
-          <ac:cxnSpMkLst>
-            <pc:docMk/>
-            <pc:sldMk cId="2026700312" sldId="335"/>
-            <ac:cxnSpMk id="24" creationId="{00000000-0000-0000-0000-000000000000}"/>
-          </ac:cxnSpMkLst>
-        </pc:cxnChg>
-        <pc:cxnChg chg="del mod">
-          <ac:chgData name="saipasupuleti314@gmail.com" userId="35baae21e35ed96b" providerId="LiveId" clId="{DD9318BD-C817-49CB-810D-50BB27F8EEFA}" dt="2026-08-24T12:53:50.217" v="314" actId="478"/>
-          <ac:cxnSpMkLst>
-            <pc:docMk/>
-            <pc:sldMk cId="2026700312" sldId="335"/>
-            <ac:cxnSpMk id="29" creationId="{00000000-0000-0000-0000-000000000000}"/>
-          </ac:cxnSpMkLst>
-        </pc:cxnChg>
-        <pc:cxnChg chg="del mod">
-          <ac:chgData name="saipasupuleti314@gmail.com" userId="35baae21e35ed96b" providerId="LiveId" clId="{DD9318BD-C817-49CB-810D-50BB27F8EEFA}" dt="2026-08-24T12:53:52.405" v="315" actId="478"/>
-          <ac:cxnSpMkLst>
-            <pc:docMk/>
-            <pc:sldMk cId="2026700312" sldId="335"/>
-            <ac:cxnSpMk id="30" creationId="{00000000-0000-0000-0000-000000000000}"/>
-          </ac:cxnSpMkLst>
-        </pc:cxnChg>
-        <pc:cxnChg chg="del mod">
-          <ac:chgData name="saipasupuleti314@gmail.com" userId="35baae21e35ed96b" providerId="LiveId" clId="{DD9318BD-C817-49CB-810D-50BB27F8EEFA}" dt="2026-08-24T12:54:29.316" v="329" actId="478"/>
-          <ac:cxnSpMkLst>
-            <pc:docMk/>
-            <pc:sldMk cId="2026700312" sldId="335"/>
-            <ac:cxnSpMk id="34" creationId="{00000000-0000-0000-0000-000000000000}"/>
-          </ac:cxnSpMkLst>
-        </pc:cxnChg>
-        <pc:cxnChg chg="del mod">
-          <ac:chgData name="saipasupuleti314@gmail.com" userId="35baae21e35ed96b" providerId="LiveId" clId="{DD9318BD-C817-49CB-810D-50BB27F8EEFA}" dt="2026-08-24T12:54:25.075" v="327" actId="478"/>
-          <ac:cxnSpMkLst>
-            <pc:docMk/>
-            <pc:sldMk cId="2026700312" sldId="335"/>
-            <ac:cxnSpMk id="35" creationId="{00000000-0000-0000-0000-000000000000}"/>
-          </ac:cxnSpMkLst>
-        </pc:cxnChg>
-        <pc:cxnChg chg="del mod">
-          <ac:chgData name="saipasupuleti314@gmail.com" userId="35baae21e35ed96b" providerId="LiveId" clId="{DD9318BD-C817-49CB-810D-50BB27F8EEFA}" dt="2026-08-24T12:54:27.252" v="328" actId="478"/>
-          <ac:cxnSpMkLst>
-            <pc:docMk/>
-            <pc:sldMk cId="2026700312" sldId="335"/>
-            <ac:cxnSpMk id="36" creationId="{00000000-0000-0000-0000-000000000000}"/>
-          </ac:cxnSpMkLst>
-        </pc:cxnChg>
-        <pc:cxnChg chg="del mod">
-          <ac:chgData name="saipasupuleti314@gmail.com" userId="35baae21e35ed96b" providerId="LiveId" clId="{DD9318BD-C817-49CB-810D-50BB27F8EEFA}" dt="2026-08-24T12:54:20.674" v="325" actId="478"/>
-          <ac:cxnSpMkLst>
-            <pc:docMk/>
-            <pc:sldMk cId="2026700312" sldId="335"/>
-            <ac:cxnSpMk id="39" creationId="{00000000-0000-0000-0000-000000000000}"/>
-          </ac:cxnSpMkLst>
-        </pc:cxnChg>
-        <pc:cxnChg chg="del mod">
-          <ac:chgData name="saipasupuleti314@gmail.com" userId="35baae21e35ed96b" providerId="LiveId" clId="{DD9318BD-C817-49CB-810D-50BB27F8EEFA}" dt="2026-08-24T12:54:23.327" v="326" actId="478"/>
-          <ac:cxnSpMkLst>
-            <pc:docMk/>
-            <pc:sldMk cId="2026700312" sldId="335"/>
-            <ac:cxnSpMk id="40" creationId="{00000000-0000-0000-0000-000000000000}"/>
-          </ac:cxnSpMkLst>
-        </pc:cxnChg>
-        <pc:cxnChg chg="del">
-          <ac:chgData name="saipasupuleti314@gmail.com" userId="35baae21e35ed96b" providerId="LiveId" clId="{DD9318BD-C817-49CB-810D-50BB27F8EEFA}" dt="2026-08-24T12:54:17.538" v="324" actId="478"/>
-          <ac:cxnSpMkLst>
-            <pc:docMk/>
-            <pc:sldMk cId="2026700312" sldId="335"/>
-            <ac:cxnSpMk id="42" creationId="{00000000-0000-0000-0000-000000000000}"/>
-          </ac:cxnSpMkLst>
-        </pc:cxnChg>
-        <pc:cxnChg chg="add del mod">
-          <ac:chgData name="saipasupuleti314@gmail.com" userId="35baae21e35ed96b" providerId="LiveId" clId="{DD9318BD-C817-49CB-810D-50BB27F8EEFA}" dt="2026-08-24T12:47:40.286" v="182" actId="478"/>
-          <ac:cxnSpMkLst>
-            <pc:docMk/>
-            <pc:sldMk cId="2026700312" sldId="335"/>
-            <ac:cxnSpMk id="44" creationId="{98C38883-01ED-8189-CD64-BD4F7D4CD606}"/>
-          </ac:cxnSpMkLst>
-        </pc:cxnChg>
-        <pc:cxnChg chg="add">
-          <ac:chgData name="saipasupuleti314@gmail.com" userId="35baae21e35ed96b" providerId="LiveId" clId="{DD9318BD-C817-49CB-810D-50BB27F8EEFA}" dt="2026-08-24T12:48:22.932" v="190" actId="11529"/>
-          <ac:cxnSpMkLst>
-            <pc:docMk/>
-            <pc:sldMk cId="2026700312" sldId="335"/>
-            <ac:cxnSpMk id="49" creationId="{4A139EAB-4584-CBED-941B-4CC630955D83}"/>
-          </ac:cxnSpMkLst>
-        </pc:cxnChg>
-        <pc:cxnChg chg="add">
-          <ac:chgData name="saipasupuleti314@gmail.com" userId="35baae21e35ed96b" providerId="LiveId" clId="{DD9318BD-C817-49CB-810D-50BB27F8EEFA}" dt="2026-08-24T12:48:31.813" v="191" actId="11529"/>
-          <ac:cxnSpMkLst>
-            <pc:docMk/>
-            <pc:sldMk cId="2026700312" sldId="335"/>
-            <ac:cxnSpMk id="51" creationId="{EED3954B-FA90-5C36-F417-E3300309062D}"/>
-          </ac:cxnSpMkLst>
-        </pc:cxnChg>
-        <pc:cxnChg chg="add mod">
-          <ac:chgData name="saipasupuleti314@gmail.com" userId="35baae21e35ed96b" providerId="LiveId" clId="{DD9318BD-C817-49CB-810D-50BB27F8EEFA}" dt="2026-08-24T12:52:46.482" v="301" actId="13822"/>
-          <ac:cxnSpMkLst>
-            <pc:docMk/>
-            <pc:sldMk cId="2026700312" sldId="335"/>
-            <ac:cxnSpMk id="53" creationId="{6A0EDA84-D2C9-A836-0FDA-DF1E72A87C47}"/>
-          </ac:cxnSpMkLst>
-        </pc:cxnChg>
-        <pc:cxnChg chg="add del mod">
-          <ac:chgData name="saipasupuleti314@gmail.com" userId="35baae21e35ed96b" providerId="LiveId" clId="{DD9318BD-C817-49CB-810D-50BB27F8EEFA}" dt="2026-08-24T12:53:33.862" v="311" actId="478"/>
-          <ac:cxnSpMkLst>
-            <pc:docMk/>
-            <pc:sldMk cId="2026700312" sldId="335"/>
-            <ac:cxnSpMk id="55" creationId="{5609CC74-85D0-EDDE-F5CD-0B74105B34E1}"/>
-          </ac:cxnSpMkLst>
-        </pc:cxnChg>
-        <pc:cxnChg chg="add mod">
-          <ac:chgData name="saipasupuleti314@gmail.com" userId="35baae21e35ed96b" providerId="LiveId" clId="{DD9318BD-C817-49CB-810D-50BB27F8EEFA}" dt="2026-08-24T12:53:08.540" v="305" actId="13822"/>
-          <ac:cxnSpMkLst>
-            <pc:docMk/>
-            <pc:sldMk cId="2026700312" sldId="335"/>
-            <ac:cxnSpMk id="57" creationId="{284176A3-04BC-17E1-8C20-2BDE98EDAB92}"/>
-          </ac:cxnSpMkLst>
-        </pc:cxnChg>
-        <pc:cxnChg chg="add del mod">
-          <ac:chgData name="saipasupuleti314@gmail.com" userId="35baae21e35ed96b" providerId="LiveId" clId="{DD9318BD-C817-49CB-810D-50BB27F8EEFA}" dt="2026-08-24T12:53:23.261" v="308" actId="478"/>
-          <ac:cxnSpMkLst>
-            <pc:docMk/>
-            <pc:sldMk cId="2026700312" sldId="335"/>
-            <ac:cxnSpMk id="59" creationId="{51BBE488-604D-4A40-4573-C7FC3619F0D1}"/>
-          </ac:cxnSpMkLst>
-        </pc:cxnChg>
-        <pc:cxnChg chg="add mod">
-          <ac:chgData name="saipasupuleti314@gmail.com" userId="35baae21e35ed96b" providerId="LiveId" clId="{DD9318BD-C817-49CB-810D-50BB27F8EEFA}" dt="2026-08-24T12:53:31.201" v="310" actId="13822"/>
-          <ac:cxnSpMkLst>
-            <pc:docMk/>
-            <pc:sldMk cId="2026700312" sldId="335"/>
-            <ac:cxnSpMk id="61" creationId="{F4D1A526-DFFB-ABB2-A6B8-FD0A0C132059}"/>
-          </ac:cxnSpMkLst>
-        </pc:cxnChg>
-        <pc:cxnChg chg="add mod">
-          <ac:chgData name="saipasupuleti314@gmail.com" userId="35baae21e35ed96b" providerId="LiveId" clId="{DD9318BD-C817-49CB-810D-50BB27F8EEFA}" dt="2026-08-24T12:53:43.672" v="313" actId="13822"/>
-          <ac:cxnSpMkLst>
-            <pc:docMk/>
-            <pc:sldMk cId="2026700312" sldId="335"/>
-            <ac:cxnSpMk id="63" creationId="{EDC9AFCE-E272-F54D-F34E-5225CBD0B864}"/>
-          </ac:cxnSpMkLst>
-        </pc:cxnChg>
-        <pc:cxnChg chg="add mod">
-          <ac:chgData name="saipasupuleti314@gmail.com" userId="35baae21e35ed96b" providerId="LiveId" clId="{DD9318BD-C817-49CB-810D-50BB27F8EEFA}" dt="2026-08-24T12:57:36.001" v="383" actId="13822"/>
-          <ac:cxnSpMkLst>
-            <pc:docMk/>
-            <pc:sldMk cId="2026700312" sldId="335"/>
-            <ac:cxnSpMk id="69" creationId="{D059A8BD-F4DC-8866-78A8-9285AD8B9369}"/>
-          </ac:cxnSpMkLst>
-        </pc:cxnChg>
-        <pc:cxnChg chg="add mod">
-          <ac:chgData name="saipasupuleti314@gmail.com" userId="35baae21e35ed96b" providerId="LiveId" clId="{DD9318BD-C817-49CB-810D-50BB27F8EEFA}" dt="2026-08-24T12:58:00.043" v="385" actId="13822"/>
-          <ac:cxnSpMkLst>
-            <pc:docMk/>
-            <pc:sldMk cId="2026700312" sldId="335"/>
-            <ac:cxnSpMk id="71" creationId="{10DE129B-5C47-94EF-0A77-4E2B90568B3A}"/>
-          </ac:cxnSpMkLst>
-        </pc:cxnChg>
-        <pc:cxnChg chg="add mod">
-          <ac:chgData name="saipasupuleti314@gmail.com" userId="35baae21e35ed96b" providerId="LiveId" clId="{DD9318BD-C817-49CB-810D-50BB27F8EEFA}" dt="2026-08-24T13:10:09.478" v="651" actId="1076"/>
-          <ac:cxnSpMkLst>
-            <pc:docMk/>
-            <pc:sldMk cId="2026700312" sldId="335"/>
-            <ac:cxnSpMk id="73" creationId="{E1FA370C-D82A-936C-192B-FBE2F590F935}"/>
-          </ac:cxnSpMkLst>
-        </pc:cxnChg>
-        <pc:cxnChg chg="add mod">
-          <ac:chgData name="saipasupuleti314@gmail.com" userId="35baae21e35ed96b" providerId="LiveId" clId="{DD9318BD-C817-49CB-810D-50BB27F8EEFA}" dt="2026-08-24T12:58:49.607" v="392" actId="13822"/>
-          <ac:cxnSpMkLst>
-            <pc:docMk/>
-            <pc:sldMk cId="2026700312" sldId="335"/>
-            <ac:cxnSpMk id="75" creationId="{179E09D1-F5CB-B6B1-8433-DD3F5DE07215}"/>
-          </ac:cxnSpMkLst>
-        </pc:cxnChg>
-        <pc:cxnChg chg="add mod">
-          <ac:chgData name="saipasupuleti314@gmail.com" userId="35baae21e35ed96b" providerId="LiveId" clId="{DD9318BD-C817-49CB-810D-50BB27F8EEFA}" dt="2026-08-24T12:58:44.671" v="391" actId="13822"/>
-          <ac:cxnSpMkLst>
-            <pc:docMk/>
-            <pc:sldMk cId="2026700312" sldId="335"/>
-            <ac:cxnSpMk id="77" creationId="{AE974CAC-F0B4-16B4-A8EA-F97BF19F039A}"/>
-          </ac:cxnSpMkLst>
-        </pc:cxnChg>
-        <pc:cxnChg chg="add mod">
-          <ac:chgData name="saipasupuleti314@gmail.com" userId="35baae21e35ed96b" providerId="LiveId" clId="{DD9318BD-C817-49CB-810D-50BB27F8EEFA}" dt="2026-08-24T12:59:02.354" v="394" actId="13822"/>
-          <ac:cxnSpMkLst>
-            <pc:docMk/>
-            <pc:sldMk cId="2026700312" sldId="335"/>
-            <ac:cxnSpMk id="79" creationId="{A6AA7C59-E17E-773E-7AAB-CEB81FDC86A1}"/>
-          </ac:cxnSpMkLst>
-        </pc:cxnChg>
-        <pc:cxnChg chg="add mod">
-          <ac:chgData name="saipasupuleti314@gmail.com" userId="35baae21e35ed96b" providerId="LiveId" clId="{DD9318BD-C817-49CB-810D-50BB27F8EEFA}" dt="2026-08-24T13:01:40.089" v="416" actId="13822"/>
-          <ac:cxnSpMkLst>
-            <pc:docMk/>
-            <pc:sldMk cId="2026700312" sldId="335"/>
-            <ac:cxnSpMk id="94" creationId="{83063A4D-8D5E-781E-62EB-B36F2ED4E5C7}"/>
-          </ac:cxnSpMkLst>
-        </pc:cxnChg>
-        <pc:cxnChg chg="add">
-          <ac:chgData name="saipasupuleti314@gmail.com" userId="35baae21e35ed96b" providerId="LiveId" clId="{DD9318BD-C817-49CB-810D-50BB27F8EEFA}" dt="2026-08-24T13:01:48.720" v="417" actId="11529"/>
-          <ac:cxnSpMkLst>
-            <pc:docMk/>
-            <pc:sldMk cId="2026700312" sldId="335"/>
-            <ac:cxnSpMk id="96" creationId="{F214F75D-C811-5B50-1FDE-CF56CD70436E}"/>
-          </ac:cxnSpMkLst>
-        </pc:cxnChg>
-        <pc:cxnChg chg="add mod">
-          <ac:chgData name="saipasupuleti314@gmail.com" userId="35baae21e35ed96b" providerId="LiveId" clId="{DD9318BD-C817-49CB-810D-50BB27F8EEFA}" dt="2026-08-24T13:12:28" v="694" actId="1076"/>
-          <ac:cxnSpMkLst>
-            <pc:docMk/>
-            <pc:sldMk cId="2026700312" sldId="335"/>
-            <ac:cxnSpMk id="98" creationId="{7B35E031-AF14-CA83-C2BE-A392A571F0E5}"/>
-          </ac:cxnSpMkLst>
-        </pc:cxnChg>
-        <pc:cxnChg chg="add mod">
-          <ac:chgData name="saipasupuleti314@gmail.com" userId="35baae21e35ed96b" providerId="LiveId" clId="{DD9318BD-C817-49CB-810D-50BB27F8EEFA}" dt="2026-08-24T13:06:29.052" v="496" actId="1037"/>
-          <ac:cxnSpMkLst>
-            <pc:docMk/>
-            <pc:sldMk cId="2026700312" sldId="335"/>
-            <ac:cxnSpMk id="100" creationId="{71C8CAD7-C285-9EAD-DAD0-CE5522035331}"/>
-          </ac:cxnSpMkLst>
-        </pc:cxnChg>
-        <pc:cxnChg chg="add mod">
-          <ac:chgData name="saipasupuleti314@gmail.com" userId="35baae21e35ed96b" providerId="LiveId" clId="{DD9318BD-C817-49CB-810D-50BB27F8EEFA}" dt="2026-08-24T13:02:33.130" v="423" actId="13822"/>
-          <ac:cxnSpMkLst>
-            <pc:docMk/>
-            <pc:sldMk cId="2026700312" sldId="335"/>
-            <ac:cxnSpMk id="102" creationId="{C3A6DFBE-7A90-9DB8-6B00-AA3323A79148}"/>
-          </ac:cxnSpMkLst>
-        </pc:cxnChg>
-        <pc:cxnChg chg="add mod">
-          <ac:chgData name="saipasupuleti314@gmail.com" userId="35baae21e35ed96b" providerId="LiveId" clId="{DD9318BD-C817-49CB-810D-50BB27F8EEFA}" dt="2026-08-24T13:02:41.356" v="425" actId="13822"/>
-          <ac:cxnSpMkLst>
-            <pc:docMk/>
-            <pc:sldMk cId="2026700312" sldId="335"/>
-            <ac:cxnSpMk id="104" creationId="{CD94A741-21CF-DFC6-E8B6-7B11B96B8342}"/>
-          </ac:cxnSpMkLst>
-        </pc:cxnChg>
-        <pc:cxnChg chg="add mod">
-          <ac:chgData name="saipasupuleti314@gmail.com" userId="35baae21e35ed96b" providerId="LiveId" clId="{DD9318BD-C817-49CB-810D-50BB27F8EEFA}" dt="2026-08-24T13:02:52.989" v="427" actId="13822"/>
-          <ac:cxnSpMkLst>
-            <pc:docMk/>
-            <pc:sldMk cId="2026700312" sldId="335"/>
-            <ac:cxnSpMk id="106" creationId="{F6E8806F-6F63-F0E0-0841-22CBD5450CD1}"/>
-          </ac:cxnSpMkLst>
-        </pc:cxnChg>
-      </pc:sldChg>
-    </pc:docChg>
-  </pc:docChgLst>
-</pc:chgInfo>
-</file>
-
 <file path=ppt/notesMasters/notesMaster1.xml><?xml version="1.0" encoding="utf-8"?>
 <p:notesMaster xmlns:a="http://schemas.openxmlformats.org/drawingml/2006/main" xmlns:r="http://schemas.openxmlformats.org/officeDocument/2006/relationships" xmlns:p="http://schemas.openxmlformats.org/presentationml/2006/main">
   <p:cSld>
@@ -990,7 +231,7 @@
           <a:p>
             <a:fld id="{44B65459-4C01-9248-BDAA-F28591FAF6F5}" type="datetimeFigureOut">
               <a:rPr lang="en-US" smtClean="0"/>
-              <a:t>8/25/2026</a:t>
+              <a:t>10/27/2026</a:t>
             </a:fld>
             <a:endParaRPr lang="en-US"/>
           </a:p>
@@ -1304,6 +545,90 @@
 </p:notes>
 </file>
 
+<file path=ppt/notesSlides/notesSlide2.xml><?xml version="1.0" encoding="utf-8"?>
+<p:notes xmlns:a="http://schemas.openxmlformats.org/drawingml/2006/main" xmlns:r="http://schemas.openxmlformats.org/officeDocument/2006/relationships" xmlns:p="http://schemas.openxmlformats.org/presentationml/2006/main">
+  <p:cSld>
+    <p:spTree>
+      <p:nvGrpSpPr>
+        <p:cNvPr id="1" name=""/>
+        <p:cNvGrpSpPr/>
+        <p:nvPr/>
+      </p:nvGrpSpPr>
+      <p:grpSpPr>
+        <a:xfrm>
+          <a:off x="0" y="0"/>
+          <a:ext cx="0" cy="0"/>
+          <a:chOff x="0" y="0"/>
+          <a:chExt cx="0" cy="0"/>
+        </a:xfrm>
+      </p:grpSpPr>
+      <p:sp>
+        <p:nvSpPr>
+          <p:cNvPr id="2" name="Slide Image Placeholder 1"/>
+          <p:cNvSpPr>
+            <a:spLocks noGrp="1" noRot="1" noChangeAspect="1"/>
+          </p:cNvSpPr>
+          <p:nvPr>
+            <p:ph type="sldImg"/>
+          </p:nvPr>
+        </p:nvSpPr>
+        <p:spPr/>
+      </p:sp>
+      <p:sp>
+        <p:nvSpPr>
+          <p:cNvPr id="3" name="Notes Placeholder 2"/>
+          <p:cNvSpPr>
+            <a:spLocks noGrp="1"/>
+          </p:cNvSpPr>
+          <p:nvPr>
+            <p:ph type="body" idx="1"/>
+          </p:nvPr>
+        </p:nvSpPr>
+        <p:spPr/>
+        <p:txBody>
+          <a:bodyPr/>
+          <a:lstStyle/>
+          <a:p>
+            <a:endParaRPr lang="en-IN" dirty="0"/>
+          </a:p>
+        </p:txBody>
+      </p:sp>
+      <p:sp>
+        <p:nvSpPr>
+          <p:cNvPr id="4" name="Slide Number Placeholder 3"/>
+          <p:cNvSpPr>
+            <a:spLocks noGrp="1"/>
+          </p:cNvSpPr>
+          <p:nvPr>
+            <p:ph type="sldNum" sz="quarter" idx="5"/>
+          </p:nvPr>
+        </p:nvSpPr>
+        <p:spPr/>
+        <p:txBody>
+          <a:bodyPr/>
+          <a:lstStyle/>
+          <a:p>
+            <a:fld id="{69327042-6B61-B148-8485-8BBBFAA13D24}" type="slidenum">
+              <a:rPr lang="en-US" smtClean="0"/>
+              <a:t>5</a:t>
+            </a:fld>
+            <a:endParaRPr lang="en-US"/>
+          </a:p>
+        </p:txBody>
+      </p:sp>
+    </p:spTree>
+    <p:extLst>
+      <p:ext uri="{BB962C8B-B14F-4D97-AF65-F5344CB8AC3E}">
+        <p14:creationId xmlns:p14="http://schemas.microsoft.com/office/powerpoint/2010/main" val="1832547980"/>
+      </p:ext>
+    </p:extLst>
+  </p:cSld>
+  <p:clrMapOvr>
+    <a:masterClrMapping/>
+  </p:clrMapOvr>
+</p:notes>
+</file>
+
 <file path=ppt/slideLayouts/slideLayout1.xml><?xml version="1.0" encoding="utf-8"?>
 <p:sldLayout xmlns:a="http://schemas.openxmlformats.org/drawingml/2006/main" xmlns:r="http://schemas.openxmlformats.org/officeDocument/2006/relationships" xmlns:p="http://schemas.openxmlformats.org/presentationml/2006/main" type="title" preserve="1">
   <p:cSld name="Title Slide">
@@ -1545,7 +870,7 @@
           <a:p>
             <a:fld id="{23B885CB-12B0-4AB7-A523-856A576656C9}" type="datetime1">
               <a:rPr lang="en-US" smtClean="0"/>
-              <a:t>8/25/2026</a:t>
+              <a:t>10/27/2026</a:t>
             </a:fld>
             <a:endParaRPr lang="en-US" dirty="0"/>
           </a:p>
@@ -1670,7 +995,7 @@
           <a:p>
             <a:fld id="{C20F1802-9C65-458A-8FBF-F4B557FF2340}" type="datetime1">
               <a:rPr lang="en-US" smtClean="0"/>
-              <a:t>8/25/2026</a:t>
+              <a:t>10/27/2026</a:t>
             </a:fld>
             <a:endParaRPr lang="en-US" dirty="0"/>
           </a:p>
@@ -1891,7 +1216,7 @@
           <a:p>
             <a:fld id="{E761D253-940C-44B0-8F51-8C8A37AEAF73}" type="datetime1">
               <a:rPr lang="en-US" smtClean="0"/>
-              <a:t>8/25/2026</a:t>
+              <a:t>10/27/2026</a:t>
             </a:fld>
             <a:endParaRPr lang="en-US" dirty="0"/>
           </a:p>
@@ -2159,7 +1484,7 @@
           <a:p>
             <a:fld id="{022B5FF2-DAF6-4310-9A1D-797D39C1E342}" type="datetime1">
               <a:rPr lang="en-US" smtClean="0"/>
-              <a:t>8/25/2026</a:t>
+              <a:t>10/27/2026</a:t>
             </a:fld>
             <a:endParaRPr lang="en-US" dirty="0"/>
           </a:p>
@@ -3105,7 +2430,7 @@
           <a:p>
             <a:r>
               <a:rPr lang="en-US" dirty="0"/>
-              <a:t>N.AKHILA, </a:t>
+              <a:t>T.VIJAYA LAKSHMI, </a:t>
             </a:r>
             <a:r>
               <a:rPr lang="en-US" dirty="0" err="1"/>
@@ -3171,6 +2496,1340 @@
       </p:grpSpPr>
       <p:sp>
         <p:nvSpPr>
+          <p:cNvPr id="2" name="Date Placeholder 1">
+            <a:extLst>
+              <a:ext uri="{FF2B5EF4-FFF2-40B4-BE49-F238E27FC236}">
+                <a16:creationId xmlns:a16="http://schemas.microsoft.com/office/drawing/2014/main" id="{2C42B5A3-D650-70BB-A332-4B2F147456A8}"/>
+              </a:ext>
+            </a:extLst>
+          </p:cNvPr>
+          <p:cNvSpPr>
+            <a:spLocks noGrp="1"/>
+          </p:cNvSpPr>
+          <p:nvPr>
+            <p:ph type="dt" sz="half" idx="10"/>
+          </p:nvPr>
+        </p:nvSpPr>
+        <p:spPr/>
+        <p:txBody>
+          <a:bodyPr/>
+          <a:lstStyle/>
+          <a:p>
+            <a:fld id="{E761D253-940C-44B0-8F51-8C8A37AEAF73}" type="datetime1">
+              <a:rPr lang="en-US" smtClean="0"/>
+              <a:t>10/27/2026</a:t>
+            </a:fld>
+            <a:endParaRPr lang="en-US" dirty="0"/>
+          </a:p>
+        </p:txBody>
+      </p:sp>
+      <p:sp>
+        <p:nvSpPr>
+          <p:cNvPr id="3" name="Footer Placeholder 2">
+            <a:extLst>
+              <a:ext uri="{FF2B5EF4-FFF2-40B4-BE49-F238E27FC236}">
+                <a16:creationId xmlns:a16="http://schemas.microsoft.com/office/drawing/2014/main" id="{E6BD8988-3AA7-C2F9-EF72-5C42B40107B7}"/>
+              </a:ext>
+            </a:extLst>
+          </p:cNvPr>
+          <p:cNvSpPr>
+            <a:spLocks noGrp="1"/>
+          </p:cNvSpPr>
+          <p:nvPr>
+            <p:ph type="ftr" sz="quarter" idx="11"/>
+          </p:nvPr>
+        </p:nvSpPr>
+        <p:spPr/>
+        <p:txBody>
+          <a:bodyPr/>
+          <a:lstStyle/>
+          <a:p>
+            <a:r>
+              <a:rPr lang="en-US"/>
+              <a:t>PBL Course Name: Object Oriented Programming through C++(2501CS08)     REVIEW-1</a:t>
+            </a:r>
+            <a:endParaRPr lang="en-US" dirty="0"/>
+          </a:p>
+        </p:txBody>
+      </p:sp>
+      <p:sp>
+        <p:nvSpPr>
+          <p:cNvPr id="4" name="Slide Number Placeholder 3">
+            <a:extLst>
+              <a:ext uri="{FF2B5EF4-FFF2-40B4-BE49-F238E27FC236}">
+                <a16:creationId xmlns:a16="http://schemas.microsoft.com/office/drawing/2014/main" id="{3169ED71-5A27-3842-28E7-2577B1189F9D}"/>
+              </a:ext>
+            </a:extLst>
+          </p:cNvPr>
+          <p:cNvSpPr>
+            <a:spLocks noGrp="1"/>
+          </p:cNvSpPr>
+          <p:nvPr>
+            <p:ph type="sldNum" sz="quarter" idx="12"/>
+          </p:nvPr>
+        </p:nvSpPr>
+        <p:spPr/>
+        <p:txBody>
+          <a:bodyPr/>
+          <a:lstStyle/>
+          <a:p>
+            <a:fld id="{D9C5B093-D3DD-4808-813A-F58BF8E67773}" type="slidenum">
+              <a:rPr lang="en-IN" smtClean="0"/>
+              <a:t>10</a:t>
+            </a:fld>
+            <a:endParaRPr lang="en-IN" dirty="0"/>
+          </a:p>
+        </p:txBody>
+      </p:sp>
+      <p:sp>
+        <p:nvSpPr>
+          <p:cNvPr id="5" name="TextBox 4">
+            <a:extLst>
+              <a:ext uri="{FF2B5EF4-FFF2-40B4-BE49-F238E27FC236}">
+                <a16:creationId xmlns:a16="http://schemas.microsoft.com/office/drawing/2014/main" id="{40A2C01C-A4B5-1750-6839-041653EA34FD}"/>
+              </a:ext>
+            </a:extLst>
+          </p:cNvPr>
+          <p:cNvSpPr txBox="1"/>
+          <p:nvPr/>
+        </p:nvSpPr>
+        <p:spPr>
+          <a:xfrm>
+            <a:off x="4419600" y="609600"/>
+            <a:ext cx="4953000" cy="1323439"/>
+          </a:xfrm>
+          <a:prstGeom prst="rect">
+            <a:avLst/>
+          </a:prstGeom>
+          <a:noFill/>
+        </p:spPr>
+        <p:txBody>
+          <a:bodyPr wrap="square" rtlCol="0">
+            <a:spAutoFit/>
+          </a:bodyPr>
+          <a:lstStyle/>
+          <a:p>
+            <a:r>
+              <a:rPr lang="en-GB" sz="4000" dirty="0">
+                <a:solidFill>
+                  <a:srgbClr val="0000FF"/>
+                </a:solidFill>
+                <a:latin typeface="Maiandra GD" panose="020E0502030308020204" pitchFamily="34" charset="0"/>
+                <a:cs typeface="Aharoni" panose="02010803020104030203" pitchFamily="2" charset="-79"/>
+              </a:rPr>
+              <a:t>Implementation </a:t>
+            </a:r>
+          </a:p>
+          <a:p>
+            <a:endParaRPr lang="en-IN" sz="4000" dirty="0"/>
+          </a:p>
+        </p:txBody>
+      </p:sp>
+      <p:sp>
+        <p:nvSpPr>
+          <p:cNvPr id="7" name="TextBox 6">
+            <a:extLst>
+              <a:ext uri="{FF2B5EF4-FFF2-40B4-BE49-F238E27FC236}">
+                <a16:creationId xmlns:a16="http://schemas.microsoft.com/office/drawing/2014/main" id="{0A536419-4E33-61C1-F927-F4991608A1BD}"/>
+              </a:ext>
+            </a:extLst>
+          </p:cNvPr>
+          <p:cNvSpPr txBox="1"/>
+          <p:nvPr/>
+        </p:nvSpPr>
+        <p:spPr>
+          <a:xfrm>
+            <a:off x="1066800" y="1211567"/>
+            <a:ext cx="10744200" cy="4930581"/>
+          </a:xfrm>
+          <a:prstGeom prst="rect">
+            <a:avLst/>
+          </a:prstGeom>
+          <a:noFill/>
+        </p:spPr>
+        <p:txBody>
+          <a:bodyPr wrap="square">
+            <a:spAutoFit/>
+          </a:bodyPr>
+          <a:lstStyle/>
+          <a:p>
+            <a:pPr marL="342900" lvl="0" indent="-342900">
+              <a:lnSpc>
+                <a:spcPct val="200000"/>
+              </a:lnSpc>
+              <a:buFont typeface="Arial" panose="020B0604020202020204" pitchFamily="34" charset="0"/>
+              <a:buChar char="•"/>
+            </a:pPr>
+            <a:r>
+              <a:rPr lang="en-IN" sz="2000" dirty="0"/>
+              <a:t>Developed using </a:t>
+            </a:r>
+            <a:r>
+              <a:rPr lang="en-IN" sz="2000" b="1" dirty="0"/>
+              <a:t>C++</a:t>
+            </a:r>
+            <a:r>
+              <a:rPr lang="en-IN" sz="2000" dirty="0"/>
+              <a:t>.</a:t>
+            </a:r>
+          </a:p>
+          <a:p>
+            <a:pPr marL="342900" lvl="0" indent="-342900">
+              <a:lnSpc>
+                <a:spcPct val="200000"/>
+              </a:lnSpc>
+              <a:buFont typeface="Arial" panose="020B0604020202020204" pitchFamily="34" charset="0"/>
+              <a:buChar char="•"/>
+            </a:pPr>
+            <a:r>
+              <a:rPr lang="en-IN" sz="2000" dirty="0"/>
+              <a:t>Uses a </a:t>
+            </a:r>
+            <a:r>
+              <a:rPr lang="en-IN" sz="2000" b="1" dirty="0"/>
+              <a:t>Student class</a:t>
+            </a:r>
+            <a:r>
+              <a:rPr lang="en-IN" sz="2000" dirty="0"/>
+              <a:t> to store student information.</a:t>
+            </a:r>
+          </a:p>
+          <a:p>
+            <a:pPr marL="342900" lvl="0" indent="-342900">
+              <a:lnSpc>
+                <a:spcPct val="200000"/>
+              </a:lnSpc>
+              <a:buFont typeface="Arial" panose="020B0604020202020204" pitchFamily="34" charset="0"/>
+              <a:buChar char="•"/>
+            </a:pPr>
+            <a:r>
+              <a:rPr lang="en-IN" sz="2000" dirty="0"/>
+              <a:t>Uses objects to represent individual students.</a:t>
+            </a:r>
+          </a:p>
+          <a:p>
+            <a:pPr marL="342900" lvl="0" indent="-342900">
+              <a:lnSpc>
+                <a:spcPct val="200000"/>
+              </a:lnSpc>
+              <a:buFont typeface="Arial" panose="020B0604020202020204" pitchFamily="34" charset="0"/>
+              <a:buChar char="•"/>
+            </a:pPr>
+            <a:r>
+              <a:rPr lang="en-IN" sz="2000" dirty="0"/>
+              <a:t>Stores multiple student records using an array of objects.</a:t>
+            </a:r>
+          </a:p>
+          <a:p>
+            <a:pPr marL="342900" lvl="0" indent="-342900">
+              <a:lnSpc>
+                <a:spcPct val="200000"/>
+              </a:lnSpc>
+              <a:buFont typeface="Arial" panose="020B0604020202020204" pitchFamily="34" charset="0"/>
+              <a:buChar char="•"/>
+            </a:pPr>
+            <a:r>
+              <a:rPr lang="en-IN" sz="2000" dirty="0"/>
+              <a:t>A menu-driven </a:t>
+            </a:r>
+            <a:r>
+              <a:rPr lang="en-IN" sz="2000" dirty="0">
+                <a:latin typeface="+mn-lt"/>
+              </a:rPr>
+              <a:t>main()</a:t>
+            </a:r>
+            <a:r>
+              <a:rPr lang="en-IN" sz="2000" dirty="0"/>
+              <a:t> function controls the system.</a:t>
+            </a:r>
+          </a:p>
+          <a:p>
+            <a:pPr marL="342900" lvl="0" indent="-342900">
+              <a:lnSpc>
+                <a:spcPct val="200000"/>
+              </a:lnSpc>
+              <a:buFont typeface="Arial" panose="020B0604020202020204" pitchFamily="34" charset="0"/>
+              <a:buChar char="•"/>
+            </a:pPr>
+            <a:r>
+              <a:rPr lang="en-IN" sz="2000" dirty="0"/>
+              <a:t>Result calculations are performed automatically.</a:t>
+            </a:r>
+          </a:p>
+          <a:p>
+            <a:pPr marL="342900" lvl="0" indent="-342900">
+              <a:lnSpc>
+                <a:spcPct val="200000"/>
+              </a:lnSpc>
+              <a:buFont typeface="Arial" panose="020B0604020202020204" pitchFamily="34" charset="0"/>
+              <a:buChar char="•"/>
+            </a:pPr>
+            <a:r>
+              <a:rPr lang="en-IN" sz="2000" dirty="0"/>
+              <a:t>Input validation is used for marks and menu choices.</a:t>
+            </a:r>
+          </a:p>
+          <a:p>
+            <a:pPr marL="342900" lvl="0" indent="-342900">
+              <a:lnSpc>
+                <a:spcPct val="200000"/>
+              </a:lnSpc>
+              <a:buFont typeface="Arial" panose="020B0604020202020204" pitchFamily="34" charset="0"/>
+              <a:buChar char="•"/>
+            </a:pPr>
+            <a:r>
+              <a:rPr lang="en-IN" sz="2000" dirty="0"/>
+              <a:t>Search is performed using the student roll number.</a:t>
+            </a:r>
+          </a:p>
+        </p:txBody>
+      </p:sp>
+    </p:spTree>
+    <p:extLst>
+      <p:ext uri="{BB962C8B-B14F-4D97-AF65-F5344CB8AC3E}">
+        <p14:creationId xmlns:p14="http://schemas.microsoft.com/office/powerpoint/2010/main" val="974908647"/>
+      </p:ext>
+    </p:extLst>
+  </p:cSld>
+  <p:clrMapOvr>
+    <a:masterClrMapping/>
+  </p:clrMapOvr>
+</p:sld>
+</file>
+
+<file path=ppt/slides/slide11.xml><?xml version="1.0" encoding="utf-8"?>
+<p:sld xmlns:a="http://schemas.openxmlformats.org/drawingml/2006/main" xmlns:r="http://schemas.openxmlformats.org/officeDocument/2006/relationships" xmlns:p="http://schemas.openxmlformats.org/presentationml/2006/main">
+  <p:cSld>
+    <p:spTree>
+      <p:nvGrpSpPr>
+        <p:cNvPr id="1" name=""/>
+        <p:cNvGrpSpPr/>
+        <p:nvPr/>
+      </p:nvGrpSpPr>
+      <p:grpSpPr>
+        <a:xfrm>
+          <a:off x="0" y="0"/>
+          <a:ext cx="0" cy="0"/>
+          <a:chOff x="0" y="0"/>
+          <a:chExt cx="0" cy="0"/>
+        </a:xfrm>
+      </p:grpSpPr>
+      <p:sp>
+        <p:nvSpPr>
+          <p:cNvPr id="2" name="Date Placeholder 1">
+            <a:extLst>
+              <a:ext uri="{FF2B5EF4-FFF2-40B4-BE49-F238E27FC236}">
+                <a16:creationId xmlns:a16="http://schemas.microsoft.com/office/drawing/2014/main" id="{59FBC04B-EECD-63D2-1A06-A0F8C3BA2C68}"/>
+              </a:ext>
+            </a:extLst>
+          </p:cNvPr>
+          <p:cNvSpPr>
+            <a:spLocks noGrp="1"/>
+          </p:cNvSpPr>
+          <p:nvPr>
+            <p:ph type="dt" sz="half" idx="10"/>
+          </p:nvPr>
+        </p:nvSpPr>
+        <p:spPr/>
+        <p:txBody>
+          <a:bodyPr/>
+          <a:lstStyle/>
+          <a:p>
+            <a:fld id="{E761D253-940C-44B0-8F51-8C8A37AEAF73}" type="datetime1">
+              <a:rPr lang="en-US" smtClean="0"/>
+              <a:t>10/27/2026</a:t>
+            </a:fld>
+            <a:endParaRPr lang="en-US" dirty="0"/>
+          </a:p>
+        </p:txBody>
+      </p:sp>
+      <p:sp>
+        <p:nvSpPr>
+          <p:cNvPr id="3" name="Footer Placeholder 2">
+            <a:extLst>
+              <a:ext uri="{FF2B5EF4-FFF2-40B4-BE49-F238E27FC236}">
+                <a16:creationId xmlns:a16="http://schemas.microsoft.com/office/drawing/2014/main" id="{9741BCE3-D0CE-D4CD-B7FE-4245FF7BB30C}"/>
+              </a:ext>
+            </a:extLst>
+          </p:cNvPr>
+          <p:cNvSpPr>
+            <a:spLocks noGrp="1"/>
+          </p:cNvSpPr>
+          <p:nvPr>
+            <p:ph type="ftr" sz="quarter" idx="11"/>
+          </p:nvPr>
+        </p:nvSpPr>
+        <p:spPr/>
+        <p:txBody>
+          <a:bodyPr/>
+          <a:lstStyle/>
+          <a:p>
+            <a:r>
+              <a:rPr lang="en-US"/>
+              <a:t>PBL Course Name: Object Oriented Programming through C++(2501CS08)     REVIEW-1</a:t>
+            </a:r>
+            <a:endParaRPr lang="en-US" dirty="0"/>
+          </a:p>
+        </p:txBody>
+      </p:sp>
+      <p:sp>
+        <p:nvSpPr>
+          <p:cNvPr id="4" name="Slide Number Placeholder 3">
+            <a:extLst>
+              <a:ext uri="{FF2B5EF4-FFF2-40B4-BE49-F238E27FC236}">
+                <a16:creationId xmlns:a16="http://schemas.microsoft.com/office/drawing/2014/main" id="{2FCFF556-F42A-3A69-C145-5CB0F668DDE0}"/>
+              </a:ext>
+            </a:extLst>
+          </p:cNvPr>
+          <p:cNvSpPr>
+            <a:spLocks noGrp="1"/>
+          </p:cNvSpPr>
+          <p:nvPr>
+            <p:ph type="sldNum" sz="quarter" idx="12"/>
+          </p:nvPr>
+        </p:nvSpPr>
+        <p:spPr/>
+        <p:txBody>
+          <a:bodyPr/>
+          <a:lstStyle/>
+          <a:p>
+            <a:fld id="{D9C5B093-D3DD-4808-813A-F58BF8E67773}" type="slidenum">
+              <a:rPr lang="en-IN" smtClean="0"/>
+              <a:t>11</a:t>
+            </a:fld>
+            <a:endParaRPr lang="en-IN" dirty="0"/>
+          </a:p>
+        </p:txBody>
+      </p:sp>
+      <p:sp>
+        <p:nvSpPr>
+          <p:cNvPr id="5" name="TextBox 4">
+            <a:extLst>
+              <a:ext uri="{FF2B5EF4-FFF2-40B4-BE49-F238E27FC236}">
+                <a16:creationId xmlns:a16="http://schemas.microsoft.com/office/drawing/2014/main" id="{57BD848A-93DF-FD1E-B808-ADA950972936}"/>
+              </a:ext>
+            </a:extLst>
+          </p:cNvPr>
+          <p:cNvSpPr txBox="1"/>
+          <p:nvPr/>
+        </p:nvSpPr>
+        <p:spPr>
+          <a:xfrm>
+            <a:off x="4343400" y="328108"/>
+            <a:ext cx="5136976" cy="1938992"/>
+          </a:xfrm>
+          <a:prstGeom prst="rect">
+            <a:avLst/>
+          </a:prstGeom>
+          <a:noFill/>
+        </p:spPr>
+        <p:txBody>
+          <a:bodyPr wrap="square" rtlCol="0">
+            <a:spAutoFit/>
+          </a:bodyPr>
+          <a:lstStyle/>
+          <a:p>
+            <a:r>
+              <a:rPr lang="en-GB" sz="4000" dirty="0">
+                <a:solidFill>
+                  <a:srgbClr val="0000FF"/>
+                </a:solidFill>
+                <a:latin typeface="Maiandra GD" panose="020E0502030308020204" pitchFamily="34" charset="0"/>
+                <a:cs typeface="Aharoni" panose="02010803020104030203" pitchFamily="2" charset="-79"/>
+              </a:rPr>
+              <a:t>C++ Concepts Used</a:t>
+            </a:r>
+          </a:p>
+          <a:p>
+            <a:endParaRPr lang="en-IN" sz="4000" dirty="0"/>
+          </a:p>
+          <a:p>
+            <a:endParaRPr lang="en-IN" sz="4000" dirty="0"/>
+          </a:p>
+        </p:txBody>
+      </p:sp>
+      <p:sp>
+        <p:nvSpPr>
+          <p:cNvPr id="9" name="TextBox 8">
+            <a:extLst>
+              <a:ext uri="{FF2B5EF4-FFF2-40B4-BE49-F238E27FC236}">
+                <a16:creationId xmlns:a16="http://schemas.microsoft.com/office/drawing/2014/main" id="{97BCF552-985B-13F1-489A-33127032B689}"/>
+              </a:ext>
+            </a:extLst>
+          </p:cNvPr>
+          <p:cNvSpPr txBox="1"/>
+          <p:nvPr/>
+        </p:nvSpPr>
+        <p:spPr>
+          <a:xfrm>
+            <a:off x="533400" y="1371600"/>
+            <a:ext cx="11353800" cy="3788858"/>
+          </a:xfrm>
+          <a:prstGeom prst="rect">
+            <a:avLst/>
+          </a:prstGeom>
+          <a:noFill/>
+        </p:spPr>
+        <p:txBody>
+          <a:bodyPr wrap="square">
+            <a:spAutoFit/>
+          </a:bodyPr>
+          <a:lstStyle/>
+          <a:p>
+            <a:pPr marL="342900" lvl="0" indent="-342900">
+              <a:lnSpc>
+                <a:spcPct val="150000"/>
+              </a:lnSpc>
+              <a:buFont typeface="Arial" panose="020B0604020202020204" pitchFamily="34" charset="0"/>
+              <a:buChar char="•"/>
+            </a:pPr>
+            <a:r>
+              <a:rPr lang="en-IN" b="1" dirty="0"/>
+              <a:t>Class and Objects</a:t>
+            </a:r>
+            <a:r>
+              <a:rPr lang="en-IN" dirty="0"/>
+              <a:t> – Student class represents student details.</a:t>
+            </a:r>
+          </a:p>
+          <a:p>
+            <a:pPr marL="342900" lvl="0" indent="-342900">
+              <a:lnSpc>
+                <a:spcPct val="150000"/>
+              </a:lnSpc>
+              <a:buFont typeface="Arial" panose="020B0604020202020204" pitchFamily="34" charset="0"/>
+              <a:buChar char="•"/>
+            </a:pPr>
+            <a:r>
+              <a:rPr lang="en-IN" b="1" dirty="0"/>
+              <a:t>Encapsulation</a:t>
+            </a:r>
+            <a:r>
+              <a:rPr lang="en-IN" dirty="0"/>
+              <a:t> – Student data and functions are organized within the class.</a:t>
+            </a:r>
+          </a:p>
+          <a:p>
+            <a:pPr marL="342900" lvl="0" indent="-342900">
+              <a:lnSpc>
+                <a:spcPct val="150000"/>
+              </a:lnSpc>
+              <a:buFont typeface="Arial" panose="020B0604020202020204" pitchFamily="34" charset="0"/>
+              <a:buChar char="•"/>
+            </a:pPr>
+            <a:r>
+              <a:rPr lang="en-IN" b="1" dirty="0"/>
+              <a:t>Constructors</a:t>
+            </a:r>
+            <a:r>
+              <a:rPr lang="en-IN" dirty="0"/>
+              <a:t> – Used to initialize student objects.</a:t>
+            </a:r>
+          </a:p>
+          <a:p>
+            <a:pPr marL="342900" lvl="0" indent="-342900">
+              <a:lnSpc>
+                <a:spcPct val="150000"/>
+              </a:lnSpc>
+              <a:buFont typeface="Arial" panose="020B0604020202020204" pitchFamily="34" charset="0"/>
+              <a:buChar char="•"/>
+            </a:pPr>
+            <a:r>
+              <a:rPr lang="en-IN" b="1" dirty="0"/>
+              <a:t>Functions</a:t>
+            </a:r>
+            <a:r>
+              <a:rPr lang="en-IN" dirty="0"/>
+              <a:t> – Divide the system into manageable tasks.</a:t>
+            </a:r>
+          </a:p>
+          <a:p>
+            <a:pPr marL="342900" lvl="0" indent="-342900">
+              <a:lnSpc>
+                <a:spcPct val="150000"/>
+              </a:lnSpc>
+              <a:buFont typeface="Arial" panose="020B0604020202020204" pitchFamily="34" charset="0"/>
+              <a:buChar char="•"/>
+            </a:pPr>
+            <a:r>
+              <a:rPr lang="en-IN" b="1" dirty="0"/>
+              <a:t>Arrays</a:t>
+            </a:r>
+            <a:r>
+              <a:rPr lang="en-IN" dirty="0"/>
+              <a:t> – Store multiple student objects.</a:t>
+            </a:r>
+          </a:p>
+          <a:p>
+            <a:pPr marL="342900" lvl="0" indent="-342900">
+              <a:lnSpc>
+                <a:spcPct val="150000"/>
+              </a:lnSpc>
+              <a:buFont typeface="Arial" panose="020B0604020202020204" pitchFamily="34" charset="0"/>
+              <a:buChar char="•"/>
+            </a:pPr>
+            <a:r>
+              <a:rPr lang="en-IN" b="1" dirty="0"/>
+              <a:t>Strings</a:t>
+            </a:r>
+            <a:r>
+              <a:rPr lang="en-IN" dirty="0"/>
+              <a:t> – Store student names and roll numbers.</a:t>
+            </a:r>
+          </a:p>
+          <a:p>
+            <a:pPr marL="342900" lvl="0" indent="-342900">
+              <a:lnSpc>
+                <a:spcPct val="150000"/>
+              </a:lnSpc>
+              <a:buFont typeface="Arial" panose="020B0604020202020204" pitchFamily="34" charset="0"/>
+              <a:buChar char="•"/>
+            </a:pPr>
+            <a:r>
+              <a:rPr lang="en-IN" b="1" dirty="0"/>
+              <a:t>Conditional Statements</a:t>
+            </a:r>
+            <a:r>
+              <a:rPr lang="en-IN" dirty="0"/>
+              <a:t> – Used for grade and PASS/FAIL calculation.</a:t>
+            </a:r>
+          </a:p>
+          <a:p>
+            <a:pPr marL="342900" lvl="0" indent="-342900">
+              <a:lnSpc>
+                <a:spcPct val="150000"/>
+              </a:lnSpc>
+              <a:buFont typeface="Arial" panose="020B0604020202020204" pitchFamily="34" charset="0"/>
+              <a:buChar char="•"/>
+            </a:pPr>
+            <a:r>
+              <a:rPr lang="en-IN" b="1" dirty="0"/>
+              <a:t>Loops</a:t>
+            </a:r>
+            <a:r>
+              <a:rPr lang="en-IN" dirty="0"/>
+              <a:t> – Used to process multiple student records.</a:t>
+            </a:r>
+          </a:p>
+          <a:p>
+            <a:pPr marL="342900" lvl="0" indent="-342900">
+              <a:lnSpc>
+                <a:spcPct val="150000"/>
+              </a:lnSpc>
+              <a:buFont typeface="Arial" panose="020B0604020202020204" pitchFamily="34" charset="0"/>
+              <a:buChar char="•"/>
+            </a:pPr>
+            <a:r>
+              <a:rPr lang="en-IN" b="1" dirty="0"/>
+              <a:t>Input Validation</a:t>
+            </a:r>
+            <a:r>
+              <a:rPr lang="en-IN" dirty="0"/>
+              <a:t> – Ensures valid data entry.</a:t>
+            </a:r>
+          </a:p>
+        </p:txBody>
+      </p:sp>
+    </p:spTree>
+    <p:extLst>
+      <p:ext uri="{BB962C8B-B14F-4D97-AF65-F5344CB8AC3E}">
+        <p14:creationId xmlns:p14="http://schemas.microsoft.com/office/powerpoint/2010/main" val="2933531115"/>
+      </p:ext>
+    </p:extLst>
+  </p:cSld>
+  <p:clrMapOvr>
+    <a:masterClrMapping/>
+  </p:clrMapOvr>
+</p:sld>
+</file>
+
+<file path=ppt/slides/slide12.xml><?xml version="1.0" encoding="utf-8"?>
+<p:sld xmlns:a="http://schemas.openxmlformats.org/drawingml/2006/main" xmlns:r="http://schemas.openxmlformats.org/officeDocument/2006/relationships" xmlns:p="http://schemas.openxmlformats.org/presentationml/2006/main">
+  <p:cSld>
+    <p:spTree>
+      <p:nvGrpSpPr>
+        <p:cNvPr id="1" name=""/>
+        <p:cNvGrpSpPr/>
+        <p:nvPr/>
+      </p:nvGrpSpPr>
+      <p:grpSpPr>
+        <a:xfrm>
+          <a:off x="0" y="0"/>
+          <a:ext cx="0" cy="0"/>
+          <a:chOff x="0" y="0"/>
+          <a:chExt cx="0" cy="0"/>
+        </a:xfrm>
+      </p:grpSpPr>
+      <p:sp>
+        <p:nvSpPr>
+          <p:cNvPr id="2" name="Date Placeholder 1">
+            <a:extLst>
+              <a:ext uri="{FF2B5EF4-FFF2-40B4-BE49-F238E27FC236}">
+                <a16:creationId xmlns:a16="http://schemas.microsoft.com/office/drawing/2014/main" id="{2843F6D9-C5F8-B85E-8CEC-159045BFD1C0}"/>
+              </a:ext>
+            </a:extLst>
+          </p:cNvPr>
+          <p:cNvSpPr>
+            <a:spLocks noGrp="1"/>
+          </p:cNvSpPr>
+          <p:nvPr>
+            <p:ph type="dt" sz="half" idx="10"/>
+          </p:nvPr>
+        </p:nvSpPr>
+        <p:spPr/>
+        <p:txBody>
+          <a:bodyPr/>
+          <a:lstStyle/>
+          <a:p>
+            <a:fld id="{E761D253-940C-44B0-8F51-8C8A37AEAF73}" type="datetime1">
+              <a:rPr lang="en-US" smtClean="0"/>
+              <a:t>10/27/2026</a:t>
+            </a:fld>
+            <a:endParaRPr lang="en-US" dirty="0"/>
+          </a:p>
+        </p:txBody>
+      </p:sp>
+      <p:sp>
+        <p:nvSpPr>
+          <p:cNvPr id="3" name="Footer Placeholder 2">
+            <a:extLst>
+              <a:ext uri="{FF2B5EF4-FFF2-40B4-BE49-F238E27FC236}">
+                <a16:creationId xmlns:a16="http://schemas.microsoft.com/office/drawing/2014/main" id="{A9B43910-8479-1CDC-92A2-98EBAEA4FEB5}"/>
+              </a:ext>
+            </a:extLst>
+          </p:cNvPr>
+          <p:cNvSpPr>
+            <a:spLocks noGrp="1"/>
+          </p:cNvSpPr>
+          <p:nvPr>
+            <p:ph type="ftr" sz="quarter" idx="11"/>
+          </p:nvPr>
+        </p:nvSpPr>
+        <p:spPr/>
+        <p:txBody>
+          <a:bodyPr/>
+          <a:lstStyle/>
+          <a:p>
+            <a:r>
+              <a:rPr lang="en-US"/>
+              <a:t>PBL Course Name: Object Oriented Programming through C++(2501CS08)     REVIEW-1</a:t>
+            </a:r>
+            <a:endParaRPr lang="en-US" dirty="0"/>
+          </a:p>
+        </p:txBody>
+      </p:sp>
+      <p:sp>
+        <p:nvSpPr>
+          <p:cNvPr id="4" name="Slide Number Placeholder 3">
+            <a:extLst>
+              <a:ext uri="{FF2B5EF4-FFF2-40B4-BE49-F238E27FC236}">
+                <a16:creationId xmlns:a16="http://schemas.microsoft.com/office/drawing/2014/main" id="{A06F939B-CB1F-3924-BFA0-4CB0A61ED0DC}"/>
+              </a:ext>
+            </a:extLst>
+          </p:cNvPr>
+          <p:cNvSpPr>
+            <a:spLocks noGrp="1"/>
+          </p:cNvSpPr>
+          <p:nvPr>
+            <p:ph type="sldNum" sz="quarter" idx="12"/>
+          </p:nvPr>
+        </p:nvSpPr>
+        <p:spPr/>
+        <p:txBody>
+          <a:bodyPr/>
+          <a:lstStyle/>
+          <a:p>
+            <a:fld id="{D9C5B093-D3DD-4808-813A-F58BF8E67773}" type="slidenum">
+              <a:rPr lang="en-IN" smtClean="0"/>
+              <a:t>12</a:t>
+            </a:fld>
+            <a:endParaRPr lang="en-IN" dirty="0"/>
+          </a:p>
+        </p:txBody>
+      </p:sp>
+      <p:sp>
+        <p:nvSpPr>
+          <p:cNvPr id="5" name="TextBox 4">
+            <a:extLst>
+              <a:ext uri="{FF2B5EF4-FFF2-40B4-BE49-F238E27FC236}">
+                <a16:creationId xmlns:a16="http://schemas.microsoft.com/office/drawing/2014/main" id="{E8D856D0-175F-BB4D-B323-4D0BAE046869}"/>
+              </a:ext>
+            </a:extLst>
+          </p:cNvPr>
+          <p:cNvSpPr txBox="1"/>
+          <p:nvPr/>
+        </p:nvSpPr>
+        <p:spPr>
+          <a:xfrm>
+            <a:off x="5181600" y="490925"/>
+            <a:ext cx="3352800" cy="1938992"/>
+          </a:xfrm>
+          <a:prstGeom prst="rect">
+            <a:avLst/>
+          </a:prstGeom>
+          <a:noFill/>
+        </p:spPr>
+        <p:txBody>
+          <a:bodyPr wrap="square" rtlCol="0">
+            <a:spAutoFit/>
+          </a:bodyPr>
+          <a:lstStyle/>
+          <a:p>
+            <a:r>
+              <a:rPr lang="en-GB" sz="4000" dirty="0">
+                <a:solidFill>
+                  <a:srgbClr val="0000FF"/>
+                </a:solidFill>
+                <a:latin typeface="Maiandra GD" panose="020E0502030308020204" pitchFamily="34" charset="0"/>
+                <a:cs typeface="Aharoni" panose="02010803020104030203" pitchFamily="2" charset="-79"/>
+              </a:rPr>
+              <a:t>Inputs </a:t>
+            </a:r>
+          </a:p>
+          <a:p>
+            <a:endParaRPr lang="en-IN" sz="4000" dirty="0"/>
+          </a:p>
+          <a:p>
+            <a:endParaRPr lang="en-IN" sz="4000" dirty="0"/>
+          </a:p>
+        </p:txBody>
+      </p:sp>
+      <p:sp>
+        <p:nvSpPr>
+          <p:cNvPr id="7" name="TextBox 6">
+            <a:extLst>
+              <a:ext uri="{FF2B5EF4-FFF2-40B4-BE49-F238E27FC236}">
+                <a16:creationId xmlns:a16="http://schemas.microsoft.com/office/drawing/2014/main" id="{8F538830-3E84-E5A2-9E38-738696452A8A}"/>
+              </a:ext>
+            </a:extLst>
+          </p:cNvPr>
+          <p:cNvSpPr txBox="1"/>
+          <p:nvPr/>
+        </p:nvSpPr>
+        <p:spPr>
+          <a:xfrm>
+            <a:off x="533400" y="1704260"/>
+            <a:ext cx="10134600" cy="3693319"/>
+          </a:xfrm>
+          <a:prstGeom prst="rect">
+            <a:avLst/>
+          </a:prstGeom>
+          <a:noFill/>
+        </p:spPr>
+        <p:txBody>
+          <a:bodyPr wrap="square">
+            <a:spAutoFit/>
+          </a:bodyPr>
+          <a:lstStyle/>
+          <a:p>
+            <a:pPr marL="342900" lvl="0" indent="-342900">
+              <a:buFont typeface="Arial" panose="020B0604020202020204" pitchFamily="34" charset="0"/>
+              <a:buChar char="•"/>
+            </a:pPr>
+            <a:r>
+              <a:rPr lang="en-IN" dirty="0"/>
+              <a:t>Student roll number</a:t>
+            </a:r>
+          </a:p>
+          <a:p>
+            <a:pPr marL="342900" lvl="0" indent="-342900">
+              <a:buFont typeface="Arial" panose="020B0604020202020204" pitchFamily="34" charset="0"/>
+              <a:buChar char="•"/>
+            </a:pPr>
+            <a:r>
+              <a:rPr lang="en-IN" dirty="0"/>
+              <a:t>Student name</a:t>
+            </a:r>
+          </a:p>
+          <a:p>
+            <a:pPr marL="342900" lvl="0" indent="-342900">
+              <a:buFont typeface="Arial" panose="020B0604020202020204" pitchFamily="34" charset="0"/>
+              <a:buChar char="•"/>
+            </a:pPr>
+            <a:r>
+              <a:rPr lang="en-IN" dirty="0"/>
+              <a:t>Marks in Subject 1</a:t>
+            </a:r>
+          </a:p>
+          <a:p>
+            <a:pPr marL="342900" lvl="0" indent="-342900">
+              <a:buFont typeface="Arial" panose="020B0604020202020204" pitchFamily="34" charset="0"/>
+              <a:buChar char="•"/>
+            </a:pPr>
+            <a:r>
+              <a:rPr lang="en-IN" dirty="0"/>
+              <a:t>Marks in Subject 2</a:t>
+            </a:r>
+          </a:p>
+          <a:p>
+            <a:pPr marL="342900" lvl="0" indent="-342900">
+              <a:buFont typeface="Arial" panose="020B0604020202020204" pitchFamily="34" charset="0"/>
+              <a:buChar char="•"/>
+            </a:pPr>
+            <a:r>
+              <a:rPr lang="en-IN" dirty="0"/>
+              <a:t>Marks in Subject 3</a:t>
+            </a:r>
+          </a:p>
+          <a:p>
+            <a:pPr marL="342900" lvl="0" indent="-342900">
+              <a:buFont typeface="Arial" panose="020B0604020202020204" pitchFamily="34" charset="0"/>
+              <a:buChar char="•"/>
+            </a:pPr>
+            <a:r>
+              <a:rPr lang="en-IN" dirty="0"/>
+              <a:t>Menu choice</a:t>
+            </a:r>
+          </a:p>
+          <a:p>
+            <a:pPr marL="342900" lvl="0" indent="-342900">
+              <a:buFont typeface="Arial" panose="020B0604020202020204" pitchFamily="34" charset="0"/>
+              <a:buChar char="•"/>
+            </a:pPr>
+            <a:r>
+              <a:rPr lang="en-IN" dirty="0"/>
+              <a:t>Roll number for searching</a:t>
+            </a:r>
+          </a:p>
+          <a:p>
+            <a:pPr>
+              <a:buNone/>
+            </a:pPr>
+            <a:r>
+              <a:rPr lang="en-IN" b="1" dirty="0"/>
+              <a:t>Example:</a:t>
+            </a:r>
+          </a:p>
+          <a:p>
+            <a:pPr>
+              <a:buNone/>
+            </a:pPr>
+            <a:r>
+              <a:rPr lang="en-IN" b="1" dirty="0"/>
+              <a:t>Roll Number:</a:t>
+            </a:r>
+            <a:r>
+              <a:rPr lang="en-IN" dirty="0"/>
+              <a:t> 25B11AI908</a:t>
+            </a:r>
+            <a:br>
+              <a:rPr lang="en-IN" dirty="0"/>
+            </a:br>
+            <a:r>
+              <a:rPr lang="en-IN" b="1" dirty="0"/>
+              <a:t>Name:</a:t>
+            </a:r>
+            <a:r>
+              <a:rPr lang="en-IN" dirty="0"/>
+              <a:t> Sai Pasupuleti</a:t>
+            </a:r>
+            <a:br>
+              <a:rPr lang="en-IN" dirty="0"/>
+            </a:br>
+            <a:r>
+              <a:rPr lang="en-IN" b="1" dirty="0"/>
+              <a:t>Subject 1:</a:t>
+            </a:r>
+            <a:r>
+              <a:rPr lang="en-IN" dirty="0"/>
+              <a:t> 95</a:t>
+            </a:r>
+            <a:br>
+              <a:rPr lang="en-IN" dirty="0"/>
+            </a:br>
+            <a:r>
+              <a:rPr lang="en-IN" b="1" dirty="0"/>
+              <a:t>Subject 2:</a:t>
+            </a:r>
+            <a:r>
+              <a:rPr lang="en-IN" dirty="0"/>
+              <a:t> 92</a:t>
+            </a:r>
+            <a:br>
+              <a:rPr lang="en-IN" dirty="0"/>
+            </a:br>
+            <a:r>
+              <a:rPr lang="en-IN" b="1" dirty="0"/>
+              <a:t>Subject 3:</a:t>
+            </a:r>
+            <a:r>
+              <a:rPr lang="en-IN" dirty="0"/>
+              <a:t> 91</a:t>
+            </a:r>
+          </a:p>
+        </p:txBody>
+      </p:sp>
+    </p:spTree>
+    <p:extLst>
+      <p:ext uri="{BB962C8B-B14F-4D97-AF65-F5344CB8AC3E}">
+        <p14:creationId xmlns:p14="http://schemas.microsoft.com/office/powerpoint/2010/main" val="2140251880"/>
+      </p:ext>
+    </p:extLst>
+  </p:cSld>
+  <p:clrMapOvr>
+    <a:masterClrMapping/>
+  </p:clrMapOvr>
+</p:sld>
+</file>
+
+<file path=ppt/slides/slide13.xml><?xml version="1.0" encoding="utf-8"?>
+<p:sld xmlns:a="http://schemas.openxmlformats.org/drawingml/2006/main" xmlns:r="http://schemas.openxmlformats.org/officeDocument/2006/relationships" xmlns:p="http://schemas.openxmlformats.org/presentationml/2006/main">
+  <p:cSld>
+    <p:spTree>
+      <p:nvGrpSpPr>
+        <p:cNvPr id="1" name=""/>
+        <p:cNvGrpSpPr/>
+        <p:nvPr/>
+      </p:nvGrpSpPr>
+      <p:grpSpPr>
+        <a:xfrm>
+          <a:off x="0" y="0"/>
+          <a:ext cx="0" cy="0"/>
+          <a:chOff x="0" y="0"/>
+          <a:chExt cx="0" cy="0"/>
+        </a:xfrm>
+      </p:grpSpPr>
+      <p:sp>
+        <p:nvSpPr>
+          <p:cNvPr id="2" name="Date Placeholder 1">
+            <a:extLst>
+              <a:ext uri="{FF2B5EF4-FFF2-40B4-BE49-F238E27FC236}">
+                <a16:creationId xmlns:a16="http://schemas.microsoft.com/office/drawing/2014/main" id="{515A6EBA-94DE-7268-8EF1-49D26C178711}"/>
+              </a:ext>
+            </a:extLst>
+          </p:cNvPr>
+          <p:cNvSpPr>
+            <a:spLocks noGrp="1"/>
+          </p:cNvSpPr>
+          <p:nvPr>
+            <p:ph type="dt" sz="half" idx="10"/>
+          </p:nvPr>
+        </p:nvSpPr>
+        <p:spPr/>
+        <p:txBody>
+          <a:bodyPr/>
+          <a:lstStyle/>
+          <a:p>
+            <a:fld id="{E761D253-940C-44B0-8F51-8C8A37AEAF73}" type="datetime1">
+              <a:rPr lang="en-US" smtClean="0"/>
+              <a:t>10/27/2026</a:t>
+            </a:fld>
+            <a:endParaRPr lang="en-US" dirty="0"/>
+          </a:p>
+        </p:txBody>
+      </p:sp>
+      <p:sp>
+        <p:nvSpPr>
+          <p:cNvPr id="3" name="Footer Placeholder 2">
+            <a:extLst>
+              <a:ext uri="{FF2B5EF4-FFF2-40B4-BE49-F238E27FC236}">
+                <a16:creationId xmlns:a16="http://schemas.microsoft.com/office/drawing/2014/main" id="{5A64D8DD-85F0-7DB3-4172-B63BA1DD4494}"/>
+              </a:ext>
+            </a:extLst>
+          </p:cNvPr>
+          <p:cNvSpPr>
+            <a:spLocks noGrp="1"/>
+          </p:cNvSpPr>
+          <p:nvPr>
+            <p:ph type="ftr" sz="quarter" idx="11"/>
+          </p:nvPr>
+        </p:nvSpPr>
+        <p:spPr/>
+        <p:txBody>
+          <a:bodyPr/>
+          <a:lstStyle/>
+          <a:p>
+            <a:r>
+              <a:rPr lang="en-US"/>
+              <a:t>PBL Course Name: Object Oriented Programming through C++(2501CS08)     REVIEW-1</a:t>
+            </a:r>
+            <a:endParaRPr lang="en-US" dirty="0"/>
+          </a:p>
+        </p:txBody>
+      </p:sp>
+      <p:sp>
+        <p:nvSpPr>
+          <p:cNvPr id="4" name="Slide Number Placeholder 3">
+            <a:extLst>
+              <a:ext uri="{FF2B5EF4-FFF2-40B4-BE49-F238E27FC236}">
+                <a16:creationId xmlns:a16="http://schemas.microsoft.com/office/drawing/2014/main" id="{FE3B703C-C0DB-9262-0274-C1DA2DCAC43C}"/>
+              </a:ext>
+            </a:extLst>
+          </p:cNvPr>
+          <p:cNvSpPr>
+            <a:spLocks noGrp="1"/>
+          </p:cNvSpPr>
+          <p:nvPr>
+            <p:ph type="sldNum" sz="quarter" idx="12"/>
+          </p:nvPr>
+        </p:nvSpPr>
+        <p:spPr/>
+        <p:txBody>
+          <a:bodyPr/>
+          <a:lstStyle/>
+          <a:p>
+            <a:fld id="{D9C5B093-D3DD-4808-813A-F58BF8E67773}" type="slidenum">
+              <a:rPr lang="en-IN" smtClean="0"/>
+              <a:t>13</a:t>
+            </a:fld>
+            <a:endParaRPr lang="en-IN" dirty="0"/>
+          </a:p>
+        </p:txBody>
+      </p:sp>
+      <p:sp>
+        <p:nvSpPr>
+          <p:cNvPr id="5" name="TextBox 4">
+            <a:extLst>
+              <a:ext uri="{FF2B5EF4-FFF2-40B4-BE49-F238E27FC236}">
+                <a16:creationId xmlns:a16="http://schemas.microsoft.com/office/drawing/2014/main" id="{49EFA1DC-A449-6A1F-DA8D-58663F4D5291}"/>
+              </a:ext>
+            </a:extLst>
+          </p:cNvPr>
+          <p:cNvSpPr txBox="1"/>
+          <p:nvPr/>
+        </p:nvSpPr>
+        <p:spPr>
+          <a:xfrm>
+            <a:off x="4648200" y="214104"/>
+            <a:ext cx="4038600" cy="2554545"/>
+          </a:xfrm>
+          <a:prstGeom prst="rect">
+            <a:avLst/>
+          </a:prstGeom>
+          <a:noFill/>
+        </p:spPr>
+        <p:txBody>
+          <a:bodyPr wrap="square" rtlCol="0">
+            <a:spAutoFit/>
+          </a:bodyPr>
+          <a:lstStyle/>
+          <a:p>
+            <a:r>
+              <a:rPr lang="en-GB" sz="4000" dirty="0">
+                <a:solidFill>
+                  <a:srgbClr val="0000FF"/>
+                </a:solidFill>
+                <a:latin typeface="Maiandra GD" panose="020E0502030308020204" pitchFamily="34" charset="0"/>
+                <a:cs typeface="Aharoni" panose="02010803020104030203" pitchFamily="2" charset="-79"/>
+              </a:rPr>
+              <a:t>Expected outputs </a:t>
+            </a:r>
+          </a:p>
+          <a:p>
+            <a:endParaRPr lang="en-IN" sz="4000" dirty="0"/>
+          </a:p>
+          <a:p>
+            <a:endParaRPr lang="en-IN" sz="4000" dirty="0"/>
+          </a:p>
+          <a:p>
+            <a:endParaRPr lang="en-IN" sz="4000" dirty="0"/>
+          </a:p>
+        </p:txBody>
+      </p:sp>
+      <p:sp>
+        <p:nvSpPr>
+          <p:cNvPr id="7" name="TextBox 6">
+            <a:extLst>
+              <a:ext uri="{FF2B5EF4-FFF2-40B4-BE49-F238E27FC236}">
+                <a16:creationId xmlns:a16="http://schemas.microsoft.com/office/drawing/2014/main" id="{214B5523-7432-5656-D42E-223239E185E5}"/>
+              </a:ext>
+            </a:extLst>
+          </p:cNvPr>
+          <p:cNvSpPr txBox="1"/>
+          <p:nvPr/>
+        </p:nvSpPr>
+        <p:spPr>
+          <a:xfrm>
+            <a:off x="695400" y="1143001"/>
+            <a:ext cx="10277400" cy="5122941"/>
+          </a:xfrm>
+          <a:prstGeom prst="rect">
+            <a:avLst/>
+          </a:prstGeom>
+          <a:noFill/>
+        </p:spPr>
+        <p:txBody>
+          <a:bodyPr wrap="square">
+            <a:spAutoFit/>
+          </a:bodyPr>
+          <a:lstStyle/>
+          <a:p>
+            <a:pPr marL="342900" lvl="0" indent="-342900">
+              <a:lnSpc>
+                <a:spcPct val="150000"/>
+              </a:lnSpc>
+              <a:buFont typeface="Arial" panose="020B0604020202020204" pitchFamily="34" charset="0"/>
+              <a:buChar char="•"/>
+            </a:pPr>
+            <a:r>
+              <a:rPr lang="en-IN" sz="2000" dirty="0"/>
+              <a:t>Successful student registration message.</a:t>
+            </a:r>
+          </a:p>
+          <a:p>
+            <a:pPr marL="342900" lvl="0" indent="-342900">
+              <a:lnSpc>
+                <a:spcPct val="150000"/>
+              </a:lnSpc>
+              <a:buFont typeface="Arial" panose="020B0604020202020204" pitchFamily="34" charset="0"/>
+              <a:buChar char="•"/>
+            </a:pPr>
+            <a:r>
+              <a:rPr lang="en-IN" sz="2000" dirty="0"/>
+              <a:t>Complete student result.</a:t>
+            </a:r>
+          </a:p>
+          <a:p>
+            <a:pPr marL="342900" lvl="0" indent="-342900">
+              <a:lnSpc>
+                <a:spcPct val="150000"/>
+              </a:lnSpc>
+              <a:buFont typeface="Arial" panose="020B0604020202020204" pitchFamily="34" charset="0"/>
+              <a:buChar char="•"/>
+            </a:pPr>
+            <a:r>
+              <a:rPr lang="en-IN" sz="2000" dirty="0"/>
+              <a:t>Total marks.</a:t>
+            </a:r>
+          </a:p>
+          <a:p>
+            <a:pPr marL="342900" lvl="0" indent="-342900">
+              <a:lnSpc>
+                <a:spcPct val="150000"/>
+              </a:lnSpc>
+              <a:buFont typeface="Arial" panose="020B0604020202020204" pitchFamily="34" charset="0"/>
+              <a:buChar char="•"/>
+            </a:pPr>
+            <a:r>
+              <a:rPr lang="en-IN" sz="2000" dirty="0"/>
+              <a:t>Average marks.</a:t>
+            </a:r>
+          </a:p>
+          <a:p>
+            <a:pPr marL="342900" lvl="0" indent="-342900">
+              <a:lnSpc>
+                <a:spcPct val="150000"/>
+              </a:lnSpc>
+              <a:buFont typeface="Arial" panose="020B0604020202020204" pitchFamily="34" charset="0"/>
+              <a:buChar char="•"/>
+            </a:pPr>
+            <a:r>
+              <a:rPr lang="en-IN" sz="2000" dirty="0"/>
+              <a:t>Percentage.</a:t>
+            </a:r>
+          </a:p>
+          <a:p>
+            <a:pPr marL="342900" lvl="0" indent="-342900">
+              <a:lnSpc>
+                <a:spcPct val="150000"/>
+              </a:lnSpc>
+              <a:buFont typeface="Arial" panose="020B0604020202020204" pitchFamily="34" charset="0"/>
+              <a:buChar char="•"/>
+            </a:pPr>
+            <a:r>
+              <a:rPr lang="en-IN" sz="2000" dirty="0"/>
+              <a:t>Grade.</a:t>
+            </a:r>
+          </a:p>
+          <a:p>
+            <a:pPr marL="342900" lvl="0" indent="-342900">
+              <a:lnSpc>
+                <a:spcPct val="150000"/>
+              </a:lnSpc>
+              <a:buFont typeface="Arial" panose="020B0604020202020204" pitchFamily="34" charset="0"/>
+              <a:buChar char="•"/>
+            </a:pPr>
+            <a:r>
+              <a:rPr lang="en-IN" sz="2000" dirty="0"/>
+              <a:t>PASS/FAIL status.</a:t>
+            </a:r>
+          </a:p>
+          <a:p>
+            <a:pPr marL="342900" lvl="0" indent="-342900">
+              <a:lnSpc>
+                <a:spcPct val="150000"/>
+              </a:lnSpc>
+              <a:buFont typeface="Arial" panose="020B0604020202020204" pitchFamily="34" charset="0"/>
+              <a:buChar char="•"/>
+            </a:pPr>
+            <a:r>
+              <a:rPr lang="en-IN" sz="2000" dirty="0"/>
+              <a:t>Search result for a particular student.</a:t>
+            </a:r>
+          </a:p>
+          <a:p>
+            <a:pPr marL="342900" lvl="0" indent="-342900">
+              <a:lnSpc>
+                <a:spcPct val="150000"/>
+              </a:lnSpc>
+              <a:buFont typeface="Arial" panose="020B0604020202020204" pitchFamily="34" charset="0"/>
+              <a:buChar char="•"/>
+            </a:pPr>
+            <a:r>
+              <a:rPr lang="en-IN" sz="2000" dirty="0"/>
+              <a:t>List of topper student(s).</a:t>
+            </a:r>
+          </a:p>
+          <a:p>
+            <a:pPr marL="342900" lvl="0" indent="-342900">
+              <a:lnSpc>
+                <a:spcPct val="150000"/>
+              </a:lnSpc>
+              <a:buFont typeface="Arial" panose="020B0604020202020204" pitchFamily="34" charset="0"/>
+              <a:buChar char="•"/>
+            </a:pPr>
+            <a:r>
+              <a:rPr lang="en-IN" sz="2000" dirty="0"/>
+              <a:t>List of failed students.</a:t>
+            </a:r>
+          </a:p>
+          <a:p>
+            <a:pPr marL="342900" lvl="0" indent="-342900">
+              <a:lnSpc>
+                <a:spcPct val="150000"/>
+              </a:lnSpc>
+              <a:buFont typeface="Arial" panose="020B0604020202020204" pitchFamily="34" charset="0"/>
+              <a:buChar char="•"/>
+            </a:pPr>
+            <a:r>
+              <a:rPr lang="en-IN" sz="2000" dirty="0"/>
+              <a:t>Appropriate validation messages.</a:t>
+            </a:r>
+          </a:p>
+        </p:txBody>
+      </p:sp>
+    </p:spTree>
+    <p:extLst>
+      <p:ext uri="{BB962C8B-B14F-4D97-AF65-F5344CB8AC3E}">
+        <p14:creationId xmlns:p14="http://schemas.microsoft.com/office/powerpoint/2010/main" val="3221157403"/>
+      </p:ext>
+    </p:extLst>
+  </p:cSld>
+  <p:clrMapOvr>
+    <a:masterClrMapping/>
+  </p:clrMapOvr>
+</p:sld>
+</file>
+
+<file path=ppt/slides/slide14.xml><?xml version="1.0" encoding="utf-8"?>
+<p:sld xmlns:a="http://schemas.openxmlformats.org/drawingml/2006/main" xmlns:r="http://schemas.openxmlformats.org/officeDocument/2006/relationships" xmlns:p="http://schemas.openxmlformats.org/presentationml/2006/main">
+  <p:cSld>
+    <p:spTree>
+      <p:nvGrpSpPr>
+        <p:cNvPr id="1" name=""/>
+        <p:cNvGrpSpPr/>
+        <p:nvPr/>
+      </p:nvGrpSpPr>
+      <p:grpSpPr>
+        <a:xfrm>
+          <a:off x="0" y="0"/>
+          <a:ext cx="0" cy="0"/>
+          <a:chOff x="0" y="0"/>
+          <a:chExt cx="0" cy="0"/>
+        </a:xfrm>
+      </p:grpSpPr>
+      <p:sp>
+        <p:nvSpPr>
           <p:cNvPr id="3" name="Date Placeholder 2">
             <a:extLst>
               <a:ext uri="{FF2B5EF4-FFF2-40B4-BE49-F238E27FC236}">
@@ -3192,7 +3851,7 @@
           <a:p>
             <a:fld id="{A4A026F9-4B12-44A3-954F-2C895BB9BCAE}" type="datetime1">
               <a:rPr lang="en-US" smtClean="0"/>
-              <a:t>8/25/2026</a:t>
+              <a:t>10/27/2026</a:t>
             </a:fld>
             <a:endParaRPr lang="en-US" dirty="0"/>
           </a:p>
@@ -3250,7 +3909,438 @@
           <a:p>
             <a:fld id="{9359D16F-76A5-41BA-ADDD-CBF352B33DDD}" type="slidenum">
               <a:rPr lang="en-IN" smtClean="0"/>
-              <a:t>10</a:t>
+              <a:t>14</a:t>
+            </a:fld>
+            <a:endParaRPr lang="en-IN" dirty="0"/>
+          </a:p>
+        </p:txBody>
+      </p:sp>
+      <p:sp>
+        <p:nvSpPr>
+          <p:cNvPr id="7" name="TextBox 6">
+            <a:extLst>
+              <a:ext uri="{FF2B5EF4-FFF2-40B4-BE49-F238E27FC236}">
+                <a16:creationId xmlns:a16="http://schemas.microsoft.com/office/drawing/2014/main" id="{F8107C4F-2400-B326-479D-154C65509A60}"/>
+              </a:ext>
+            </a:extLst>
+          </p:cNvPr>
+          <p:cNvSpPr txBox="1"/>
+          <p:nvPr/>
+        </p:nvSpPr>
+        <p:spPr>
+          <a:xfrm>
+            <a:off x="1596000" y="433845"/>
+            <a:ext cx="9000000" cy="661720"/>
+          </a:xfrm>
+          <a:prstGeom prst="rect">
+            <a:avLst/>
+          </a:prstGeom>
+          <a:noFill/>
+        </p:spPr>
+        <p:txBody>
+          <a:bodyPr wrap="square">
+            <a:spAutoFit/>
+          </a:bodyPr>
+          <a:lstStyle/>
+          <a:p>
+            <a:pPr lvl="0" algn="ctr">
+              <a:lnSpc>
+                <a:spcPct val="90000"/>
+              </a:lnSpc>
+              <a:spcBef>
+                <a:spcPct val="0"/>
+              </a:spcBef>
+            </a:pPr>
+            <a:r>
+              <a:rPr lang="en-GB" sz="3200" dirty="0">
+                <a:solidFill>
+                  <a:srgbClr val="0000FF"/>
+                </a:solidFill>
+                <a:latin typeface="Maiandra GD" panose="020E0502030308020204" pitchFamily="34" charset="0"/>
+                <a:cs typeface="Aharoni" panose="02010803020104030203" pitchFamily="2" charset="-79"/>
+              </a:rPr>
+              <a:t>Architecture Diagram</a:t>
+            </a:r>
+          </a:p>
+        </p:txBody>
+      </p:sp>
+      <p:sp>
+        <p:nvSpPr>
+          <p:cNvPr id="13" name="TextBox 12">
+            <a:extLst>
+              <a:ext uri="{FF2B5EF4-FFF2-40B4-BE49-F238E27FC236}">
+                <a16:creationId xmlns:a16="http://schemas.microsoft.com/office/drawing/2014/main" id="{774176BE-6834-7BA4-A4E5-892E04C97D83}"/>
+              </a:ext>
+            </a:extLst>
+          </p:cNvPr>
+          <p:cNvSpPr txBox="1"/>
+          <p:nvPr/>
+        </p:nvSpPr>
+        <p:spPr>
+          <a:xfrm>
+            <a:off x="914400" y="1143000"/>
+            <a:ext cx="11125200" cy="5029200"/>
+          </a:xfrm>
+          <a:prstGeom prst="rect">
+            <a:avLst/>
+          </a:prstGeom>
+          <a:noFill/>
+        </p:spPr>
+        <p:txBody>
+          <a:bodyPr wrap="square" rtlCol="0">
+            <a:spAutoFit/>
+          </a:bodyPr>
+          <a:lstStyle/>
+          <a:p>
+            <a:endParaRPr lang="en-IN" dirty="0"/>
+          </a:p>
+        </p:txBody>
+      </p:sp>
+      <p:pic>
+        <p:nvPicPr>
+          <p:cNvPr id="14" name="Picture 13">
+            <a:extLst>
+              <a:ext uri="{FF2B5EF4-FFF2-40B4-BE49-F238E27FC236}">
+                <a16:creationId xmlns:a16="http://schemas.microsoft.com/office/drawing/2014/main" id="{9EB23971-2E20-E2AD-DEC4-EA6847198325}"/>
+              </a:ext>
+            </a:extLst>
+          </p:cNvPr>
+          <p:cNvPicPr>
+            <a:picLocks noChangeAspect="1"/>
+          </p:cNvPicPr>
+          <p:nvPr/>
+        </p:nvPicPr>
+        <p:blipFill>
+          <a:blip r:embed="rId2"/>
+          <a:stretch>
+            <a:fillRect/>
+          </a:stretch>
+        </p:blipFill>
+        <p:spPr>
+          <a:xfrm>
+            <a:off x="3962400" y="1036429"/>
+            <a:ext cx="3882808" cy="4961367"/>
+          </a:xfrm>
+          <a:prstGeom prst="rect">
+            <a:avLst/>
+          </a:prstGeom>
+        </p:spPr>
+      </p:pic>
+    </p:spTree>
+    <p:extLst>
+      <p:ext uri="{BB962C8B-B14F-4D97-AF65-F5344CB8AC3E}">
+        <p14:creationId xmlns:p14="http://schemas.microsoft.com/office/powerpoint/2010/main" val="1780977059"/>
+      </p:ext>
+    </p:extLst>
+  </p:cSld>
+  <p:clrMapOvr>
+    <a:masterClrMapping/>
+  </p:clrMapOvr>
+</p:sld>
+</file>
+
+<file path=ppt/slides/slide15.xml><?xml version="1.0" encoding="utf-8"?>
+<p:sld xmlns:a="http://schemas.openxmlformats.org/drawingml/2006/main" xmlns:r="http://schemas.openxmlformats.org/officeDocument/2006/relationships" xmlns:p="http://schemas.openxmlformats.org/presentationml/2006/main">
+  <p:cSld>
+    <p:spTree>
+      <p:nvGrpSpPr>
+        <p:cNvPr id="1" name=""/>
+        <p:cNvGrpSpPr/>
+        <p:nvPr/>
+      </p:nvGrpSpPr>
+      <p:grpSpPr>
+        <a:xfrm>
+          <a:off x="0" y="0"/>
+          <a:ext cx="0" cy="0"/>
+          <a:chOff x="0" y="0"/>
+          <a:chExt cx="0" cy="0"/>
+        </a:xfrm>
+      </p:grpSpPr>
+      <p:sp>
+        <p:nvSpPr>
+          <p:cNvPr id="2" name="Date Placeholder 1">
+            <a:extLst>
+              <a:ext uri="{FF2B5EF4-FFF2-40B4-BE49-F238E27FC236}">
+                <a16:creationId xmlns:a16="http://schemas.microsoft.com/office/drawing/2014/main" id="{0F171D24-8A54-9E45-E2B0-4B37951C993E}"/>
+              </a:ext>
+            </a:extLst>
+          </p:cNvPr>
+          <p:cNvSpPr>
+            <a:spLocks noGrp="1"/>
+          </p:cNvSpPr>
+          <p:nvPr>
+            <p:ph type="dt" sz="half" idx="10"/>
+          </p:nvPr>
+        </p:nvSpPr>
+        <p:spPr/>
+        <p:txBody>
+          <a:bodyPr/>
+          <a:lstStyle/>
+          <a:p>
+            <a:fld id="{E761D253-940C-44B0-8F51-8C8A37AEAF73}" type="datetime1">
+              <a:rPr lang="en-US" smtClean="0"/>
+              <a:t>10/27/2026</a:t>
+            </a:fld>
+            <a:endParaRPr lang="en-US" dirty="0"/>
+          </a:p>
+        </p:txBody>
+      </p:sp>
+      <p:sp>
+        <p:nvSpPr>
+          <p:cNvPr id="3" name="Footer Placeholder 2">
+            <a:extLst>
+              <a:ext uri="{FF2B5EF4-FFF2-40B4-BE49-F238E27FC236}">
+                <a16:creationId xmlns:a16="http://schemas.microsoft.com/office/drawing/2014/main" id="{683EFD76-FC9E-CFE9-6CAC-6C26D72479FB}"/>
+              </a:ext>
+            </a:extLst>
+          </p:cNvPr>
+          <p:cNvSpPr>
+            <a:spLocks noGrp="1"/>
+          </p:cNvSpPr>
+          <p:nvPr>
+            <p:ph type="ftr" sz="quarter" idx="11"/>
+          </p:nvPr>
+        </p:nvSpPr>
+        <p:spPr/>
+        <p:txBody>
+          <a:bodyPr/>
+          <a:lstStyle/>
+          <a:p>
+            <a:r>
+              <a:rPr lang="en-US"/>
+              <a:t>PBL Course Name: Object Oriented Programming through C++(2501CS08)     REVIEW-1</a:t>
+            </a:r>
+            <a:endParaRPr lang="en-US" dirty="0"/>
+          </a:p>
+        </p:txBody>
+      </p:sp>
+      <p:sp>
+        <p:nvSpPr>
+          <p:cNvPr id="4" name="Slide Number Placeholder 3">
+            <a:extLst>
+              <a:ext uri="{FF2B5EF4-FFF2-40B4-BE49-F238E27FC236}">
+                <a16:creationId xmlns:a16="http://schemas.microsoft.com/office/drawing/2014/main" id="{C0F93A3B-D02C-0BE1-236A-521B5C30C865}"/>
+              </a:ext>
+            </a:extLst>
+          </p:cNvPr>
+          <p:cNvSpPr>
+            <a:spLocks noGrp="1"/>
+          </p:cNvSpPr>
+          <p:nvPr>
+            <p:ph type="sldNum" sz="quarter" idx="12"/>
+          </p:nvPr>
+        </p:nvSpPr>
+        <p:spPr/>
+        <p:txBody>
+          <a:bodyPr/>
+          <a:lstStyle/>
+          <a:p>
+            <a:fld id="{D9C5B093-D3DD-4808-813A-F58BF8E67773}" type="slidenum">
+              <a:rPr lang="en-IN" smtClean="0"/>
+              <a:t>15</a:t>
+            </a:fld>
+            <a:endParaRPr lang="en-IN" dirty="0"/>
+          </a:p>
+        </p:txBody>
+      </p:sp>
+      <p:sp>
+        <p:nvSpPr>
+          <p:cNvPr id="5" name="TextBox 4">
+            <a:extLst>
+              <a:ext uri="{FF2B5EF4-FFF2-40B4-BE49-F238E27FC236}">
+                <a16:creationId xmlns:a16="http://schemas.microsoft.com/office/drawing/2014/main" id="{B34119E9-706A-E2D0-EDBD-6BC776921876}"/>
+              </a:ext>
+            </a:extLst>
+          </p:cNvPr>
+          <p:cNvSpPr txBox="1"/>
+          <p:nvPr/>
+        </p:nvSpPr>
+        <p:spPr>
+          <a:xfrm>
+            <a:off x="4998160" y="102540"/>
+            <a:ext cx="3657600" cy="2554545"/>
+          </a:xfrm>
+          <a:prstGeom prst="rect">
+            <a:avLst/>
+          </a:prstGeom>
+          <a:noFill/>
+        </p:spPr>
+        <p:txBody>
+          <a:bodyPr wrap="square" rtlCol="0">
+            <a:spAutoFit/>
+          </a:bodyPr>
+          <a:lstStyle/>
+          <a:p>
+            <a:r>
+              <a:rPr lang="en-GB" sz="4000" dirty="0">
+                <a:solidFill>
+                  <a:srgbClr val="0000FF"/>
+                </a:solidFill>
+                <a:latin typeface="Maiandra GD" panose="020E0502030308020204" pitchFamily="34" charset="0"/>
+                <a:cs typeface="Aharoni" panose="02010803020104030203" pitchFamily="2" charset="-79"/>
+              </a:rPr>
+              <a:t>Flowchart </a:t>
+            </a:r>
+          </a:p>
+          <a:p>
+            <a:endParaRPr lang="en-IN" sz="4000" dirty="0"/>
+          </a:p>
+          <a:p>
+            <a:endParaRPr lang="en-IN" sz="4000" dirty="0"/>
+          </a:p>
+          <a:p>
+            <a:endParaRPr lang="en-IN" sz="4000" dirty="0"/>
+          </a:p>
+        </p:txBody>
+      </p:sp>
+      <p:pic>
+        <p:nvPicPr>
+          <p:cNvPr id="7" name="Picture 6">
+            <a:extLst>
+              <a:ext uri="{FF2B5EF4-FFF2-40B4-BE49-F238E27FC236}">
+                <a16:creationId xmlns:a16="http://schemas.microsoft.com/office/drawing/2014/main" id="{66340238-CBB7-4BCD-A4B4-6909F6ED808C}"/>
+              </a:ext>
+            </a:extLst>
+          </p:cNvPr>
+          <p:cNvPicPr>
+            <a:picLocks noChangeAspect="1"/>
+          </p:cNvPicPr>
+          <p:nvPr/>
+        </p:nvPicPr>
+        <p:blipFill>
+          <a:blip r:embed="rId2" cstate="print">
+            <a:extLst>
+              <a:ext uri="{28A0092B-C50C-407E-A947-70E740481C1C}">
+                <a14:useLocalDpi xmlns:a14="http://schemas.microsoft.com/office/drawing/2010/main" val="0"/>
+              </a:ext>
+            </a:extLst>
+          </a:blip>
+          <a:stretch>
+            <a:fillRect/>
+          </a:stretch>
+        </p:blipFill>
+        <p:spPr>
+          <a:xfrm>
+            <a:off x="3886200" y="1057815"/>
+            <a:ext cx="4967121" cy="5298535"/>
+          </a:xfrm>
+          <a:prstGeom prst="rect">
+            <a:avLst/>
+          </a:prstGeom>
+        </p:spPr>
+      </p:pic>
+    </p:spTree>
+    <p:extLst>
+      <p:ext uri="{BB962C8B-B14F-4D97-AF65-F5344CB8AC3E}">
+        <p14:creationId xmlns:p14="http://schemas.microsoft.com/office/powerpoint/2010/main" val="451417654"/>
+      </p:ext>
+    </p:extLst>
+  </p:cSld>
+  <p:clrMapOvr>
+    <a:masterClrMapping/>
+  </p:clrMapOvr>
+</p:sld>
+</file>
+
+<file path=ppt/slides/slide16.xml><?xml version="1.0" encoding="utf-8"?>
+<p:sld xmlns:a="http://schemas.openxmlformats.org/drawingml/2006/main" xmlns:r="http://schemas.openxmlformats.org/officeDocument/2006/relationships" xmlns:p="http://schemas.openxmlformats.org/presentationml/2006/main">
+  <p:cSld>
+    <p:spTree>
+      <p:nvGrpSpPr>
+        <p:cNvPr id="1" name=""/>
+        <p:cNvGrpSpPr/>
+        <p:nvPr/>
+      </p:nvGrpSpPr>
+      <p:grpSpPr>
+        <a:xfrm>
+          <a:off x="0" y="0"/>
+          <a:ext cx="0" cy="0"/>
+          <a:chOff x="0" y="0"/>
+          <a:chExt cx="0" cy="0"/>
+        </a:xfrm>
+      </p:grpSpPr>
+      <p:sp>
+        <p:nvSpPr>
+          <p:cNvPr id="3" name="Date Placeholder 2">
+            <a:extLst>
+              <a:ext uri="{FF2B5EF4-FFF2-40B4-BE49-F238E27FC236}">
+                <a16:creationId xmlns:a16="http://schemas.microsoft.com/office/drawing/2014/main" id="{1D2B478A-2226-B360-8AD2-E37AD61AAA2F}"/>
+              </a:ext>
+            </a:extLst>
+          </p:cNvPr>
+          <p:cNvSpPr>
+            <a:spLocks noGrp="1"/>
+          </p:cNvSpPr>
+          <p:nvPr>
+            <p:ph type="dt" sz="half" idx="1"/>
+          </p:nvPr>
+        </p:nvSpPr>
+        <p:spPr/>
+        <p:txBody>
+          <a:bodyPr/>
+          <a:lstStyle/>
+          <a:p>
+            <a:fld id="{A4A026F9-4B12-44A3-954F-2C895BB9BCAE}" type="datetime1">
+              <a:rPr lang="en-US" smtClean="0"/>
+              <a:t>10/27/2026</a:t>
+            </a:fld>
+            <a:endParaRPr lang="en-US" dirty="0"/>
+          </a:p>
+        </p:txBody>
+      </p:sp>
+      <p:sp>
+        <p:nvSpPr>
+          <p:cNvPr id="4" name="Footer Placeholder 3">
+            <a:extLst>
+              <a:ext uri="{FF2B5EF4-FFF2-40B4-BE49-F238E27FC236}">
+                <a16:creationId xmlns:a16="http://schemas.microsoft.com/office/drawing/2014/main" id="{6C1A7CD3-FDC3-32A7-74E1-968EEFC4A74C}"/>
+              </a:ext>
+            </a:extLst>
+          </p:cNvPr>
+          <p:cNvSpPr>
+            <a:spLocks noGrp="1"/>
+          </p:cNvSpPr>
+          <p:nvPr>
+            <p:ph type="ftr" sz="quarter" idx="2"/>
+          </p:nvPr>
+        </p:nvSpPr>
+        <p:spPr/>
+        <p:txBody>
+          <a:bodyPr/>
+          <a:lstStyle/>
+          <a:p>
+            <a:r>
+              <a:rPr lang="en-US"/>
+              <a:t>PBL Course Name: Object Oriented Programming through C++(2501CS08)     REVIEW-1</a:t>
+            </a:r>
+            <a:endParaRPr lang="en-US" dirty="0"/>
+          </a:p>
+        </p:txBody>
+      </p:sp>
+      <p:sp>
+        <p:nvSpPr>
+          <p:cNvPr id="5" name="Slide Number Placeholder 4">
+            <a:extLst>
+              <a:ext uri="{FF2B5EF4-FFF2-40B4-BE49-F238E27FC236}">
+                <a16:creationId xmlns:a16="http://schemas.microsoft.com/office/drawing/2014/main" id="{2EC66408-B064-CD45-6F0B-FF7488C8CCC8}"/>
+              </a:ext>
+            </a:extLst>
+          </p:cNvPr>
+          <p:cNvSpPr>
+            <a:spLocks noGrp="1"/>
+          </p:cNvSpPr>
+          <p:nvPr>
+            <p:ph type="sldNum" sz="quarter" idx="3"/>
+          </p:nvPr>
+        </p:nvSpPr>
+        <p:spPr/>
+        <p:txBody>
+          <a:bodyPr/>
+          <a:lstStyle/>
+          <a:p>
+            <a:fld id="{9359D16F-76A5-41BA-ADDD-CBF352B33DDD}" type="slidenum">
+              <a:rPr lang="en-IN" smtClean="0"/>
+              <a:t>16</a:t>
             </a:fld>
             <a:endParaRPr lang="en-IN" dirty="0"/>
           </a:p>
@@ -3928,7 +5018,7 @@
 </p:sld>
 </file>
 
-<file path=ppt/slides/slide11.xml><?xml version="1.0" encoding="utf-8"?>
+<file path=ppt/slides/slide17.xml><?xml version="1.0" encoding="utf-8"?>
 <p:sld xmlns:a="http://schemas.openxmlformats.org/drawingml/2006/main" xmlns:r="http://schemas.openxmlformats.org/officeDocument/2006/relationships" xmlns:p="http://schemas.openxmlformats.org/presentationml/2006/main">
   <p:cSld>
     <p:spTree>
@@ -3968,7 +5058,7 @@
           <a:p>
             <a:fld id="{A4A026F9-4B12-44A3-954F-2C895BB9BCAE}" type="datetime1">
               <a:rPr lang="en-US" smtClean="0"/>
-              <a:t>8/25/2026</a:t>
+              <a:t>10/27/2026</a:t>
             </a:fld>
             <a:endParaRPr lang="en-US" dirty="0"/>
           </a:p>
@@ -4026,7 +5116,7 @@
           <a:p>
             <a:fld id="{9359D16F-76A5-41BA-ADDD-CBF352B33DDD}" type="slidenum">
               <a:rPr lang="en-IN" smtClean="0"/>
-              <a:t>11</a:t>
+              <a:t>17</a:t>
             </a:fld>
             <a:endParaRPr lang="en-IN" dirty="0"/>
           </a:p>
@@ -4569,7 +5659,7 @@
 </p:sld>
 </file>
 
-<file path=ppt/slides/slide12.xml><?xml version="1.0" encoding="utf-8"?>
+<file path=ppt/slides/slide18.xml><?xml version="1.0" encoding="utf-8"?>
 <p:sld xmlns:a="http://schemas.openxmlformats.org/drawingml/2006/main" xmlns:r="http://schemas.openxmlformats.org/officeDocument/2006/relationships" xmlns:p="http://schemas.openxmlformats.org/presentationml/2006/main">
   <p:cSld>
     <p:spTree>
@@ -4588,10 +5678,731 @@
       </p:grpSpPr>
       <p:sp>
         <p:nvSpPr>
-          <p:cNvPr id="2" name="Footer Placeholder 1">
-            <a:extLst>
-              <a:ext uri="{FF2B5EF4-FFF2-40B4-BE49-F238E27FC236}">
-                <a16:creationId xmlns:a16="http://schemas.microsoft.com/office/drawing/2014/main" id="{A714BADD-841F-98DA-7B1A-166F39B295D9}"/>
+          <p:cNvPr id="2" name="Date Placeholder 1">
+            <a:extLst>
+              <a:ext uri="{FF2B5EF4-FFF2-40B4-BE49-F238E27FC236}">
+                <a16:creationId xmlns:a16="http://schemas.microsoft.com/office/drawing/2014/main" id="{6A92CB29-D881-6A67-D225-3DF4DB918076}"/>
+              </a:ext>
+            </a:extLst>
+          </p:cNvPr>
+          <p:cNvSpPr>
+            <a:spLocks noGrp="1"/>
+          </p:cNvSpPr>
+          <p:nvPr>
+            <p:ph type="dt" sz="half" idx="10"/>
+          </p:nvPr>
+        </p:nvSpPr>
+        <p:spPr/>
+        <p:txBody>
+          <a:bodyPr/>
+          <a:lstStyle/>
+          <a:p>
+            <a:fld id="{E761D253-940C-44B0-8F51-8C8A37AEAF73}" type="datetime1">
+              <a:rPr lang="en-US" smtClean="0"/>
+              <a:t>10/27/2026</a:t>
+            </a:fld>
+            <a:endParaRPr lang="en-US" dirty="0"/>
+          </a:p>
+        </p:txBody>
+      </p:sp>
+      <p:sp>
+        <p:nvSpPr>
+          <p:cNvPr id="3" name="Footer Placeholder 2">
+            <a:extLst>
+              <a:ext uri="{FF2B5EF4-FFF2-40B4-BE49-F238E27FC236}">
+                <a16:creationId xmlns:a16="http://schemas.microsoft.com/office/drawing/2014/main" id="{5EC2C91A-7596-96C2-3EC9-F8EA5FF95474}"/>
+              </a:ext>
+            </a:extLst>
+          </p:cNvPr>
+          <p:cNvSpPr>
+            <a:spLocks noGrp="1"/>
+          </p:cNvSpPr>
+          <p:nvPr>
+            <p:ph type="ftr" sz="quarter" idx="11"/>
+          </p:nvPr>
+        </p:nvSpPr>
+        <p:spPr/>
+        <p:txBody>
+          <a:bodyPr/>
+          <a:lstStyle/>
+          <a:p>
+            <a:r>
+              <a:rPr lang="en-US"/>
+              <a:t>PBL Course Name: Object Oriented Programming through C++(2501CS08)     REVIEW-1</a:t>
+            </a:r>
+            <a:endParaRPr lang="en-US" dirty="0"/>
+          </a:p>
+        </p:txBody>
+      </p:sp>
+      <p:sp>
+        <p:nvSpPr>
+          <p:cNvPr id="4" name="Slide Number Placeholder 3">
+            <a:extLst>
+              <a:ext uri="{FF2B5EF4-FFF2-40B4-BE49-F238E27FC236}">
+                <a16:creationId xmlns:a16="http://schemas.microsoft.com/office/drawing/2014/main" id="{DBBA9422-0E96-63FC-56C8-90E61AC30C92}"/>
+              </a:ext>
+            </a:extLst>
+          </p:cNvPr>
+          <p:cNvSpPr>
+            <a:spLocks noGrp="1"/>
+          </p:cNvSpPr>
+          <p:nvPr>
+            <p:ph type="sldNum" sz="quarter" idx="12"/>
+          </p:nvPr>
+        </p:nvSpPr>
+        <p:spPr/>
+        <p:txBody>
+          <a:bodyPr/>
+          <a:lstStyle/>
+          <a:p>
+            <a:fld id="{D9C5B093-D3DD-4808-813A-F58BF8E67773}" type="slidenum">
+              <a:rPr lang="en-IN" smtClean="0"/>
+              <a:t>18</a:t>
+            </a:fld>
+            <a:endParaRPr lang="en-IN" dirty="0"/>
+          </a:p>
+        </p:txBody>
+      </p:sp>
+      <p:sp>
+        <p:nvSpPr>
+          <p:cNvPr id="5" name="TextBox 4">
+            <a:extLst>
+              <a:ext uri="{FF2B5EF4-FFF2-40B4-BE49-F238E27FC236}">
+                <a16:creationId xmlns:a16="http://schemas.microsoft.com/office/drawing/2014/main" id="{3C577703-A293-8598-539C-0E83C4664BC3}"/>
+              </a:ext>
+            </a:extLst>
+          </p:cNvPr>
+          <p:cNvSpPr txBox="1"/>
+          <p:nvPr/>
+        </p:nvSpPr>
+        <p:spPr>
+          <a:xfrm>
+            <a:off x="4576192" y="214104"/>
+            <a:ext cx="2895600" cy="707886"/>
+          </a:xfrm>
+          <a:prstGeom prst="rect">
+            <a:avLst/>
+          </a:prstGeom>
+          <a:noFill/>
+        </p:spPr>
+        <p:txBody>
+          <a:bodyPr wrap="square" rtlCol="0">
+            <a:spAutoFit/>
+          </a:bodyPr>
+          <a:lstStyle/>
+          <a:p>
+            <a:r>
+              <a:rPr lang="en-GB" sz="4000" dirty="0">
+                <a:solidFill>
+                  <a:srgbClr val="0000FF"/>
+                </a:solidFill>
+                <a:latin typeface="Maiandra GD" panose="020E0502030308020204" pitchFamily="34" charset="0"/>
+                <a:cs typeface="Aharoni" panose="02010803020104030203" pitchFamily="2" charset="-79"/>
+              </a:rPr>
+              <a:t>Conclusion</a:t>
+            </a:r>
+            <a:endParaRPr lang="en-IN" sz="4000" dirty="0"/>
+          </a:p>
+        </p:txBody>
+      </p:sp>
+      <p:sp>
+        <p:nvSpPr>
+          <p:cNvPr id="7" name="TextBox 6">
+            <a:extLst>
+              <a:ext uri="{FF2B5EF4-FFF2-40B4-BE49-F238E27FC236}">
+                <a16:creationId xmlns:a16="http://schemas.microsoft.com/office/drawing/2014/main" id="{520C44B8-9E64-F657-2BD8-E7D8F6BE4778}"/>
+              </a:ext>
+            </a:extLst>
+          </p:cNvPr>
+          <p:cNvSpPr txBox="1"/>
+          <p:nvPr/>
+        </p:nvSpPr>
+        <p:spPr>
+          <a:xfrm>
+            <a:off x="533400" y="1447800"/>
+            <a:ext cx="8549640" cy="4446730"/>
+          </a:xfrm>
+          <a:prstGeom prst="rect">
+            <a:avLst/>
+          </a:prstGeom>
+          <a:noFill/>
+        </p:spPr>
+        <p:txBody>
+          <a:bodyPr wrap="square">
+            <a:spAutoFit/>
+          </a:bodyPr>
+          <a:lstStyle/>
+          <a:p>
+            <a:pPr marL="342900" lvl="0" indent="-342900">
+              <a:lnSpc>
+                <a:spcPct val="200000"/>
+              </a:lnSpc>
+              <a:buFont typeface="Arial" panose="020B0604020202020204" pitchFamily="34" charset="0"/>
+              <a:buChar char="•"/>
+            </a:pPr>
+            <a:r>
+              <a:rPr lang="en-IN" dirty="0"/>
+              <a:t>The </a:t>
+            </a:r>
+            <a:r>
+              <a:rPr lang="en-IN" b="1" dirty="0"/>
+              <a:t>Student Result System</a:t>
+            </a:r>
+            <a:r>
+              <a:rPr lang="en-IN" dirty="0"/>
+              <a:t> simplifies student result management.</a:t>
+            </a:r>
+          </a:p>
+          <a:p>
+            <a:pPr marL="342900" lvl="0" indent="-342900">
+              <a:lnSpc>
+                <a:spcPct val="200000"/>
+              </a:lnSpc>
+              <a:buFont typeface="Arial" panose="020B0604020202020204" pitchFamily="34" charset="0"/>
+              <a:buChar char="•"/>
+            </a:pPr>
+            <a:r>
+              <a:rPr lang="en-IN" dirty="0"/>
+              <a:t>It reduces manual calculation and record-keeping effort.</a:t>
+            </a:r>
+          </a:p>
+          <a:p>
+            <a:pPr marL="342900" lvl="0" indent="-342900">
+              <a:lnSpc>
+                <a:spcPct val="200000"/>
+              </a:lnSpc>
+              <a:buFont typeface="Arial" panose="020B0604020202020204" pitchFamily="34" charset="0"/>
+              <a:buChar char="•"/>
+            </a:pPr>
+            <a:r>
+              <a:rPr lang="en-IN" dirty="0"/>
+              <a:t>The system provides quick access to student results.</a:t>
+            </a:r>
+          </a:p>
+          <a:p>
+            <a:pPr marL="342900" lvl="0" indent="-342900">
+              <a:lnSpc>
+                <a:spcPct val="200000"/>
+              </a:lnSpc>
+              <a:buFont typeface="Arial" panose="020B0604020202020204" pitchFamily="34" charset="0"/>
+              <a:buChar char="•"/>
+            </a:pPr>
+            <a:r>
+              <a:rPr lang="en-IN" dirty="0"/>
+              <a:t>Automatic calculation helps reduce errors.</a:t>
+            </a:r>
+          </a:p>
+          <a:p>
+            <a:pPr marL="342900" lvl="0" indent="-342900">
+              <a:lnSpc>
+                <a:spcPct val="200000"/>
+              </a:lnSpc>
+              <a:buFont typeface="Arial" panose="020B0604020202020204" pitchFamily="34" charset="0"/>
+              <a:buChar char="•"/>
+            </a:pPr>
+            <a:r>
+              <a:rPr lang="en-IN" dirty="0"/>
+              <a:t>Topper and failed student identification makes result analysis easier.</a:t>
+            </a:r>
+          </a:p>
+          <a:p>
+            <a:pPr marL="342900" lvl="0" indent="-342900">
+              <a:lnSpc>
+                <a:spcPct val="200000"/>
+              </a:lnSpc>
+              <a:buFont typeface="Arial" panose="020B0604020202020204" pitchFamily="34" charset="0"/>
+              <a:buChar char="•"/>
+            </a:pPr>
+            <a:r>
+              <a:rPr lang="en-IN" dirty="0"/>
+              <a:t>The project demonstrates practical implementation of </a:t>
+            </a:r>
+            <a:r>
+              <a:rPr lang="en-IN" b="1" dirty="0"/>
+              <a:t>C++ and OOP concepts</a:t>
+            </a:r>
+            <a:r>
+              <a:rPr lang="en-IN" dirty="0"/>
+              <a:t>.</a:t>
+            </a:r>
+          </a:p>
+          <a:p>
+            <a:pPr marL="342900" lvl="0" indent="-342900">
+              <a:lnSpc>
+                <a:spcPct val="200000"/>
+              </a:lnSpc>
+              <a:buFont typeface="Arial" panose="020B0604020202020204" pitchFamily="34" charset="0"/>
+              <a:buChar char="•"/>
+            </a:pPr>
+            <a:r>
+              <a:rPr lang="en-IN" dirty="0"/>
+              <a:t>The system can be further improved with file storage, database connectivity, and a graphical interface.</a:t>
+            </a:r>
+          </a:p>
+        </p:txBody>
+      </p:sp>
+    </p:spTree>
+    <p:extLst>
+      <p:ext uri="{BB962C8B-B14F-4D97-AF65-F5344CB8AC3E}">
+        <p14:creationId xmlns:p14="http://schemas.microsoft.com/office/powerpoint/2010/main" val="1037492999"/>
+      </p:ext>
+    </p:extLst>
+  </p:cSld>
+  <p:clrMapOvr>
+    <a:masterClrMapping/>
+  </p:clrMapOvr>
+</p:sld>
+</file>
+
+<file path=ppt/slides/slide19.xml><?xml version="1.0" encoding="utf-8"?>
+<p:sld xmlns:a="http://schemas.openxmlformats.org/drawingml/2006/main" xmlns:r="http://schemas.openxmlformats.org/officeDocument/2006/relationships" xmlns:p="http://schemas.openxmlformats.org/presentationml/2006/main">
+  <p:cSld>
+    <p:spTree>
+      <p:nvGrpSpPr>
+        <p:cNvPr id="1" name=""/>
+        <p:cNvGrpSpPr/>
+        <p:nvPr/>
+      </p:nvGrpSpPr>
+      <p:grpSpPr>
+        <a:xfrm>
+          <a:off x="0" y="0"/>
+          <a:ext cx="0" cy="0"/>
+          <a:chOff x="0" y="0"/>
+          <a:chExt cx="0" cy="0"/>
+        </a:xfrm>
+      </p:grpSpPr>
+      <p:sp>
+        <p:nvSpPr>
+          <p:cNvPr id="2" name="Date Placeholder 1">
+            <a:extLst>
+              <a:ext uri="{FF2B5EF4-FFF2-40B4-BE49-F238E27FC236}">
+                <a16:creationId xmlns:a16="http://schemas.microsoft.com/office/drawing/2014/main" id="{09328EB6-5593-D2E5-0DB8-121AC9398CD1}"/>
+              </a:ext>
+            </a:extLst>
+          </p:cNvPr>
+          <p:cNvSpPr>
+            <a:spLocks noGrp="1"/>
+          </p:cNvSpPr>
+          <p:nvPr>
+            <p:ph type="dt" sz="half" idx="10"/>
+          </p:nvPr>
+        </p:nvSpPr>
+        <p:spPr/>
+        <p:txBody>
+          <a:bodyPr/>
+          <a:lstStyle/>
+          <a:p>
+            <a:fld id="{E761D253-940C-44B0-8F51-8C8A37AEAF73}" type="datetime1">
+              <a:rPr lang="en-US" smtClean="0"/>
+              <a:t>10/27/2026</a:t>
+            </a:fld>
+            <a:endParaRPr lang="en-US" dirty="0"/>
+          </a:p>
+        </p:txBody>
+      </p:sp>
+      <p:sp>
+        <p:nvSpPr>
+          <p:cNvPr id="3" name="Footer Placeholder 2">
+            <a:extLst>
+              <a:ext uri="{FF2B5EF4-FFF2-40B4-BE49-F238E27FC236}">
+                <a16:creationId xmlns:a16="http://schemas.microsoft.com/office/drawing/2014/main" id="{5085BDA6-0AFB-BBE6-167E-1FD3D349EB81}"/>
+              </a:ext>
+            </a:extLst>
+          </p:cNvPr>
+          <p:cNvSpPr>
+            <a:spLocks noGrp="1"/>
+          </p:cNvSpPr>
+          <p:nvPr>
+            <p:ph type="ftr" sz="quarter" idx="11"/>
+          </p:nvPr>
+        </p:nvSpPr>
+        <p:spPr/>
+        <p:txBody>
+          <a:bodyPr/>
+          <a:lstStyle/>
+          <a:p>
+            <a:r>
+              <a:rPr lang="en-US"/>
+              <a:t>PBL Course Name: Object Oriented Programming through C++(2501CS08)     REVIEW-1</a:t>
+            </a:r>
+            <a:endParaRPr lang="en-US" dirty="0"/>
+          </a:p>
+        </p:txBody>
+      </p:sp>
+      <p:sp>
+        <p:nvSpPr>
+          <p:cNvPr id="4" name="Slide Number Placeholder 3">
+            <a:extLst>
+              <a:ext uri="{FF2B5EF4-FFF2-40B4-BE49-F238E27FC236}">
+                <a16:creationId xmlns:a16="http://schemas.microsoft.com/office/drawing/2014/main" id="{82E13C1A-1AF5-8A33-041D-5D5855580072}"/>
+              </a:ext>
+            </a:extLst>
+          </p:cNvPr>
+          <p:cNvSpPr>
+            <a:spLocks noGrp="1"/>
+          </p:cNvSpPr>
+          <p:nvPr>
+            <p:ph type="sldNum" sz="quarter" idx="12"/>
+          </p:nvPr>
+        </p:nvSpPr>
+        <p:spPr/>
+        <p:txBody>
+          <a:bodyPr/>
+          <a:lstStyle/>
+          <a:p>
+            <a:fld id="{D9C5B093-D3DD-4808-813A-F58BF8E67773}" type="slidenum">
+              <a:rPr lang="en-IN" smtClean="0"/>
+              <a:t>19</a:t>
+            </a:fld>
+            <a:endParaRPr lang="en-IN" dirty="0"/>
+          </a:p>
+        </p:txBody>
+      </p:sp>
+      <p:sp>
+        <p:nvSpPr>
+          <p:cNvPr id="5" name="TextBox 4">
+            <a:extLst>
+              <a:ext uri="{FF2B5EF4-FFF2-40B4-BE49-F238E27FC236}">
+                <a16:creationId xmlns:a16="http://schemas.microsoft.com/office/drawing/2014/main" id="{70865DA9-10FE-2C5A-AD93-C2BC54E0F21B}"/>
+              </a:ext>
+            </a:extLst>
+          </p:cNvPr>
+          <p:cNvSpPr txBox="1"/>
+          <p:nvPr/>
+        </p:nvSpPr>
+        <p:spPr>
+          <a:xfrm>
+            <a:off x="4800600" y="320675"/>
+            <a:ext cx="4038600" cy="1323439"/>
+          </a:xfrm>
+          <a:prstGeom prst="rect">
+            <a:avLst/>
+          </a:prstGeom>
+          <a:noFill/>
+        </p:spPr>
+        <p:txBody>
+          <a:bodyPr wrap="square" rtlCol="0">
+            <a:spAutoFit/>
+          </a:bodyPr>
+          <a:lstStyle/>
+          <a:p>
+            <a:r>
+              <a:rPr lang="en-GB" sz="4000" dirty="0">
+                <a:solidFill>
+                  <a:srgbClr val="0000FF"/>
+                </a:solidFill>
+                <a:latin typeface="Maiandra GD" panose="020E0502030308020204" pitchFamily="34" charset="0"/>
+                <a:cs typeface="Aharoni" panose="02010803020104030203" pitchFamily="2" charset="-79"/>
+              </a:rPr>
+              <a:t>Reference</a:t>
+            </a:r>
+            <a:endParaRPr lang="en-IN" sz="4000" dirty="0"/>
+          </a:p>
+          <a:p>
+            <a:endParaRPr lang="en-IN" sz="4000" dirty="0"/>
+          </a:p>
+        </p:txBody>
+      </p:sp>
+      <p:sp>
+        <p:nvSpPr>
+          <p:cNvPr id="7" name="TextBox 6">
+            <a:extLst>
+              <a:ext uri="{FF2B5EF4-FFF2-40B4-BE49-F238E27FC236}">
+                <a16:creationId xmlns:a16="http://schemas.microsoft.com/office/drawing/2014/main" id="{CED39081-7CD3-C40D-E9AD-7C4F76D9B106}"/>
+              </a:ext>
+            </a:extLst>
+          </p:cNvPr>
+          <p:cNvSpPr txBox="1"/>
+          <p:nvPr/>
+        </p:nvSpPr>
+        <p:spPr>
+          <a:xfrm>
+            <a:off x="747464" y="1644114"/>
+            <a:ext cx="9525000" cy="2784737"/>
+          </a:xfrm>
+          <a:prstGeom prst="rect">
+            <a:avLst/>
+          </a:prstGeom>
+          <a:noFill/>
+        </p:spPr>
+        <p:txBody>
+          <a:bodyPr wrap="square">
+            <a:spAutoFit/>
+          </a:bodyPr>
+          <a:lstStyle/>
+          <a:p>
+            <a:pPr marL="342900" lvl="0" indent="-342900">
+              <a:lnSpc>
+                <a:spcPct val="200000"/>
+              </a:lnSpc>
+              <a:buFont typeface="Arial" panose="020B0604020202020204" pitchFamily="34" charset="0"/>
+              <a:buChar char="•"/>
+            </a:pPr>
+            <a:r>
+              <a:rPr lang="en-IN" dirty="0"/>
+              <a:t>C++ programming concepts and Object-Oriented Programming course material.</a:t>
+            </a:r>
+          </a:p>
+          <a:p>
+            <a:pPr marL="342900" lvl="0" indent="-342900">
+              <a:lnSpc>
+                <a:spcPct val="200000"/>
+              </a:lnSpc>
+              <a:buFont typeface="Arial" panose="020B0604020202020204" pitchFamily="34" charset="0"/>
+              <a:buChar char="•"/>
+            </a:pPr>
+            <a:r>
+              <a:rPr lang="en-IN" dirty="0"/>
+              <a:t>C++ Standard Library documentation.</a:t>
+            </a:r>
+          </a:p>
+          <a:p>
+            <a:pPr marL="342900" lvl="0" indent="-342900">
+              <a:lnSpc>
+                <a:spcPct val="200000"/>
+              </a:lnSpc>
+              <a:buFont typeface="Arial" panose="020B0604020202020204" pitchFamily="34" charset="0"/>
+              <a:buChar char="•"/>
+            </a:pPr>
+            <a:r>
+              <a:rPr lang="en-IN" dirty="0"/>
+              <a:t>Class, object, constructor and function concepts in C++.</a:t>
+            </a:r>
+          </a:p>
+          <a:p>
+            <a:pPr marL="342900" lvl="0" indent="-342900">
+              <a:lnSpc>
+                <a:spcPct val="200000"/>
+              </a:lnSpc>
+              <a:buFont typeface="Arial" panose="020B0604020202020204" pitchFamily="34" charset="0"/>
+              <a:buChar char="•"/>
+            </a:pPr>
+            <a:r>
+              <a:rPr lang="en-IN" dirty="0"/>
+              <a:t>Arrays, strings, functions and control statements in C++.</a:t>
+            </a:r>
+          </a:p>
+          <a:p>
+            <a:pPr marL="342900" lvl="0" indent="-342900">
+              <a:lnSpc>
+                <a:spcPct val="200000"/>
+              </a:lnSpc>
+              <a:buFont typeface="Arial" panose="020B0604020202020204" pitchFamily="34" charset="0"/>
+              <a:buChar char="•"/>
+            </a:pPr>
+            <a:r>
+              <a:rPr lang="en-IN" dirty="0"/>
+              <a:t>Project source code and implementation developed for the PBL project.</a:t>
+            </a:r>
+          </a:p>
+        </p:txBody>
+      </p:sp>
+    </p:spTree>
+    <p:extLst>
+      <p:ext uri="{BB962C8B-B14F-4D97-AF65-F5344CB8AC3E}">
+        <p14:creationId xmlns:p14="http://schemas.microsoft.com/office/powerpoint/2010/main" val="2337998524"/>
+      </p:ext>
+    </p:extLst>
+  </p:cSld>
+  <p:clrMapOvr>
+    <a:masterClrMapping/>
+  </p:clrMapOvr>
+</p:sld>
+</file>
+
+<file path=ppt/slides/slide2.xml><?xml version="1.0" encoding="utf-8"?>
+<p:sld xmlns:a="http://schemas.openxmlformats.org/drawingml/2006/main" xmlns:r="http://schemas.openxmlformats.org/officeDocument/2006/relationships" xmlns:p="http://schemas.openxmlformats.org/presentationml/2006/main">
+  <p:cSld>
+    <p:spTree>
+      <p:nvGrpSpPr>
+        <p:cNvPr id="1" name=""/>
+        <p:cNvGrpSpPr/>
+        <p:nvPr/>
+      </p:nvGrpSpPr>
+      <p:grpSpPr>
+        <a:xfrm>
+          <a:off x="0" y="0"/>
+          <a:ext cx="0" cy="0"/>
+          <a:chOff x="0" y="0"/>
+          <a:chExt cx="0" cy="0"/>
+        </a:xfrm>
+      </p:grpSpPr>
+      <p:sp>
+        <p:nvSpPr>
+          <p:cNvPr id="2" name="Content Placeholder 1">
+            <a:extLst>
+              <a:ext uri="{FF2B5EF4-FFF2-40B4-BE49-F238E27FC236}">
+                <a16:creationId xmlns:a16="http://schemas.microsoft.com/office/drawing/2014/main" id="{CCBC3698-B926-FCD8-3E34-A0BCA597160E}"/>
+              </a:ext>
+            </a:extLst>
+          </p:cNvPr>
+          <p:cNvSpPr>
+            <a:spLocks noGrp="1"/>
+          </p:cNvSpPr>
+          <p:nvPr>
+            <p:ph/>
+          </p:nvPr>
+        </p:nvSpPr>
+        <p:spPr/>
+        <p:txBody>
+          <a:bodyPr>
+            <a:normAutofit fontScale="62500" lnSpcReduction="20000"/>
+          </a:bodyPr>
+          <a:lstStyle/>
+          <a:p>
+            <a:pPr marL="914400" lvl="0" indent="-457200">
+              <a:lnSpc>
+                <a:spcPct val="150000"/>
+              </a:lnSpc>
+              <a:buFont typeface="Wingdings" panose="05000000000000000000" pitchFamily="2" charset="2"/>
+              <a:buChar char="Ø"/>
+            </a:pPr>
+            <a:r>
+              <a:rPr lang="en-IN" dirty="0"/>
+              <a:t>Project Abstract </a:t>
+            </a:r>
+          </a:p>
+          <a:p>
+            <a:pPr marL="914400" lvl="0" indent="-457200">
+              <a:lnSpc>
+                <a:spcPct val="150000"/>
+              </a:lnSpc>
+              <a:buFont typeface="Wingdings" panose="05000000000000000000" pitchFamily="2" charset="2"/>
+              <a:buChar char="Ø"/>
+            </a:pPr>
+            <a:r>
+              <a:rPr lang="en-IN" dirty="0"/>
+              <a:t>Problem Statement &amp; Objectives </a:t>
+            </a:r>
+          </a:p>
+          <a:p>
+            <a:pPr marL="914400" lvl="0" indent="-457200">
+              <a:lnSpc>
+                <a:spcPct val="150000"/>
+              </a:lnSpc>
+              <a:buFont typeface="Wingdings" panose="05000000000000000000" pitchFamily="2" charset="2"/>
+              <a:buChar char="Ø"/>
+            </a:pPr>
+            <a:r>
+              <a:rPr lang="en-IN" dirty="0"/>
+              <a:t>Planned Modules / Functions </a:t>
+            </a:r>
+          </a:p>
+          <a:p>
+            <a:pPr marL="914400" lvl="0" indent="-457200">
+              <a:lnSpc>
+                <a:spcPct val="150000"/>
+              </a:lnSpc>
+              <a:buFont typeface="Wingdings" panose="05000000000000000000" pitchFamily="2" charset="2"/>
+              <a:buChar char="Ø"/>
+            </a:pPr>
+            <a:r>
+              <a:rPr lang="en-IN" dirty="0"/>
+              <a:t>Users of the system </a:t>
+            </a:r>
+          </a:p>
+          <a:p>
+            <a:pPr marL="914400" lvl="0" indent="-457200">
+              <a:lnSpc>
+                <a:spcPct val="150000"/>
+              </a:lnSpc>
+              <a:buFont typeface="Wingdings" panose="05000000000000000000" pitchFamily="2" charset="2"/>
+              <a:buChar char="Ø"/>
+            </a:pPr>
+            <a:r>
+              <a:rPr lang="en-IN" dirty="0"/>
+              <a:t>Modules/Functionalities</a:t>
+            </a:r>
+          </a:p>
+          <a:p>
+            <a:pPr marL="914400" lvl="0" indent="-457200">
+              <a:lnSpc>
+                <a:spcPct val="150000"/>
+              </a:lnSpc>
+              <a:buFont typeface="Wingdings" panose="05000000000000000000" pitchFamily="2" charset="2"/>
+              <a:buChar char="Ø"/>
+            </a:pPr>
+            <a:r>
+              <a:rPr lang="en-IN" dirty="0"/>
+              <a:t>Architecture Diagram</a:t>
+            </a:r>
+          </a:p>
+          <a:p>
+            <a:pPr marL="914400" lvl="0" indent="-457200">
+              <a:lnSpc>
+                <a:spcPct val="150000"/>
+              </a:lnSpc>
+              <a:buFont typeface="Wingdings" panose="05000000000000000000" pitchFamily="2" charset="2"/>
+              <a:buChar char="Ø"/>
+            </a:pPr>
+            <a:r>
+              <a:rPr lang="en-US" dirty="0"/>
+              <a:t>ER Diagram / DFD</a:t>
+            </a:r>
+          </a:p>
+          <a:p>
+            <a:pPr marL="914400" lvl="0" indent="-457200">
+              <a:lnSpc>
+                <a:spcPct val="150000"/>
+              </a:lnSpc>
+              <a:buFont typeface="Wingdings" panose="05000000000000000000" pitchFamily="2" charset="2"/>
+              <a:buChar char="Ø"/>
+            </a:pPr>
+            <a:r>
+              <a:rPr lang="en-US" dirty="0"/>
+              <a:t>Planning and Timeline Diagram</a:t>
+            </a:r>
+          </a:p>
+          <a:p>
+            <a:pPr marL="914400" lvl="0" indent="-457200">
+              <a:lnSpc>
+                <a:spcPct val="150000"/>
+              </a:lnSpc>
+              <a:buFont typeface="Wingdings" panose="05000000000000000000" pitchFamily="2" charset="2"/>
+              <a:buChar char="Ø"/>
+            </a:pPr>
+            <a:r>
+              <a:rPr lang="en-US" dirty="0"/>
+              <a:t>Role of each individual</a:t>
+            </a:r>
+          </a:p>
+        </p:txBody>
+      </p:sp>
+      <p:sp>
+        <p:nvSpPr>
+          <p:cNvPr id="3" name="Date Placeholder 2">
+            <a:extLst>
+              <a:ext uri="{FF2B5EF4-FFF2-40B4-BE49-F238E27FC236}">
+                <a16:creationId xmlns:a16="http://schemas.microsoft.com/office/drawing/2014/main" id="{1D2B478A-2226-B360-8AD2-E37AD61AAA2F}"/>
+              </a:ext>
+            </a:extLst>
+          </p:cNvPr>
+          <p:cNvSpPr>
+            <a:spLocks noGrp="1"/>
+          </p:cNvSpPr>
+          <p:nvPr>
+            <p:ph type="dt" sz="half" idx="1"/>
+          </p:nvPr>
+        </p:nvSpPr>
+        <p:spPr/>
+        <p:txBody>
+          <a:bodyPr/>
+          <a:lstStyle/>
+          <a:p>
+            <a:fld id="{A4A026F9-4B12-44A3-954F-2C895BB9BCAE}" type="datetime1">
+              <a:rPr lang="en-US" smtClean="0"/>
+              <a:t>10/27/2026</a:t>
+            </a:fld>
+            <a:endParaRPr lang="en-US" dirty="0"/>
+          </a:p>
+        </p:txBody>
+      </p:sp>
+      <p:sp>
+        <p:nvSpPr>
+          <p:cNvPr id="4" name="Footer Placeholder 3">
+            <a:extLst>
+              <a:ext uri="{FF2B5EF4-FFF2-40B4-BE49-F238E27FC236}">
+                <a16:creationId xmlns:a16="http://schemas.microsoft.com/office/drawing/2014/main" id="{6C1A7CD3-FDC3-32A7-74E1-968EEFC4A74C}"/>
               </a:ext>
             </a:extLst>
           </p:cNvPr>
@@ -4617,6 +6428,143 @@
       </p:sp>
       <p:sp>
         <p:nvSpPr>
+          <p:cNvPr id="5" name="Slide Number Placeholder 4">
+            <a:extLst>
+              <a:ext uri="{FF2B5EF4-FFF2-40B4-BE49-F238E27FC236}">
+                <a16:creationId xmlns:a16="http://schemas.microsoft.com/office/drawing/2014/main" id="{2EC66408-B064-CD45-6F0B-FF7488C8CCC8}"/>
+              </a:ext>
+            </a:extLst>
+          </p:cNvPr>
+          <p:cNvSpPr>
+            <a:spLocks noGrp="1"/>
+          </p:cNvSpPr>
+          <p:nvPr>
+            <p:ph type="sldNum" sz="quarter" idx="3"/>
+          </p:nvPr>
+        </p:nvSpPr>
+        <p:spPr/>
+        <p:txBody>
+          <a:bodyPr/>
+          <a:lstStyle/>
+          <a:p>
+            <a:fld id="{9359D16F-76A5-41BA-ADDD-CBF352B33DDD}" type="slidenum">
+              <a:rPr lang="en-IN" smtClean="0"/>
+              <a:t>2</a:t>
+            </a:fld>
+            <a:endParaRPr lang="en-IN" dirty="0"/>
+          </a:p>
+        </p:txBody>
+      </p:sp>
+      <p:sp>
+        <p:nvSpPr>
+          <p:cNvPr id="7" name="TextBox 6">
+            <a:extLst>
+              <a:ext uri="{FF2B5EF4-FFF2-40B4-BE49-F238E27FC236}">
+                <a16:creationId xmlns:a16="http://schemas.microsoft.com/office/drawing/2014/main" id="{F8107C4F-2400-B326-479D-154C65509A60}"/>
+              </a:ext>
+            </a:extLst>
+          </p:cNvPr>
+          <p:cNvSpPr txBox="1"/>
+          <p:nvPr/>
+        </p:nvSpPr>
+        <p:spPr>
+          <a:xfrm>
+            <a:off x="3886200" y="433845"/>
+            <a:ext cx="5223386" cy="661720"/>
+          </a:xfrm>
+          <a:prstGeom prst="rect">
+            <a:avLst/>
+          </a:prstGeom>
+          <a:noFill/>
+        </p:spPr>
+        <p:txBody>
+          <a:bodyPr wrap="square">
+            <a:spAutoFit/>
+          </a:bodyPr>
+          <a:lstStyle/>
+          <a:p>
+            <a:pPr lvl="0" algn="ctr">
+              <a:lnSpc>
+                <a:spcPct val="90000"/>
+              </a:lnSpc>
+              <a:spcBef>
+                <a:spcPct val="0"/>
+              </a:spcBef>
+            </a:pPr>
+            <a:r>
+              <a:rPr lang="en-GB" sz="4000" dirty="0">
+                <a:solidFill>
+                  <a:srgbClr val="0000FF"/>
+                </a:solidFill>
+                <a:latin typeface="Maiandra GD" panose="020E0502030308020204" pitchFamily="34" charset="0"/>
+                <a:cs typeface="Aharoni" panose="02010803020104030203" pitchFamily="2" charset="-79"/>
+              </a:rPr>
+              <a:t>Contents</a:t>
+            </a:r>
+          </a:p>
+        </p:txBody>
+      </p:sp>
+    </p:spTree>
+    <p:extLst>
+      <p:ext uri="{BB962C8B-B14F-4D97-AF65-F5344CB8AC3E}">
+        <p14:creationId xmlns:p14="http://schemas.microsoft.com/office/powerpoint/2010/main" val="1780977059"/>
+      </p:ext>
+    </p:extLst>
+  </p:cSld>
+  <p:clrMapOvr>
+    <a:masterClrMapping/>
+  </p:clrMapOvr>
+</p:sld>
+</file>
+
+<file path=ppt/slides/slide20.xml><?xml version="1.0" encoding="utf-8"?>
+<p:sld xmlns:a="http://schemas.openxmlformats.org/drawingml/2006/main" xmlns:r="http://schemas.openxmlformats.org/officeDocument/2006/relationships" xmlns:p="http://schemas.openxmlformats.org/presentationml/2006/main">
+  <p:cSld>
+    <p:spTree>
+      <p:nvGrpSpPr>
+        <p:cNvPr id="1" name=""/>
+        <p:cNvGrpSpPr/>
+        <p:nvPr/>
+      </p:nvGrpSpPr>
+      <p:grpSpPr>
+        <a:xfrm>
+          <a:off x="0" y="0"/>
+          <a:ext cx="0" cy="0"/>
+          <a:chOff x="0" y="0"/>
+          <a:chExt cx="0" cy="0"/>
+        </a:xfrm>
+      </p:grpSpPr>
+      <p:sp>
+        <p:nvSpPr>
+          <p:cNvPr id="2" name="Footer Placeholder 1">
+            <a:extLst>
+              <a:ext uri="{FF2B5EF4-FFF2-40B4-BE49-F238E27FC236}">
+                <a16:creationId xmlns:a16="http://schemas.microsoft.com/office/drawing/2014/main" id="{A714BADD-841F-98DA-7B1A-166F39B295D9}"/>
+              </a:ext>
+            </a:extLst>
+          </p:cNvPr>
+          <p:cNvSpPr>
+            <a:spLocks noGrp="1"/>
+          </p:cNvSpPr>
+          <p:nvPr>
+            <p:ph type="ftr" sz="quarter" idx="2"/>
+          </p:nvPr>
+        </p:nvSpPr>
+        <p:spPr/>
+        <p:txBody>
+          <a:bodyPr/>
+          <a:lstStyle/>
+          <a:p>
+            <a:r>
+              <a:rPr lang="en-US"/>
+              <a:t>PBL Course Name: Object Oriented Programming through C++(2501CS08)     REVIEW-1</a:t>
+            </a:r>
+            <a:endParaRPr lang="en-US" dirty="0"/>
+          </a:p>
+        </p:txBody>
+      </p:sp>
+      <p:sp>
+        <p:nvSpPr>
           <p:cNvPr id="3" name="Date Placeholder 2">
             <a:extLst>
               <a:ext uri="{FF2B5EF4-FFF2-40B4-BE49-F238E27FC236}">
@@ -4638,7 +6586,7 @@
           <a:p>
             <a:fld id="{3383F8C5-9DCC-4575-9E47-831DF7A3DFC7}" type="datetime1">
               <a:rPr lang="en-US" smtClean="0"/>
-              <a:t>8/25/2026</a:t>
+              <a:t>10/27/2026</a:t>
             </a:fld>
             <a:endParaRPr lang="en-US" dirty="0"/>
           </a:p>
@@ -4667,7 +6615,7 @@
           <a:p>
             <a:fld id="{9359D16F-76A5-41BA-ADDD-CBF352B33DDD}" type="slidenum">
               <a:rPr lang="en-IN" smtClean="0"/>
-              <a:t>12</a:t>
+              <a:t>20</a:t>
             </a:fld>
             <a:endParaRPr lang="en-IN" dirty="0"/>
           </a:p>
@@ -4754,313 +6702,6 @@
 </p:sld>
 </file>
 
-<file path=ppt/slides/slide2.xml><?xml version="1.0" encoding="utf-8"?>
-<p:sld xmlns:a="http://schemas.openxmlformats.org/drawingml/2006/main" xmlns:r="http://schemas.openxmlformats.org/officeDocument/2006/relationships" xmlns:p="http://schemas.openxmlformats.org/presentationml/2006/main">
-  <p:cSld>
-    <p:spTree>
-      <p:nvGrpSpPr>
-        <p:cNvPr id="1" name=""/>
-        <p:cNvGrpSpPr/>
-        <p:nvPr/>
-      </p:nvGrpSpPr>
-      <p:grpSpPr>
-        <a:xfrm>
-          <a:off x="0" y="0"/>
-          <a:ext cx="0" cy="0"/>
-          <a:chOff x="0" y="0"/>
-          <a:chExt cx="0" cy="0"/>
-        </a:xfrm>
-      </p:grpSpPr>
-      <p:sp>
-        <p:nvSpPr>
-          <p:cNvPr id="2" name="Content Placeholder 1">
-            <a:extLst>
-              <a:ext uri="{FF2B5EF4-FFF2-40B4-BE49-F238E27FC236}">
-                <a16:creationId xmlns:a16="http://schemas.microsoft.com/office/drawing/2014/main" id="{CCBC3698-B926-FCD8-3E34-A0BCA597160E}"/>
-              </a:ext>
-            </a:extLst>
-          </p:cNvPr>
-          <p:cNvSpPr>
-            <a:spLocks noGrp="1"/>
-          </p:cNvSpPr>
-          <p:nvPr>
-            <p:ph/>
-          </p:nvPr>
-        </p:nvSpPr>
-        <p:spPr/>
-        <p:txBody>
-          <a:bodyPr>
-            <a:normAutofit fontScale="62500" lnSpcReduction="20000"/>
-          </a:bodyPr>
-          <a:lstStyle/>
-          <a:p>
-            <a:pPr marL="914400" lvl="0" indent="-457200">
-              <a:lnSpc>
-                <a:spcPct val="150000"/>
-              </a:lnSpc>
-              <a:buFont typeface="Wingdings" panose="05000000000000000000" pitchFamily="2" charset="2"/>
-              <a:buChar char="Ø"/>
-            </a:pPr>
-            <a:r>
-              <a:rPr lang="en-IN" dirty="0"/>
-              <a:t>Project Abstract </a:t>
-            </a:r>
-          </a:p>
-          <a:p>
-            <a:pPr marL="914400" lvl="0" indent="-457200">
-              <a:lnSpc>
-                <a:spcPct val="150000"/>
-              </a:lnSpc>
-              <a:buFont typeface="Wingdings" panose="05000000000000000000" pitchFamily="2" charset="2"/>
-              <a:buChar char="Ø"/>
-            </a:pPr>
-            <a:r>
-              <a:rPr lang="en-IN" dirty="0"/>
-              <a:t>Problem Statement &amp; Objectives </a:t>
-            </a:r>
-          </a:p>
-          <a:p>
-            <a:pPr marL="914400" lvl="0" indent="-457200">
-              <a:lnSpc>
-                <a:spcPct val="150000"/>
-              </a:lnSpc>
-              <a:buFont typeface="Wingdings" panose="05000000000000000000" pitchFamily="2" charset="2"/>
-              <a:buChar char="Ø"/>
-            </a:pPr>
-            <a:r>
-              <a:rPr lang="en-IN" dirty="0"/>
-              <a:t>Planned Modules / Functions </a:t>
-            </a:r>
-          </a:p>
-          <a:p>
-            <a:pPr marL="914400" lvl="0" indent="-457200">
-              <a:lnSpc>
-                <a:spcPct val="150000"/>
-              </a:lnSpc>
-              <a:buFont typeface="Wingdings" panose="05000000000000000000" pitchFamily="2" charset="2"/>
-              <a:buChar char="Ø"/>
-            </a:pPr>
-            <a:r>
-              <a:rPr lang="en-IN" dirty="0"/>
-              <a:t>Users of the system </a:t>
-            </a:r>
-          </a:p>
-          <a:p>
-            <a:pPr marL="914400" lvl="0" indent="-457200">
-              <a:lnSpc>
-                <a:spcPct val="150000"/>
-              </a:lnSpc>
-              <a:buFont typeface="Wingdings" panose="05000000000000000000" pitchFamily="2" charset="2"/>
-              <a:buChar char="Ø"/>
-            </a:pPr>
-            <a:r>
-              <a:rPr lang="en-IN" dirty="0"/>
-              <a:t>Modules/Functionalities</a:t>
-            </a:r>
-          </a:p>
-          <a:p>
-            <a:pPr marL="914400" lvl="0" indent="-457200">
-              <a:lnSpc>
-                <a:spcPct val="150000"/>
-              </a:lnSpc>
-              <a:buFont typeface="Wingdings" panose="05000000000000000000" pitchFamily="2" charset="2"/>
-              <a:buChar char="Ø"/>
-            </a:pPr>
-            <a:r>
-              <a:rPr lang="en-IN" dirty="0"/>
-              <a:t>Architecture Diagram</a:t>
-            </a:r>
-          </a:p>
-          <a:p>
-            <a:pPr marL="914400" lvl="0" indent="-457200">
-              <a:lnSpc>
-                <a:spcPct val="150000"/>
-              </a:lnSpc>
-              <a:buFont typeface="Wingdings" panose="05000000000000000000" pitchFamily="2" charset="2"/>
-              <a:buChar char="Ø"/>
-            </a:pPr>
-            <a:r>
-              <a:rPr lang="en-US" dirty="0"/>
-              <a:t>ER Diagram / DFD</a:t>
-            </a:r>
-          </a:p>
-          <a:p>
-            <a:pPr marL="914400" lvl="0" indent="-457200">
-              <a:lnSpc>
-                <a:spcPct val="150000"/>
-              </a:lnSpc>
-              <a:buFont typeface="Wingdings" panose="05000000000000000000" pitchFamily="2" charset="2"/>
-              <a:buChar char="Ø"/>
-            </a:pPr>
-            <a:r>
-              <a:rPr lang="en-US" dirty="0"/>
-              <a:t>Planning and Timeline Diagram</a:t>
-            </a:r>
-          </a:p>
-          <a:p>
-            <a:pPr marL="914400" lvl="0" indent="-457200">
-              <a:lnSpc>
-                <a:spcPct val="150000"/>
-              </a:lnSpc>
-              <a:buFont typeface="Wingdings" panose="05000000000000000000" pitchFamily="2" charset="2"/>
-              <a:buChar char="Ø"/>
-            </a:pPr>
-            <a:r>
-              <a:rPr lang="en-US" dirty="0"/>
-              <a:t>Role of each individual</a:t>
-            </a:r>
-          </a:p>
-        </p:txBody>
-      </p:sp>
-      <p:sp>
-        <p:nvSpPr>
-          <p:cNvPr id="3" name="Date Placeholder 2">
-            <a:extLst>
-              <a:ext uri="{FF2B5EF4-FFF2-40B4-BE49-F238E27FC236}">
-                <a16:creationId xmlns:a16="http://schemas.microsoft.com/office/drawing/2014/main" id="{1D2B478A-2226-B360-8AD2-E37AD61AAA2F}"/>
-              </a:ext>
-            </a:extLst>
-          </p:cNvPr>
-          <p:cNvSpPr>
-            <a:spLocks noGrp="1"/>
-          </p:cNvSpPr>
-          <p:nvPr>
-            <p:ph type="dt" sz="half" idx="1"/>
-          </p:nvPr>
-        </p:nvSpPr>
-        <p:spPr/>
-        <p:txBody>
-          <a:bodyPr/>
-          <a:lstStyle/>
-          <a:p>
-            <a:fld id="{A4A026F9-4B12-44A3-954F-2C895BB9BCAE}" type="datetime1">
-              <a:rPr lang="en-US" smtClean="0"/>
-              <a:t>8/25/2026</a:t>
-            </a:fld>
-            <a:endParaRPr lang="en-US" dirty="0"/>
-          </a:p>
-        </p:txBody>
-      </p:sp>
-      <p:sp>
-        <p:nvSpPr>
-          <p:cNvPr id="4" name="Footer Placeholder 3">
-            <a:extLst>
-              <a:ext uri="{FF2B5EF4-FFF2-40B4-BE49-F238E27FC236}">
-                <a16:creationId xmlns:a16="http://schemas.microsoft.com/office/drawing/2014/main" id="{6C1A7CD3-FDC3-32A7-74E1-968EEFC4A74C}"/>
-              </a:ext>
-            </a:extLst>
-          </p:cNvPr>
-          <p:cNvSpPr>
-            <a:spLocks noGrp="1"/>
-          </p:cNvSpPr>
-          <p:nvPr>
-            <p:ph type="ftr" sz="quarter" idx="2"/>
-          </p:nvPr>
-        </p:nvSpPr>
-        <p:spPr/>
-        <p:txBody>
-          <a:bodyPr/>
-          <a:lstStyle/>
-          <a:p>
-            <a:r>
-              <a:rPr lang="en-US"/>
-              <a:t>PBL Course Name: Object Oriented Programming through C++(2501CS08)     REVIEW-1</a:t>
-            </a:r>
-            <a:endParaRPr lang="en-US" dirty="0"/>
-          </a:p>
-        </p:txBody>
-      </p:sp>
-      <p:sp>
-        <p:nvSpPr>
-          <p:cNvPr id="5" name="Slide Number Placeholder 4">
-            <a:extLst>
-              <a:ext uri="{FF2B5EF4-FFF2-40B4-BE49-F238E27FC236}">
-                <a16:creationId xmlns:a16="http://schemas.microsoft.com/office/drawing/2014/main" id="{2EC66408-B064-CD45-6F0B-FF7488C8CCC8}"/>
-              </a:ext>
-            </a:extLst>
-          </p:cNvPr>
-          <p:cNvSpPr>
-            <a:spLocks noGrp="1"/>
-          </p:cNvSpPr>
-          <p:nvPr>
-            <p:ph type="sldNum" sz="quarter" idx="3"/>
-          </p:nvPr>
-        </p:nvSpPr>
-        <p:spPr/>
-        <p:txBody>
-          <a:bodyPr/>
-          <a:lstStyle/>
-          <a:p>
-            <a:fld id="{9359D16F-76A5-41BA-ADDD-CBF352B33DDD}" type="slidenum">
-              <a:rPr lang="en-IN" smtClean="0"/>
-              <a:t>2</a:t>
-            </a:fld>
-            <a:endParaRPr lang="en-IN" dirty="0"/>
-          </a:p>
-        </p:txBody>
-      </p:sp>
-      <p:sp>
-        <p:nvSpPr>
-          <p:cNvPr id="7" name="TextBox 6">
-            <a:extLst>
-              <a:ext uri="{FF2B5EF4-FFF2-40B4-BE49-F238E27FC236}">
-                <a16:creationId xmlns:a16="http://schemas.microsoft.com/office/drawing/2014/main" id="{F8107C4F-2400-B326-479D-154C65509A60}"/>
-              </a:ext>
-            </a:extLst>
-          </p:cNvPr>
-          <p:cNvSpPr txBox="1"/>
-          <p:nvPr/>
-        </p:nvSpPr>
-        <p:spPr>
-          <a:xfrm>
-            <a:off x="3886200" y="433845"/>
-            <a:ext cx="5223386" cy="661720"/>
-          </a:xfrm>
-          <a:prstGeom prst="rect">
-            <a:avLst/>
-          </a:prstGeom>
-          <a:noFill/>
-        </p:spPr>
-        <p:txBody>
-          <a:bodyPr wrap="square">
-            <a:spAutoFit/>
-          </a:bodyPr>
-          <a:lstStyle/>
-          <a:p>
-            <a:pPr lvl="0" algn="ctr">
-              <a:lnSpc>
-                <a:spcPct val="90000"/>
-              </a:lnSpc>
-              <a:spcBef>
-                <a:spcPct val="0"/>
-              </a:spcBef>
-            </a:pPr>
-            <a:r>
-              <a:rPr lang="en-GB" sz="4000" dirty="0">
-                <a:solidFill>
-                  <a:srgbClr val="0000FF"/>
-                </a:solidFill>
-                <a:latin typeface="Maiandra GD" panose="020E0502030308020204" pitchFamily="34" charset="0"/>
-                <a:cs typeface="Aharoni" panose="02010803020104030203" pitchFamily="2" charset="-79"/>
-              </a:rPr>
-              <a:t>Contents</a:t>
-            </a:r>
-          </a:p>
-        </p:txBody>
-      </p:sp>
-    </p:spTree>
-    <p:extLst>
-      <p:ext uri="{BB962C8B-B14F-4D97-AF65-F5344CB8AC3E}">
-        <p14:creationId xmlns:p14="http://schemas.microsoft.com/office/powerpoint/2010/main" val="1780977059"/>
-      </p:ext>
-    </p:extLst>
-  </p:cSld>
-  <p:clrMapOvr>
-    <a:masterClrMapping/>
-  </p:clrMapOvr>
-</p:sld>
-</file>
-
 <file path=ppt/slides/slide3.xml><?xml version="1.0" encoding="utf-8"?>
 <p:sld xmlns:a="http://schemas.openxmlformats.org/drawingml/2006/main" xmlns:r="http://schemas.openxmlformats.org/officeDocument/2006/relationships" xmlns:p="http://schemas.openxmlformats.org/presentationml/2006/main">
   <p:cSld>
@@ -5101,7 +6742,7 @@
           <a:p>
             <a:fld id="{A4A026F9-4B12-44A3-954F-2C895BB9BCAE}" type="datetime1">
               <a:rPr lang="en-US" smtClean="0"/>
-              <a:t>8/25/2026</a:t>
+              <a:t>10/27/2026</a:t>
             </a:fld>
             <a:endParaRPr lang="en-US" dirty="0"/>
           </a:p>
@@ -5295,10 +6936,10 @@
       </p:grpSpPr>
       <p:sp>
         <p:nvSpPr>
-          <p:cNvPr id="3" name="Date Placeholder 2">
-            <a:extLst>
-              <a:ext uri="{FF2B5EF4-FFF2-40B4-BE49-F238E27FC236}">
-                <a16:creationId xmlns:a16="http://schemas.microsoft.com/office/drawing/2014/main" id="{1D2B478A-2226-B360-8AD2-E37AD61AAA2F}"/>
+          <p:cNvPr id="2" name="Date Placeholder 1">
+            <a:extLst>
+              <a:ext uri="{FF2B5EF4-FFF2-40B4-BE49-F238E27FC236}">
+                <a16:creationId xmlns:a16="http://schemas.microsoft.com/office/drawing/2014/main" id="{41AF6E26-5EBD-7DFA-9D63-65A156E2B542}"/>
               </a:ext>
             </a:extLst>
           </p:cNvPr>
@@ -5306,7 +6947,7 @@
             <a:spLocks noGrp="1"/>
           </p:cNvSpPr>
           <p:nvPr>
-            <p:ph type="dt" sz="half" idx="1"/>
+            <p:ph type="dt" sz="half" idx="10"/>
           </p:nvPr>
         </p:nvSpPr>
         <p:spPr/>
@@ -5314,9 +6955,9 @@
           <a:bodyPr/>
           <a:lstStyle/>
           <a:p>
-            <a:fld id="{A4A026F9-4B12-44A3-954F-2C895BB9BCAE}" type="datetime1">
+            <a:fld id="{E761D253-940C-44B0-8F51-8C8A37AEAF73}" type="datetime1">
               <a:rPr lang="en-US" smtClean="0"/>
-              <a:t>8/25/2026</a:t>
+              <a:t>10/27/2026</a:t>
             </a:fld>
             <a:endParaRPr lang="en-US" dirty="0"/>
           </a:p>
@@ -5324,10 +6965,10 @@
       </p:sp>
       <p:sp>
         <p:nvSpPr>
-          <p:cNvPr id="4" name="Footer Placeholder 3">
-            <a:extLst>
-              <a:ext uri="{FF2B5EF4-FFF2-40B4-BE49-F238E27FC236}">
-                <a16:creationId xmlns:a16="http://schemas.microsoft.com/office/drawing/2014/main" id="{6C1A7CD3-FDC3-32A7-74E1-968EEFC4A74C}"/>
+          <p:cNvPr id="3" name="Footer Placeholder 2">
+            <a:extLst>
+              <a:ext uri="{FF2B5EF4-FFF2-40B4-BE49-F238E27FC236}">
+                <a16:creationId xmlns:a16="http://schemas.microsoft.com/office/drawing/2014/main" id="{C40EE6F4-0A46-803D-88FB-5BC3FB5C8359}"/>
               </a:ext>
             </a:extLst>
           </p:cNvPr>
@@ -5335,7 +6976,7 @@
             <a:spLocks noGrp="1"/>
           </p:cNvSpPr>
           <p:nvPr>
-            <p:ph type="ftr" sz="quarter" idx="2"/>
+            <p:ph type="ftr" sz="quarter" idx="11"/>
           </p:nvPr>
         </p:nvSpPr>
         <p:spPr/>
@@ -5353,10 +6994,10 @@
       </p:sp>
       <p:sp>
         <p:nvSpPr>
-          <p:cNvPr id="5" name="Slide Number Placeholder 4">
-            <a:extLst>
-              <a:ext uri="{FF2B5EF4-FFF2-40B4-BE49-F238E27FC236}">
-                <a16:creationId xmlns:a16="http://schemas.microsoft.com/office/drawing/2014/main" id="{2EC66408-B064-CD45-6F0B-FF7488C8CCC8}"/>
+          <p:cNvPr id="4" name="Slide Number Placeholder 3">
+            <a:extLst>
+              <a:ext uri="{FF2B5EF4-FFF2-40B4-BE49-F238E27FC236}">
+                <a16:creationId xmlns:a16="http://schemas.microsoft.com/office/drawing/2014/main" id="{C531D132-664E-A79C-D844-556D4C88701A}"/>
               </a:ext>
             </a:extLst>
           </p:cNvPr>
@@ -5364,7 +7005,7 @@
             <a:spLocks noGrp="1"/>
           </p:cNvSpPr>
           <p:nvPr>
-            <p:ph type="sldNum" sz="quarter" idx="3"/>
+            <p:ph type="sldNum" sz="quarter" idx="12"/>
           </p:nvPr>
         </p:nvSpPr>
         <p:spPr/>
@@ -5372,7 +7013,7 @@
           <a:bodyPr/>
           <a:lstStyle/>
           <a:p>
-            <a:fld id="{9359D16F-76A5-41BA-ADDD-CBF352B33DDD}" type="slidenum">
+            <a:fld id="{D9C5B093-D3DD-4808-813A-F58BF8E67773}" type="slidenum">
               <a:rPr lang="en-IN" smtClean="0"/>
               <a:t>4</a:t>
             </a:fld>
@@ -5382,10 +7023,10 @@
       </p:sp>
       <p:sp>
         <p:nvSpPr>
-          <p:cNvPr id="7" name="TextBox 6">
-            <a:extLst>
-              <a:ext uri="{FF2B5EF4-FFF2-40B4-BE49-F238E27FC236}">
-                <a16:creationId xmlns:a16="http://schemas.microsoft.com/office/drawing/2014/main" id="{F8107C4F-2400-B326-479D-154C65509A60}"/>
+          <p:cNvPr id="5" name="TextBox 4">
+            <a:extLst>
+              <a:ext uri="{FF2B5EF4-FFF2-40B4-BE49-F238E27FC236}">
+                <a16:creationId xmlns:a16="http://schemas.microsoft.com/office/drawing/2014/main" id="{0BA48EA9-9E25-A067-6BB5-369ECE962D18}"/>
               </a:ext>
             </a:extLst>
           </p:cNvPr>
@@ -5394,8 +7035,8 @@
         </p:nvSpPr>
         <p:spPr>
           <a:xfrm>
-            <a:off x="1596000" y="433845"/>
-            <a:ext cx="9000000" cy="661720"/>
+            <a:off x="4572000" y="369393"/>
+            <a:ext cx="4648200" cy="1323439"/>
           </a:xfrm>
           <a:prstGeom prst="rect">
             <a:avLst/>
@@ -5403,38 +7044,33 @@
           <a:noFill/>
         </p:spPr>
         <p:txBody>
-          <a:bodyPr wrap="square">
+          <a:bodyPr wrap="square" rtlCol="0">
             <a:spAutoFit/>
           </a:bodyPr>
           <a:lstStyle/>
           <a:p>
-            <a:pPr lvl="0" algn="ctr">
-              <a:lnSpc>
-                <a:spcPct val="90000"/>
-              </a:lnSpc>
-              <a:spcBef>
-                <a:spcPct val="0"/>
-              </a:spcBef>
-            </a:pPr>
-            <a:r>
-              <a:rPr lang="en-GB" sz="3200" dirty="0">
+            <a:r>
+              <a:rPr lang="en-GB" sz="4000" dirty="0">
                 <a:solidFill>
                   <a:srgbClr val="0000FF"/>
                 </a:solidFill>
                 <a:latin typeface="Maiandra GD" panose="020E0502030308020204" pitchFamily="34" charset="0"/>
                 <a:cs typeface="Aharoni" panose="02010803020104030203" pitchFamily="2" charset="-79"/>
               </a:rPr>
-              <a:t>Problem Statement &amp; Objectives</a:t>
-            </a:r>
-          </a:p>
-        </p:txBody>
-      </p:sp>
-      <p:sp>
-        <p:nvSpPr>
-          <p:cNvPr id="6" name="TextBox 5">
-            <a:extLst>
-              <a:ext uri="{FF2B5EF4-FFF2-40B4-BE49-F238E27FC236}">
-                <a16:creationId xmlns:a16="http://schemas.microsoft.com/office/drawing/2014/main" id="{1CF31069-1D8A-11E5-07F5-A7323DD57A0F}"/>
+              <a:t>Introduction</a:t>
+            </a:r>
+          </a:p>
+          <a:p>
+            <a:endParaRPr lang="en-IN" sz="4000" dirty="0"/>
+          </a:p>
+        </p:txBody>
+      </p:sp>
+      <p:sp>
+        <p:nvSpPr>
+          <p:cNvPr id="7" name="TextBox 6">
+            <a:extLst>
+              <a:ext uri="{FF2B5EF4-FFF2-40B4-BE49-F238E27FC236}">
+                <a16:creationId xmlns:a16="http://schemas.microsoft.com/office/drawing/2014/main" id="{26BA5F32-CA72-AB3E-3305-83A87C881263}"/>
               </a:ext>
             </a:extLst>
           </p:cNvPr>
@@ -5443,8 +7079,8 @@
         </p:nvSpPr>
         <p:spPr>
           <a:xfrm>
-            <a:off x="685800" y="917912"/>
-            <a:ext cx="10668000" cy="5940088"/>
+            <a:off x="533400" y="1600200"/>
+            <a:ext cx="10363200" cy="3699474"/>
           </a:xfrm>
           <a:prstGeom prst="rect">
             <a:avLst/>
@@ -5452,230 +7088,110 @@
           <a:noFill/>
         </p:spPr>
         <p:txBody>
-          <a:bodyPr wrap="square" rtlCol="0">
+          <a:bodyPr wrap="square">
             <a:spAutoFit/>
           </a:bodyPr>
           <a:lstStyle/>
           <a:p>
-            <a:pPr marL="342900" indent="-342900">
-              <a:lnSpc>
-                <a:spcPct val="150000"/>
-              </a:lnSpc>
-              <a:buFont typeface="Wingdings" panose="05000000000000000000" pitchFamily="2" charset="2"/>
-              <a:buChar char="Ø"/>
-            </a:pPr>
-            <a:r>
-              <a:rPr lang="en-IN" sz="2000" b="1" dirty="0">
-                <a:latin typeface="Times New Roman" panose="02020603050405020304" pitchFamily="18" charset="0"/>
-                <a:cs typeface="Times New Roman" panose="02020603050405020304" pitchFamily="18" charset="0"/>
-              </a:rPr>
-              <a:t>Problem Statement</a:t>
-            </a:r>
-          </a:p>
-          <a:p>
-            <a:pPr marL="342900" indent="-342900">
-              <a:lnSpc>
-                <a:spcPct val="150000"/>
-              </a:lnSpc>
-              <a:buFont typeface="Wingdings" panose="05000000000000000000" pitchFamily="2" charset="2"/>
-              <a:buChar char="§"/>
-            </a:pPr>
-            <a:r>
-              <a:rPr lang="en-IN" sz="2000" dirty="0">
-                <a:latin typeface="Times New Roman" panose="02020603050405020304" pitchFamily="18" charset="0"/>
-                <a:cs typeface="Times New Roman" panose="02020603050405020304" pitchFamily="18" charset="0"/>
-              </a:rPr>
-              <a:t>Manual result management requires considerable time for calculating marks, assigning grades and identifying student performance. It may also result in calculation and record-management errors.</a:t>
-            </a:r>
-          </a:p>
-          <a:p>
-            <a:pPr marL="342900" indent="-342900">
-              <a:lnSpc>
-                <a:spcPct val="150000"/>
-              </a:lnSpc>
-              <a:buFont typeface="Wingdings" panose="05000000000000000000" pitchFamily="2" charset="2"/>
-              <a:buChar char="Ø"/>
-            </a:pPr>
-            <a:r>
-              <a:rPr lang="en-IN" sz="2000" b="1" dirty="0">
-                <a:latin typeface="Times New Roman" panose="02020603050405020304" pitchFamily="18" charset="0"/>
-                <a:cs typeface="Times New Roman" panose="02020603050405020304" pitchFamily="18" charset="0"/>
-              </a:rPr>
-              <a:t>Objectives</a:t>
-            </a:r>
-          </a:p>
-          <a:p>
             <a:pPr marL="342900" lvl="0" indent="-342900">
               <a:lnSpc>
-                <a:spcPct val="150000"/>
+                <a:spcPct val="200000"/>
               </a:lnSpc>
-              <a:buFont typeface="Wingdings" panose="05000000000000000000" pitchFamily="2" charset="2"/>
-              <a:buChar char="§"/>
-            </a:pPr>
-            <a:r>
-              <a:rPr lang="en-IN" sz="2000" dirty="0">
-                <a:latin typeface="Times New Roman" panose="02020603050405020304" pitchFamily="18" charset="0"/>
-                <a:cs typeface="Times New Roman" panose="02020603050405020304" pitchFamily="18" charset="0"/>
-              </a:rPr>
-              <a:t>Develop a simple </a:t>
-            </a:r>
-            <a:r>
-              <a:rPr lang="en-IN" sz="2000" b="1" dirty="0">
-                <a:latin typeface="Times New Roman" panose="02020603050405020304" pitchFamily="18" charset="0"/>
-                <a:cs typeface="Times New Roman" panose="02020603050405020304" pitchFamily="18" charset="0"/>
-              </a:rPr>
-              <a:t>Student Result Management System</a:t>
-            </a:r>
-            <a:r>
-              <a:rPr lang="en-IN" sz="2000" dirty="0">
-                <a:latin typeface="Times New Roman" panose="02020603050405020304" pitchFamily="18" charset="0"/>
-                <a:cs typeface="Times New Roman" panose="02020603050405020304" pitchFamily="18" charset="0"/>
-              </a:rPr>
-              <a:t> using C++. </a:t>
+              <a:buFont typeface="Arial" panose="020B0604020202020204" pitchFamily="34" charset="0"/>
+              <a:buChar char="•"/>
+            </a:pPr>
+            <a:r>
+              <a:rPr lang="en-IN" sz="2000" dirty="0"/>
+              <a:t>The </a:t>
+            </a:r>
+            <a:r>
+              <a:rPr lang="en-IN" sz="2000" b="1" dirty="0"/>
+              <a:t>Student Result System</a:t>
+            </a:r>
+            <a:r>
+              <a:rPr lang="en-IN" sz="2000" dirty="0"/>
+              <a:t> is a simple C++ application for managing student academic results.</a:t>
             </a:r>
           </a:p>
           <a:p>
             <a:pPr marL="342900" lvl="0" indent="-342900">
               <a:lnSpc>
-                <a:spcPct val="150000"/>
+                <a:spcPct val="200000"/>
               </a:lnSpc>
-              <a:buFont typeface="Wingdings" panose="05000000000000000000" pitchFamily="2" charset="2"/>
-              <a:buChar char="§"/>
-            </a:pPr>
-            <a:r>
-              <a:rPr lang="en-IN" sz="2000" dirty="0">
-                <a:latin typeface="Times New Roman" panose="02020603050405020304" pitchFamily="18" charset="0"/>
-                <a:cs typeface="Times New Roman" panose="02020603050405020304" pitchFamily="18" charset="0"/>
-              </a:rPr>
-              <a:t>Store student information using </a:t>
-            </a:r>
-            <a:r>
-              <a:rPr lang="en-IN" sz="2000" b="1" dirty="0">
-                <a:latin typeface="Times New Roman" panose="02020603050405020304" pitchFamily="18" charset="0"/>
-                <a:cs typeface="Times New Roman" panose="02020603050405020304" pitchFamily="18" charset="0"/>
-              </a:rPr>
-              <a:t>classes and objects</a:t>
-            </a:r>
-            <a:r>
-              <a:rPr lang="en-IN" sz="2000" dirty="0">
-                <a:latin typeface="Times New Roman" panose="02020603050405020304" pitchFamily="18" charset="0"/>
-                <a:cs typeface="Times New Roman" panose="02020603050405020304" pitchFamily="18" charset="0"/>
-              </a:rPr>
-              <a:t>. </a:t>
+              <a:buFont typeface="Arial" panose="020B0604020202020204" pitchFamily="34" charset="0"/>
+              <a:buChar char="•"/>
+            </a:pPr>
+            <a:r>
+              <a:rPr lang="en-IN" sz="2000" dirty="0"/>
+              <a:t>It stores student details such as roll number, name, and subject marks.</a:t>
             </a:r>
           </a:p>
           <a:p>
             <a:pPr marL="342900" lvl="0" indent="-342900">
               <a:lnSpc>
-                <a:spcPct val="150000"/>
+                <a:spcPct val="200000"/>
               </a:lnSpc>
-              <a:buFont typeface="Wingdings" panose="05000000000000000000" pitchFamily="2" charset="2"/>
-              <a:buChar char="§"/>
-            </a:pPr>
-            <a:r>
-              <a:rPr lang="en-IN" sz="2000" dirty="0">
-                <a:latin typeface="Times New Roman" panose="02020603050405020304" pitchFamily="18" charset="0"/>
-                <a:cs typeface="Times New Roman" panose="02020603050405020304" pitchFamily="18" charset="0"/>
-              </a:rPr>
-              <a:t>Calculate total, average and percentage automatically. </a:t>
+              <a:buFont typeface="Arial" panose="020B0604020202020204" pitchFamily="34" charset="0"/>
+              <a:buChar char="•"/>
+            </a:pPr>
+            <a:r>
+              <a:rPr lang="en-IN" sz="2000" dirty="0"/>
+              <a:t>The system automatically processes marks and generates the student's result.</a:t>
             </a:r>
           </a:p>
           <a:p>
             <a:pPr marL="342900" lvl="0" indent="-342900">
               <a:lnSpc>
-                <a:spcPct val="150000"/>
+                <a:spcPct val="200000"/>
               </a:lnSpc>
-              <a:buFont typeface="Wingdings" panose="05000000000000000000" pitchFamily="2" charset="2"/>
-              <a:buChar char="§"/>
-            </a:pPr>
-            <a:r>
-              <a:rPr lang="en-IN" sz="2000" dirty="0">
-                <a:latin typeface="Times New Roman" panose="02020603050405020304" pitchFamily="18" charset="0"/>
-                <a:cs typeface="Times New Roman" panose="02020603050405020304" pitchFamily="18" charset="0"/>
-              </a:rPr>
-              <a:t>Generate grades and Pass/Fail status. </a:t>
+              <a:buFont typeface="Arial" panose="020B0604020202020204" pitchFamily="34" charset="0"/>
+              <a:buChar char="•"/>
+            </a:pPr>
+            <a:r>
+              <a:rPr lang="en-IN" sz="2000" dirty="0"/>
+              <a:t>It provides options to add, display, and search student results.</a:t>
             </a:r>
           </a:p>
           <a:p>
             <a:pPr marL="342900" lvl="0" indent="-342900">
               <a:lnSpc>
-                <a:spcPct val="150000"/>
+                <a:spcPct val="200000"/>
               </a:lnSpc>
-              <a:buFont typeface="Wingdings" panose="05000000000000000000" pitchFamily="2" charset="2"/>
-              <a:buChar char="§"/>
-            </a:pPr>
-            <a:r>
-              <a:rPr lang="en-IN" sz="2000" dirty="0">
-                <a:latin typeface="Times New Roman" panose="02020603050405020304" pitchFamily="18" charset="0"/>
-                <a:cs typeface="Times New Roman" panose="02020603050405020304" pitchFamily="18" charset="0"/>
-              </a:rPr>
-              <a:t>Provide student search functionality. </a:t>
+              <a:buFont typeface="Arial" panose="020B0604020202020204" pitchFamily="34" charset="0"/>
+              <a:buChar char="•"/>
+            </a:pPr>
+            <a:r>
+              <a:rPr lang="en-IN" sz="2000" dirty="0"/>
+              <a:t>It also identifies topper students and failed students.</a:t>
             </a:r>
           </a:p>
           <a:p>
             <a:pPr marL="342900" lvl="0" indent="-342900">
               <a:lnSpc>
-                <a:spcPct val="150000"/>
+                <a:spcPct val="200000"/>
               </a:lnSpc>
-              <a:buFont typeface="Wingdings" panose="05000000000000000000" pitchFamily="2" charset="2"/>
-              <a:buChar char="§"/>
-            </a:pPr>
-            <a:r>
-              <a:rPr lang="en-IN" sz="2000" dirty="0">
-                <a:latin typeface="Times New Roman" panose="02020603050405020304" pitchFamily="18" charset="0"/>
-                <a:cs typeface="Times New Roman" panose="02020603050405020304" pitchFamily="18" charset="0"/>
-              </a:rPr>
-              <a:t>Identify topper(s). </a:t>
-            </a:r>
-          </a:p>
-          <a:p>
-            <a:pPr marL="342900" lvl="0" indent="-342900">
-              <a:lnSpc>
-                <a:spcPct val="150000"/>
-              </a:lnSpc>
-              <a:buFont typeface="Wingdings" panose="05000000000000000000" pitchFamily="2" charset="2"/>
-              <a:buChar char="§"/>
-            </a:pPr>
-            <a:r>
-              <a:rPr lang="en-IN" sz="2000" dirty="0">
-                <a:latin typeface="Times New Roman" panose="02020603050405020304" pitchFamily="18" charset="0"/>
-                <a:cs typeface="Times New Roman" panose="02020603050405020304" pitchFamily="18" charset="0"/>
-              </a:rPr>
-              <a:t>Display all failed students. </a:t>
-            </a:r>
-          </a:p>
-          <a:p>
-            <a:pPr marL="342900" lvl="0" indent="-342900">
-              <a:lnSpc>
-                <a:spcPct val="150000"/>
-              </a:lnSpc>
-              <a:buFont typeface="Wingdings" panose="05000000000000000000" pitchFamily="2" charset="2"/>
-              <a:buChar char="§"/>
-            </a:pPr>
-            <a:r>
-              <a:rPr lang="en-IN" sz="2000" dirty="0">
-                <a:latin typeface="Times New Roman" panose="02020603050405020304" pitchFamily="18" charset="0"/>
-                <a:cs typeface="Times New Roman" panose="02020603050405020304" pitchFamily="18" charset="0"/>
-              </a:rPr>
-              <a:t>Implement input validation and duplicate roll-number checking.</a:t>
-            </a:r>
-          </a:p>
-          <a:p>
-            <a:pPr marL="342900" indent="-342900">
-              <a:buFont typeface="Wingdings" panose="05000000000000000000" pitchFamily="2" charset="2"/>
-              <a:buChar char="Ø"/>
-            </a:pPr>
-            <a:endParaRPr lang="en-IN" sz="2000" dirty="0">
-              <a:latin typeface="Times New Roman" panose="02020603050405020304" pitchFamily="18" charset="0"/>
-              <a:cs typeface="Times New Roman" panose="02020603050405020304" pitchFamily="18" charset="0"/>
-            </a:endParaRPr>
+              <a:buFont typeface="Arial" panose="020B0604020202020204" pitchFamily="34" charset="0"/>
+              <a:buChar char="•"/>
+            </a:pPr>
+            <a:r>
+              <a:rPr lang="en-IN" sz="2000" dirty="0"/>
+              <a:t>The project demonstrates the practical use of </a:t>
+            </a:r>
+            <a:r>
+              <a:rPr lang="en-IN" sz="2000" b="1" dirty="0"/>
+              <a:t>Object-Oriented Programming concepts in C++</a:t>
+            </a:r>
+            <a:r>
+              <a:rPr lang="en-IN" sz="2000" dirty="0"/>
+              <a:t>. </a:t>
+            </a:r>
           </a:p>
         </p:txBody>
       </p:sp>
     </p:spTree>
     <p:extLst>
       <p:ext uri="{BB962C8B-B14F-4D97-AF65-F5344CB8AC3E}">
-        <p14:creationId xmlns:p14="http://schemas.microsoft.com/office/powerpoint/2010/main" val="1780977059"/>
+        <p14:creationId xmlns:p14="http://schemas.microsoft.com/office/powerpoint/2010/main" val="68172112"/>
       </p:ext>
     </p:extLst>
   </p:cSld>
@@ -5725,7 +7241,7 @@
           <a:p>
             <a:fld id="{A4A026F9-4B12-44A3-954F-2C895BB9BCAE}" type="datetime1">
               <a:rPr lang="en-US" smtClean="0"/>
-              <a:t>8/25/2026</a:t>
+              <a:t>10/27/2026</a:t>
             </a:fld>
             <a:endParaRPr lang="en-US" dirty="0"/>
           </a:p>
@@ -5833,17 +7349,17 @@
                 <a:latin typeface="Maiandra GD" panose="020E0502030308020204" pitchFamily="34" charset="0"/>
                 <a:cs typeface="Aharoni" panose="02010803020104030203" pitchFamily="2" charset="-79"/>
               </a:rPr>
-              <a:t>Planned Modules / Functions</a:t>
-            </a:r>
-          </a:p>
-        </p:txBody>
-      </p:sp>
-      <p:sp>
-        <p:nvSpPr>
-          <p:cNvPr id="12" name="TextBox 11">
-            <a:extLst>
-              <a:ext uri="{FF2B5EF4-FFF2-40B4-BE49-F238E27FC236}">
-                <a16:creationId xmlns:a16="http://schemas.microsoft.com/office/drawing/2014/main" id="{770D4B26-D852-A3FC-B81B-0DCDAC7D19E2}"/>
+              <a:t>Problem Statement &amp; Objectives</a:t>
+            </a:r>
+          </a:p>
+        </p:txBody>
+      </p:sp>
+      <p:sp>
+        <p:nvSpPr>
+          <p:cNvPr id="6" name="TextBox 5">
+            <a:extLst>
+              <a:ext uri="{FF2B5EF4-FFF2-40B4-BE49-F238E27FC236}">
+                <a16:creationId xmlns:a16="http://schemas.microsoft.com/office/drawing/2014/main" id="{1CF31069-1D8A-11E5-07F5-A7323DD57A0F}"/>
               </a:ext>
             </a:extLst>
           </p:cNvPr>
@@ -5852,8 +7368,8 @@
         </p:nvSpPr>
         <p:spPr>
           <a:xfrm>
-            <a:off x="990600" y="1600200"/>
-            <a:ext cx="11039400" cy="3970318"/>
+            <a:off x="457200" y="914400"/>
+            <a:ext cx="10972800" cy="6038641"/>
           </a:xfrm>
           <a:prstGeom prst="rect">
             <a:avLst/>
@@ -5866,207 +7382,235 @@
           </a:bodyPr>
           <a:lstStyle/>
           <a:p>
-            <a:pPr marL="285750" indent="-285750">
+            <a:pPr marL="342900" indent="-342900">
+              <a:lnSpc>
+                <a:spcPct val="150000"/>
+              </a:lnSpc>
               <a:buFont typeface="Wingdings" panose="05000000000000000000" pitchFamily="2" charset="2"/>
               <a:buChar char="Ø"/>
             </a:pPr>
             <a:r>
-              <a:rPr lang="en-IN" b="1" dirty="0">
+              <a:rPr lang="en-IN" sz="2000" b="1" dirty="0">
                 <a:latin typeface="Times New Roman" panose="02020603050405020304" pitchFamily="18" charset="0"/>
                 <a:cs typeface="Times New Roman" panose="02020603050405020304" pitchFamily="18" charset="0"/>
               </a:rPr>
-              <a:t>Student Management</a:t>
-            </a:r>
-            <a:r>
-              <a:rPr lang="en-IN" dirty="0">
+              <a:t>Problem Statement</a:t>
+            </a:r>
+          </a:p>
+          <a:p>
+            <a:pPr marL="342900" indent="-342900">
+              <a:lnSpc>
+                <a:spcPct val="150000"/>
+              </a:lnSpc>
+              <a:buFont typeface="Wingdings" panose="05000000000000000000" pitchFamily="2" charset="2"/>
+              <a:buChar char="Ø"/>
+            </a:pPr>
+            <a:r>
+              <a:rPr lang="en-IN" sz="2000" dirty="0">
                 <a:latin typeface="Times New Roman" panose="02020603050405020304" pitchFamily="18" charset="0"/>
                 <a:cs typeface="Times New Roman" panose="02020603050405020304" pitchFamily="18" charset="0"/>
               </a:rPr>
-              <a:t> – Add and store student details such as roll number, name, and subject marks.</a:t>
-            </a:r>
-          </a:p>
-          <a:p>
-            <a:pPr marL="285750" indent="-285750">
+              <a:t>Manual result management requires considerable time for calculating marks, assigning grades and identifying student performance. It may also result in calculation and record-management errors.</a:t>
+            </a:r>
+          </a:p>
+          <a:p>
+            <a:pPr marL="342900" indent="-342900">
+              <a:lnSpc>
+                <a:spcPct val="150000"/>
+              </a:lnSpc>
               <a:buFont typeface="Wingdings" panose="05000000000000000000" pitchFamily="2" charset="2"/>
               <a:buChar char="Ø"/>
             </a:pPr>
-            <a:endParaRPr lang="en-IN" dirty="0">
+            <a:r>
+              <a:rPr lang="en-IN" sz="2000" b="1" dirty="0">
+                <a:latin typeface="Times New Roman" panose="02020603050405020304" pitchFamily="18" charset="0"/>
+                <a:cs typeface="Times New Roman" panose="02020603050405020304" pitchFamily="18" charset="0"/>
+              </a:rPr>
+              <a:t>Objectives</a:t>
+            </a:r>
+          </a:p>
+          <a:p>
+            <a:pPr marL="342900" indent="-342900">
+              <a:lnSpc>
+                <a:spcPct val="150000"/>
+              </a:lnSpc>
+              <a:buFont typeface="Wingdings" panose="05000000000000000000" pitchFamily="2" charset="2"/>
+              <a:buChar char="Ø"/>
+            </a:pPr>
+            <a:r>
+              <a:rPr lang="en-IN" sz="2000" dirty="0">
+                <a:latin typeface="Times New Roman" panose="02020603050405020304" pitchFamily="18" charset="0"/>
+                <a:cs typeface="Times New Roman" panose="02020603050405020304" pitchFamily="18" charset="0"/>
+              </a:rPr>
+              <a:t>Develop a simple </a:t>
+            </a:r>
+            <a:r>
+              <a:rPr lang="en-IN" sz="2000" b="1" dirty="0">
+                <a:latin typeface="Times New Roman" panose="02020603050405020304" pitchFamily="18" charset="0"/>
+                <a:cs typeface="Times New Roman" panose="02020603050405020304" pitchFamily="18" charset="0"/>
+              </a:rPr>
+              <a:t>Student Result Management System</a:t>
+            </a:r>
+            <a:r>
+              <a:rPr lang="en-IN" sz="2000" dirty="0">
+                <a:latin typeface="Times New Roman" panose="02020603050405020304" pitchFamily="18" charset="0"/>
+                <a:cs typeface="Times New Roman" panose="02020603050405020304" pitchFamily="18" charset="0"/>
+              </a:rPr>
+              <a:t> using C++. </a:t>
+            </a:r>
+          </a:p>
+          <a:p>
+            <a:pPr marL="342900" indent="-342900">
+              <a:lnSpc>
+                <a:spcPct val="150000"/>
+              </a:lnSpc>
+              <a:buFont typeface="Wingdings" panose="05000000000000000000" pitchFamily="2" charset="2"/>
+              <a:buChar char="Ø"/>
+            </a:pPr>
+            <a:r>
+              <a:rPr lang="en-IN" sz="2000" dirty="0">
+                <a:latin typeface="Times New Roman" panose="02020603050405020304" pitchFamily="18" charset="0"/>
+                <a:cs typeface="Times New Roman" panose="02020603050405020304" pitchFamily="18" charset="0"/>
+              </a:rPr>
+              <a:t>Store student information using </a:t>
+            </a:r>
+            <a:r>
+              <a:rPr lang="en-IN" sz="2000" b="1" dirty="0">
+                <a:latin typeface="Times New Roman" panose="02020603050405020304" pitchFamily="18" charset="0"/>
+                <a:cs typeface="Times New Roman" panose="02020603050405020304" pitchFamily="18" charset="0"/>
+              </a:rPr>
+              <a:t>classes and objects</a:t>
+            </a:r>
+            <a:r>
+              <a:rPr lang="en-IN" sz="2000" dirty="0">
+                <a:latin typeface="Times New Roman" panose="02020603050405020304" pitchFamily="18" charset="0"/>
+                <a:cs typeface="Times New Roman" panose="02020603050405020304" pitchFamily="18" charset="0"/>
+              </a:rPr>
+              <a:t>. </a:t>
+            </a:r>
+          </a:p>
+          <a:p>
+            <a:pPr marL="342900" indent="-342900">
+              <a:lnSpc>
+                <a:spcPct val="150000"/>
+              </a:lnSpc>
+              <a:buFont typeface="Wingdings" panose="05000000000000000000" pitchFamily="2" charset="2"/>
+              <a:buChar char="Ø"/>
+            </a:pPr>
+            <a:r>
+              <a:rPr lang="en-IN" sz="2000" dirty="0">
+                <a:latin typeface="Times New Roman" panose="02020603050405020304" pitchFamily="18" charset="0"/>
+                <a:cs typeface="Times New Roman" panose="02020603050405020304" pitchFamily="18" charset="0"/>
+              </a:rPr>
+              <a:t>Calculate total, average and percentage automatically. </a:t>
+            </a:r>
+          </a:p>
+          <a:p>
+            <a:pPr marL="342900" indent="-342900">
+              <a:lnSpc>
+                <a:spcPct val="150000"/>
+              </a:lnSpc>
+              <a:buFont typeface="Wingdings" panose="05000000000000000000" pitchFamily="2" charset="2"/>
+              <a:buChar char="Ø"/>
+            </a:pPr>
+            <a:r>
+              <a:rPr lang="en-IN" sz="2000" dirty="0">
+                <a:latin typeface="Times New Roman" panose="02020603050405020304" pitchFamily="18" charset="0"/>
+                <a:cs typeface="Times New Roman" panose="02020603050405020304" pitchFamily="18" charset="0"/>
+              </a:rPr>
+              <a:t>Generate grades and Pass/Fail status. </a:t>
+            </a:r>
+          </a:p>
+          <a:p>
+            <a:pPr marL="342900" indent="-342900">
+              <a:lnSpc>
+                <a:spcPct val="150000"/>
+              </a:lnSpc>
+              <a:buFont typeface="Wingdings" panose="05000000000000000000" pitchFamily="2" charset="2"/>
+              <a:buChar char="Ø"/>
+            </a:pPr>
+            <a:r>
+              <a:rPr lang="en-IN" sz="2000" b="1" dirty="0" err="1">
+                <a:latin typeface="Times New Roman" panose="02020603050405020304" pitchFamily="18" charset="0"/>
+                <a:cs typeface="Times New Roman" panose="02020603050405020304" pitchFamily="18" charset="0"/>
+              </a:rPr>
+              <a:t>P</a:t>
+            </a:r>
+            <a:r>
+              <a:rPr lang="en-IN" sz="2000" dirty="0" err="1">
+                <a:latin typeface="Times New Roman" panose="02020603050405020304" pitchFamily="18" charset="0"/>
+                <a:cs typeface="Times New Roman" panose="02020603050405020304" pitchFamily="18" charset="0"/>
+              </a:rPr>
+              <a:t>Provide</a:t>
+            </a:r>
+            <a:r>
+              <a:rPr lang="en-IN" sz="2000" dirty="0">
+                <a:latin typeface="Times New Roman" panose="02020603050405020304" pitchFamily="18" charset="0"/>
+                <a:cs typeface="Times New Roman" panose="02020603050405020304" pitchFamily="18" charset="0"/>
+              </a:rPr>
+              <a:t> student search functionality. </a:t>
+            </a:r>
+          </a:p>
+          <a:p>
+            <a:pPr marL="342900" lvl="0" indent="-342900">
+              <a:lnSpc>
+                <a:spcPct val="150000"/>
+              </a:lnSpc>
+              <a:buFont typeface="Wingdings" panose="05000000000000000000" pitchFamily="2" charset="2"/>
+              <a:buChar char="§"/>
+            </a:pPr>
+            <a:r>
+              <a:rPr lang="en-IN" sz="2000" dirty="0">
+                <a:latin typeface="Times New Roman" panose="02020603050405020304" pitchFamily="18" charset="0"/>
+                <a:cs typeface="Times New Roman" panose="02020603050405020304" pitchFamily="18" charset="0"/>
+              </a:rPr>
+              <a:t>Identify topper(s). </a:t>
+            </a:r>
+          </a:p>
+          <a:p>
+            <a:pPr marL="342900" lvl="0" indent="-342900">
+              <a:lnSpc>
+                <a:spcPct val="150000"/>
+              </a:lnSpc>
+              <a:buFont typeface="Wingdings" panose="05000000000000000000" pitchFamily="2" charset="2"/>
+              <a:buChar char="§"/>
+            </a:pPr>
+            <a:r>
+              <a:rPr lang="en-IN" sz="2000" dirty="0">
+                <a:latin typeface="Times New Roman" panose="02020603050405020304" pitchFamily="18" charset="0"/>
+                <a:cs typeface="Times New Roman" panose="02020603050405020304" pitchFamily="18" charset="0"/>
+              </a:rPr>
+              <a:t>Display all failed students. </a:t>
+            </a:r>
+          </a:p>
+          <a:p>
+            <a:pPr marL="342900" lvl="0" indent="-342900">
+              <a:lnSpc>
+                <a:spcPct val="150000"/>
+              </a:lnSpc>
+              <a:buFont typeface="Wingdings" panose="05000000000000000000" pitchFamily="2" charset="2"/>
+              <a:buChar char="§"/>
+            </a:pPr>
+            <a:r>
+              <a:rPr lang="en-IN" sz="2000" dirty="0">
+                <a:latin typeface="Times New Roman" panose="02020603050405020304" pitchFamily="18" charset="0"/>
+                <a:cs typeface="Times New Roman" panose="02020603050405020304" pitchFamily="18" charset="0"/>
+              </a:rPr>
+              <a:t>Implement input validation and duplicate roll-number checking.</a:t>
+            </a:r>
+          </a:p>
+          <a:p>
+            <a:pPr marL="342900" indent="-342900">
+              <a:lnSpc>
+                <a:spcPct val="150000"/>
+              </a:lnSpc>
+              <a:buFont typeface="Wingdings" panose="05000000000000000000" pitchFamily="2" charset="2"/>
+              <a:buChar char="Ø"/>
+            </a:pPr>
+            <a:endParaRPr lang="en-IN" sz="2000" dirty="0">
               <a:latin typeface="Times New Roman" panose="02020603050405020304" pitchFamily="18" charset="0"/>
               <a:cs typeface="Times New Roman" panose="02020603050405020304" pitchFamily="18" charset="0"/>
             </a:endParaRPr>
-          </a:p>
-          <a:p>
-            <a:pPr marL="285750" indent="-285750">
-              <a:buFont typeface="Wingdings" panose="05000000000000000000" pitchFamily="2" charset="2"/>
-              <a:buChar char="Ø"/>
-            </a:pPr>
-            <a:r>
-              <a:rPr lang="en-IN" b="1" dirty="0">
-                <a:latin typeface="Times New Roman" panose="02020603050405020304" pitchFamily="18" charset="0"/>
-                <a:cs typeface="Times New Roman" panose="02020603050405020304" pitchFamily="18" charset="0"/>
-              </a:rPr>
-              <a:t>Result Calculation</a:t>
-            </a:r>
-            <a:r>
-              <a:rPr lang="en-IN" dirty="0">
-                <a:latin typeface="Times New Roman" panose="02020603050405020304" pitchFamily="18" charset="0"/>
-                <a:cs typeface="Times New Roman" panose="02020603050405020304" pitchFamily="18" charset="0"/>
-              </a:rPr>
-              <a:t> – Calculate total marks, average, percentage, grade, and pass/fail status.</a:t>
-            </a:r>
-          </a:p>
-          <a:p>
-            <a:pPr marL="285750" indent="-285750">
-              <a:buFont typeface="Wingdings" panose="05000000000000000000" pitchFamily="2" charset="2"/>
-              <a:buChar char="Ø"/>
-            </a:pPr>
-            <a:endParaRPr lang="en-IN" dirty="0">
-              <a:latin typeface="Times New Roman" panose="02020603050405020304" pitchFamily="18" charset="0"/>
-              <a:cs typeface="Times New Roman" panose="02020603050405020304" pitchFamily="18" charset="0"/>
-            </a:endParaRPr>
-          </a:p>
-          <a:p>
-            <a:pPr marL="285750" indent="-285750">
-              <a:buFont typeface="Wingdings" panose="05000000000000000000" pitchFamily="2" charset="2"/>
-              <a:buChar char="Ø"/>
-            </a:pPr>
-            <a:r>
-              <a:rPr lang="en-IN" b="1" dirty="0">
-                <a:latin typeface="Times New Roman" panose="02020603050405020304" pitchFamily="18" charset="0"/>
-                <a:cs typeface="Times New Roman" panose="02020603050405020304" pitchFamily="18" charset="0"/>
-              </a:rPr>
-              <a:t>Result Display</a:t>
-            </a:r>
-            <a:r>
-              <a:rPr lang="en-IN" dirty="0">
-                <a:latin typeface="Times New Roman" panose="02020603050405020304" pitchFamily="18" charset="0"/>
-                <a:cs typeface="Times New Roman" panose="02020603050405020304" pitchFamily="18" charset="0"/>
-              </a:rPr>
-              <a:t> – Display the complete academic results of all students in a clear format.</a:t>
-            </a:r>
-          </a:p>
-          <a:p>
-            <a:pPr marL="285750" indent="-285750">
-              <a:buFont typeface="Wingdings" panose="05000000000000000000" pitchFamily="2" charset="2"/>
-              <a:buChar char="Ø"/>
-            </a:pPr>
-            <a:endParaRPr lang="en-IN" dirty="0">
-              <a:latin typeface="Times New Roman" panose="02020603050405020304" pitchFamily="18" charset="0"/>
-              <a:cs typeface="Times New Roman" panose="02020603050405020304" pitchFamily="18" charset="0"/>
-            </a:endParaRPr>
-          </a:p>
-          <a:p>
-            <a:pPr marL="285750" indent="-285750">
-              <a:buFont typeface="Wingdings" panose="05000000000000000000" pitchFamily="2" charset="2"/>
-              <a:buChar char="Ø"/>
-            </a:pPr>
-            <a:r>
-              <a:rPr lang="en-IN" b="1" dirty="0">
-                <a:latin typeface="Times New Roman" panose="02020603050405020304" pitchFamily="18" charset="0"/>
-                <a:cs typeface="Times New Roman" panose="02020603050405020304" pitchFamily="18" charset="0"/>
-              </a:rPr>
-              <a:t>Student Search</a:t>
-            </a:r>
-            <a:r>
-              <a:rPr lang="en-IN" dirty="0">
-                <a:latin typeface="Times New Roman" panose="02020603050405020304" pitchFamily="18" charset="0"/>
-                <a:cs typeface="Times New Roman" panose="02020603050405020304" pitchFamily="18" charset="0"/>
-              </a:rPr>
-              <a:t> – Search and display a particular student's result using the roll number.</a:t>
-            </a:r>
-          </a:p>
-          <a:p>
-            <a:pPr marL="285750" indent="-285750">
-              <a:buFont typeface="Wingdings" panose="05000000000000000000" pitchFamily="2" charset="2"/>
-              <a:buChar char="Ø"/>
-            </a:pPr>
-            <a:endParaRPr lang="en-IN" dirty="0">
-              <a:latin typeface="Times New Roman" panose="02020603050405020304" pitchFamily="18" charset="0"/>
-              <a:cs typeface="Times New Roman" panose="02020603050405020304" pitchFamily="18" charset="0"/>
-            </a:endParaRPr>
-          </a:p>
-          <a:p>
-            <a:pPr marL="285750" indent="-285750">
-              <a:buFont typeface="Wingdings" panose="05000000000000000000" pitchFamily="2" charset="2"/>
-              <a:buChar char="Ø"/>
-            </a:pPr>
-            <a:r>
-              <a:rPr lang="en-IN" b="1" dirty="0">
-                <a:latin typeface="Times New Roman" panose="02020603050405020304" pitchFamily="18" charset="0"/>
-                <a:cs typeface="Times New Roman" panose="02020603050405020304" pitchFamily="18" charset="0"/>
-              </a:rPr>
-              <a:t>Topper Identification</a:t>
-            </a:r>
-            <a:r>
-              <a:rPr lang="en-IN" dirty="0">
-                <a:latin typeface="Times New Roman" panose="02020603050405020304" pitchFamily="18" charset="0"/>
-                <a:cs typeface="Times New Roman" panose="02020603050405020304" pitchFamily="18" charset="0"/>
-              </a:rPr>
-              <a:t> – Find and display the student or students who have achieved the highest average marks.</a:t>
-            </a:r>
-          </a:p>
-          <a:p>
-            <a:pPr marL="285750" indent="-285750">
-              <a:buFont typeface="Wingdings" panose="05000000000000000000" pitchFamily="2" charset="2"/>
-              <a:buChar char="Ø"/>
-            </a:pPr>
-            <a:endParaRPr lang="en-IN" dirty="0">
-              <a:latin typeface="Times New Roman" panose="02020603050405020304" pitchFamily="18" charset="0"/>
-              <a:cs typeface="Times New Roman" panose="02020603050405020304" pitchFamily="18" charset="0"/>
-            </a:endParaRPr>
-          </a:p>
-          <a:p>
-            <a:pPr marL="285750" indent="-285750">
-              <a:buFont typeface="Wingdings" panose="05000000000000000000" pitchFamily="2" charset="2"/>
-              <a:buChar char="Ø"/>
-            </a:pPr>
-            <a:r>
-              <a:rPr lang="en-IN" b="1" dirty="0">
-                <a:latin typeface="Times New Roman" panose="02020603050405020304" pitchFamily="18" charset="0"/>
-                <a:cs typeface="Times New Roman" panose="02020603050405020304" pitchFamily="18" charset="0"/>
-              </a:rPr>
-              <a:t>Failed Student Display</a:t>
-            </a:r>
-            <a:r>
-              <a:rPr lang="en-IN" dirty="0">
-                <a:latin typeface="Times New Roman" panose="02020603050405020304" pitchFamily="18" charset="0"/>
-                <a:cs typeface="Times New Roman" panose="02020603050405020304" pitchFamily="18" charset="0"/>
-              </a:rPr>
-              <a:t> – Identify and display all students who have failed in the examination.</a:t>
-            </a:r>
-          </a:p>
-          <a:p>
-            <a:pPr marL="285750" indent="-285750">
-              <a:buFont typeface="Wingdings" panose="05000000000000000000" pitchFamily="2" charset="2"/>
-              <a:buChar char="Ø"/>
-            </a:pPr>
-            <a:endParaRPr lang="en-IN" dirty="0">
-              <a:latin typeface="Times New Roman" panose="02020603050405020304" pitchFamily="18" charset="0"/>
-              <a:cs typeface="Times New Roman" panose="02020603050405020304" pitchFamily="18" charset="0"/>
-            </a:endParaRPr>
-          </a:p>
-          <a:p>
-            <a:pPr marL="285750" indent="-285750">
-              <a:buFont typeface="Wingdings" panose="05000000000000000000" pitchFamily="2" charset="2"/>
-              <a:buChar char="Ø"/>
-            </a:pPr>
-            <a:r>
-              <a:rPr lang="en-IN" b="1" dirty="0">
-                <a:latin typeface="Times New Roman" panose="02020603050405020304" pitchFamily="18" charset="0"/>
-                <a:cs typeface="Times New Roman" panose="02020603050405020304" pitchFamily="18" charset="0"/>
-              </a:rPr>
-              <a:t>Input Validation</a:t>
-            </a:r>
-            <a:r>
-              <a:rPr lang="en-IN" dirty="0">
-                <a:latin typeface="Times New Roman" panose="02020603050405020304" pitchFamily="18" charset="0"/>
-                <a:cs typeface="Times New Roman" panose="02020603050405020304" pitchFamily="18" charset="0"/>
-              </a:rPr>
-              <a:t> – Validate menu choices, marks, and roll numbers to prevent invalid or duplicate entries.</a:t>
-            </a:r>
-          </a:p>
-          <a:p>
-            <a:endParaRPr lang="en-IN" dirty="0"/>
           </a:p>
         </p:txBody>
       </p:sp>
@@ -6102,10 +7646,10 @@
       </p:grpSpPr>
       <p:sp>
         <p:nvSpPr>
-          <p:cNvPr id="2" name="Content Placeholder 1">
-            <a:extLst>
-              <a:ext uri="{FF2B5EF4-FFF2-40B4-BE49-F238E27FC236}">
-                <a16:creationId xmlns:a16="http://schemas.microsoft.com/office/drawing/2014/main" id="{CCBC3698-B926-FCD8-3E34-A0BCA597160E}"/>
+          <p:cNvPr id="2" name="Date Placeholder 1">
+            <a:extLst>
+              <a:ext uri="{FF2B5EF4-FFF2-40B4-BE49-F238E27FC236}">
+                <a16:creationId xmlns:a16="http://schemas.microsoft.com/office/drawing/2014/main" id="{BCEC502D-81FB-7746-711A-818132D82042}"/>
               </a:ext>
             </a:extLst>
           </p:cNvPr>
@@ -6113,143 +7657,28 @@
             <a:spLocks noGrp="1"/>
           </p:cNvSpPr>
           <p:nvPr>
-            <p:ph/>
+            <p:ph type="dt" sz="half" idx="10"/>
           </p:nvPr>
         </p:nvSpPr>
-        <p:spPr>
-          <a:xfrm>
-            <a:off x="695400" y="1371600"/>
-            <a:ext cx="10689285" cy="4721695"/>
-          </a:xfrm>
-        </p:spPr>
-        <p:txBody>
-          <a:bodyPr>
-            <a:normAutofit/>
-          </a:bodyPr>
-          <a:lstStyle/>
-          <a:p>
-            <a:pPr marL="800100" indent="-342900">
-              <a:buFont typeface="Wingdings" panose="05000000000000000000" pitchFamily="2" charset="2"/>
-              <a:buChar char="Ø"/>
-            </a:pPr>
-            <a:r>
-              <a:rPr lang="en-IN" sz="2400" b="1" dirty="0"/>
-              <a:t>Faculty / Teachers</a:t>
-            </a:r>
-          </a:p>
-          <a:p>
-            <a:pPr marL="800100" lvl="0" indent="-342900">
-              <a:buFont typeface="Wingdings" panose="05000000000000000000" pitchFamily="2" charset="2"/>
-              <a:buChar char="q"/>
-            </a:pPr>
-            <a:r>
-              <a:rPr lang="en-IN" sz="2400" dirty="0"/>
-              <a:t>Enter student details and marks. </a:t>
-            </a:r>
-          </a:p>
-          <a:p>
-            <a:pPr marL="800100" lvl="0" indent="-342900">
-              <a:buFont typeface="Wingdings" panose="05000000000000000000" pitchFamily="2" charset="2"/>
-              <a:buChar char="q"/>
-            </a:pPr>
-            <a:r>
-              <a:rPr lang="en-IN" sz="2400" dirty="0"/>
-              <a:t>View complete student results. </a:t>
-            </a:r>
-          </a:p>
-          <a:p>
-            <a:pPr marL="800100" lvl="0" indent="-342900">
-              <a:buFont typeface="Wingdings" panose="05000000000000000000" pitchFamily="2" charset="2"/>
-              <a:buChar char="q"/>
-            </a:pPr>
-            <a:r>
-              <a:rPr lang="en-IN" sz="2400" dirty="0"/>
-              <a:t>Search individual student records. </a:t>
-            </a:r>
-          </a:p>
-          <a:p>
-            <a:pPr marL="800100" lvl="0" indent="-342900">
-              <a:buFont typeface="Wingdings" panose="05000000000000000000" pitchFamily="2" charset="2"/>
-              <a:buChar char="q"/>
-            </a:pPr>
-            <a:r>
-              <a:rPr lang="en-IN" sz="2400" dirty="0"/>
-              <a:t>Identify toppers and failed students. </a:t>
-            </a:r>
-          </a:p>
-          <a:p>
-            <a:pPr marL="800100" indent="-342900">
-              <a:buFont typeface="Wingdings" panose="05000000000000000000" pitchFamily="2" charset="2"/>
-              <a:buChar char="Ø"/>
-            </a:pPr>
-            <a:r>
-              <a:rPr lang="en-IN" sz="2400" b="1" dirty="0"/>
-              <a:t>Academic Staff</a:t>
-            </a:r>
-          </a:p>
-          <a:p>
-            <a:pPr marL="800100" lvl="0" indent="-342900">
-              <a:buFont typeface="Wingdings" panose="05000000000000000000" pitchFamily="2" charset="2"/>
-              <a:buChar char="q"/>
-            </a:pPr>
-            <a:r>
-              <a:rPr lang="en-IN" sz="2400" dirty="0"/>
-              <a:t>Manage student result records. </a:t>
-            </a:r>
-          </a:p>
-          <a:p>
-            <a:pPr marL="800100" lvl="0" indent="-342900">
-              <a:buFont typeface="Wingdings" panose="05000000000000000000" pitchFamily="2" charset="2"/>
-              <a:buChar char="q"/>
-            </a:pPr>
-            <a:r>
-              <a:rPr lang="en-IN" sz="2400" dirty="0"/>
-              <a:t>Review overall student performance. </a:t>
-            </a:r>
-          </a:p>
-          <a:p>
-            <a:pPr marL="800100" indent="-342900">
-              <a:buFont typeface="Wingdings" panose="05000000000000000000" pitchFamily="2" charset="2"/>
-              <a:buChar char="Ø"/>
-            </a:pPr>
-            <a:r>
-              <a:rPr lang="en-IN" sz="2400" b="1"/>
-              <a:t> </a:t>
-            </a:r>
-            <a:r>
-              <a:rPr lang="en-IN" sz="2400" b="1" dirty="0"/>
-              <a:t>Students</a:t>
-            </a:r>
-          </a:p>
-          <a:p>
-            <a:pPr marL="800100" lvl="0" indent="-342900">
-              <a:buFont typeface="Wingdings" panose="05000000000000000000" pitchFamily="2" charset="2"/>
-              <a:buChar char="q"/>
-            </a:pPr>
-            <a:r>
-              <a:rPr lang="en-IN" sz="2400" dirty="0"/>
-              <a:t>View their academic result details.</a:t>
-            </a:r>
-          </a:p>
-          <a:p>
-            <a:pPr algn="just">
-              <a:lnSpc>
-                <a:spcPct val="150000"/>
-              </a:lnSpc>
-            </a:pPr>
-            <a:endParaRPr lang="en-IN" sz="2400" b="0" dirty="0">
-              <a:latin typeface="Times New Roman" panose="02020603050405020304" pitchFamily="18" charset="0"/>
-              <a:cs typeface="Times New Roman" panose="02020603050405020304" pitchFamily="18" charset="0"/>
-            </a:endParaRPr>
-          </a:p>
-        </p:txBody>
-      </p:sp>
-      <p:sp>
-        <p:nvSpPr>
-          <p:cNvPr id="3" name="Date Placeholder 2">
-            <a:extLst>
-              <a:ext uri="{FF2B5EF4-FFF2-40B4-BE49-F238E27FC236}">
-                <a16:creationId xmlns:a16="http://schemas.microsoft.com/office/drawing/2014/main" id="{1D2B478A-2226-B360-8AD2-E37AD61AAA2F}"/>
+        <p:spPr/>
+        <p:txBody>
+          <a:bodyPr/>
+          <a:lstStyle/>
+          <a:p>
+            <a:fld id="{E761D253-940C-44B0-8F51-8C8A37AEAF73}" type="datetime1">
+              <a:rPr lang="en-US" smtClean="0"/>
+              <a:t>10/27/2026</a:t>
+            </a:fld>
+            <a:endParaRPr lang="en-US" dirty="0"/>
+          </a:p>
+        </p:txBody>
+      </p:sp>
+      <p:sp>
+        <p:nvSpPr>
+          <p:cNvPr id="3" name="Footer Placeholder 2">
+            <a:extLst>
+              <a:ext uri="{FF2B5EF4-FFF2-40B4-BE49-F238E27FC236}">
+                <a16:creationId xmlns:a16="http://schemas.microsoft.com/office/drawing/2014/main" id="{845C3188-8A90-ADD5-65C5-1C85DD16C978}"/>
               </a:ext>
             </a:extLst>
           </p:cNvPr>
@@ -6257,7 +7686,7 @@
             <a:spLocks noGrp="1"/>
           </p:cNvSpPr>
           <p:nvPr>
-            <p:ph type="dt" sz="half" idx="1"/>
+            <p:ph type="ftr" sz="quarter" idx="11"/>
           </p:nvPr>
         </p:nvSpPr>
         <p:spPr/>
@@ -6265,20 +7694,20 @@
           <a:bodyPr/>
           <a:lstStyle/>
           <a:p>
-            <a:fld id="{A4A026F9-4B12-44A3-954F-2C895BB9BCAE}" type="datetime1">
-              <a:rPr lang="en-US" smtClean="0"/>
-              <a:t>8/25/2026</a:t>
-            </a:fld>
+            <a:r>
+              <a:rPr lang="en-US"/>
+              <a:t>PBL Course Name: Object Oriented Programming through C++(2501CS08)     REVIEW-1</a:t>
+            </a:r>
             <a:endParaRPr lang="en-US" dirty="0"/>
           </a:p>
         </p:txBody>
       </p:sp>
       <p:sp>
         <p:nvSpPr>
-          <p:cNvPr id="4" name="Footer Placeholder 3">
-            <a:extLst>
-              <a:ext uri="{FF2B5EF4-FFF2-40B4-BE49-F238E27FC236}">
-                <a16:creationId xmlns:a16="http://schemas.microsoft.com/office/drawing/2014/main" id="{6C1A7CD3-FDC3-32A7-74E1-968EEFC4A74C}"/>
+          <p:cNvPr id="4" name="Slide Number Placeholder 3">
+            <a:extLst>
+              <a:ext uri="{FF2B5EF4-FFF2-40B4-BE49-F238E27FC236}">
+                <a16:creationId xmlns:a16="http://schemas.microsoft.com/office/drawing/2014/main" id="{E4A41695-E5CA-11C3-968E-0C61C929ECE3}"/>
               </a:ext>
             </a:extLst>
           </p:cNvPr>
@@ -6286,7 +7715,7 @@
             <a:spLocks noGrp="1"/>
           </p:cNvSpPr>
           <p:nvPr>
-            <p:ph type="ftr" sz="quarter" idx="2"/>
+            <p:ph type="sldNum" sz="quarter" idx="12"/>
           </p:nvPr>
         </p:nvSpPr>
         <p:spPr/>
@@ -6294,36 +7723,7 @@
           <a:bodyPr/>
           <a:lstStyle/>
           <a:p>
-            <a:r>
-              <a:rPr lang="en-US"/>
-              <a:t>PBL Course Name: Object Oriented Programming through C++(2501CS08)     REVIEW-1</a:t>
-            </a:r>
-            <a:endParaRPr lang="en-US" dirty="0"/>
-          </a:p>
-        </p:txBody>
-      </p:sp>
-      <p:sp>
-        <p:nvSpPr>
-          <p:cNvPr id="5" name="Slide Number Placeholder 4">
-            <a:extLst>
-              <a:ext uri="{FF2B5EF4-FFF2-40B4-BE49-F238E27FC236}">
-                <a16:creationId xmlns:a16="http://schemas.microsoft.com/office/drawing/2014/main" id="{2EC66408-B064-CD45-6F0B-FF7488C8CCC8}"/>
-              </a:ext>
-            </a:extLst>
-          </p:cNvPr>
-          <p:cNvSpPr>
-            <a:spLocks noGrp="1"/>
-          </p:cNvSpPr>
-          <p:nvPr>
-            <p:ph type="sldNum" sz="quarter" idx="3"/>
-          </p:nvPr>
-        </p:nvSpPr>
-        <p:spPr/>
-        <p:txBody>
-          <a:bodyPr/>
-          <a:lstStyle/>
-          <a:p>
-            <a:fld id="{9359D16F-76A5-41BA-ADDD-CBF352B33DDD}" type="slidenum">
+            <a:fld id="{D9C5B093-D3DD-4808-813A-F58BF8E67773}" type="slidenum">
               <a:rPr lang="en-IN" smtClean="0"/>
               <a:t>6</a:t>
             </a:fld>
@@ -6333,10 +7733,10 @@
       </p:sp>
       <p:sp>
         <p:nvSpPr>
-          <p:cNvPr id="7" name="TextBox 6">
-            <a:extLst>
-              <a:ext uri="{FF2B5EF4-FFF2-40B4-BE49-F238E27FC236}">
-                <a16:creationId xmlns:a16="http://schemas.microsoft.com/office/drawing/2014/main" id="{F8107C4F-2400-B326-479D-154C65509A60}"/>
+          <p:cNvPr id="6" name="TextBox 5">
+            <a:extLst>
+              <a:ext uri="{FF2B5EF4-FFF2-40B4-BE49-F238E27FC236}">
+                <a16:creationId xmlns:a16="http://schemas.microsoft.com/office/drawing/2014/main" id="{DDF95B4F-069C-8500-7197-D3CC474EAE93}"/>
               </a:ext>
             </a:extLst>
           </p:cNvPr>
@@ -6345,8 +7745,8 @@
         </p:nvSpPr>
         <p:spPr>
           <a:xfrm>
-            <a:off x="1596000" y="433845"/>
-            <a:ext cx="9000000" cy="661720"/>
+            <a:off x="4182256" y="569626"/>
+            <a:ext cx="3285344" cy="649574"/>
           </a:xfrm>
           <a:prstGeom prst="rect">
             <a:avLst/>
@@ -6354,28 +7754,184 @@
           <a:noFill/>
         </p:spPr>
         <p:txBody>
-          <a:bodyPr wrap="square">
+          <a:bodyPr wrap="square" rtlCol="0">
             <a:spAutoFit/>
           </a:bodyPr>
           <a:lstStyle/>
           <a:p>
-            <a:pPr lvl="0" algn="ctr">
-              <a:lnSpc>
-                <a:spcPct val="90000"/>
-              </a:lnSpc>
-              <a:spcBef>
-                <a:spcPct val="0"/>
-              </a:spcBef>
-            </a:pPr>
-            <a:r>
-              <a:rPr lang="en-GB" sz="3200" dirty="0">
+            <a:endParaRPr lang="en-IN" dirty="0"/>
+          </a:p>
+        </p:txBody>
+      </p:sp>
+      <p:sp>
+        <p:nvSpPr>
+          <p:cNvPr id="7" name="TextBox 6">
+            <a:extLst>
+              <a:ext uri="{FF2B5EF4-FFF2-40B4-BE49-F238E27FC236}">
+                <a16:creationId xmlns:a16="http://schemas.microsoft.com/office/drawing/2014/main" id="{6F7BF654-1254-8D62-FDBF-02DA357F0890}"/>
+              </a:ext>
+            </a:extLst>
+          </p:cNvPr>
+          <p:cNvSpPr txBox="1"/>
+          <p:nvPr/>
+        </p:nvSpPr>
+        <p:spPr>
+          <a:xfrm>
+            <a:off x="3886200" y="569626"/>
+            <a:ext cx="5410200" cy="707886"/>
+          </a:xfrm>
+          <a:prstGeom prst="rect">
+            <a:avLst/>
+          </a:prstGeom>
+          <a:noFill/>
+        </p:spPr>
+        <p:txBody>
+          <a:bodyPr wrap="square" rtlCol="0">
+            <a:spAutoFit/>
+          </a:bodyPr>
+          <a:lstStyle/>
+          <a:p>
+            <a:r>
+              <a:rPr lang="en-GB" sz="4000" dirty="0">
                 <a:solidFill>
                   <a:srgbClr val="0000FF"/>
                 </a:solidFill>
                 <a:latin typeface="Maiandra GD" panose="020E0502030308020204" pitchFamily="34" charset="0"/>
                 <a:cs typeface="Aharoni" panose="02010803020104030203" pitchFamily="2" charset="-79"/>
               </a:rPr>
-              <a:t>Users of the System</a:t>
+              <a:t>Novelty of the Project </a:t>
+            </a:r>
+            <a:endParaRPr lang="en-IN" sz="4000" dirty="0"/>
+          </a:p>
+        </p:txBody>
+      </p:sp>
+      <p:sp>
+        <p:nvSpPr>
+          <p:cNvPr id="9" name="TextBox 8">
+            <a:extLst>
+              <a:ext uri="{FF2B5EF4-FFF2-40B4-BE49-F238E27FC236}">
+                <a16:creationId xmlns:a16="http://schemas.microsoft.com/office/drawing/2014/main" id="{875033BD-88AE-AC84-1503-CDD49AAEC07C}"/>
+              </a:ext>
+            </a:extLst>
+          </p:cNvPr>
+          <p:cNvSpPr txBox="1"/>
+          <p:nvPr/>
+        </p:nvSpPr>
+        <p:spPr>
+          <a:xfrm>
+            <a:off x="385192" y="1447800"/>
+            <a:ext cx="11277600" cy="3699474"/>
+          </a:xfrm>
+          <a:prstGeom prst="rect">
+            <a:avLst/>
+          </a:prstGeom>
+          <a:noFill/>
+        </p:spPr>
+        <p:txBody>
+          <a:bodyPr wrap="square">
+            <a:spAutoFit/>
+          </a:bodyPr>
+          <a:lstStyle/>
+          <a:p>
+            <a:pPr marL="342900" lvl="0" indent="-342900">
+              <a:lnSpc>
+                <a:spcPct val="200000"/>
+              </a:lnSpc>
+              <a:buFont typeface="Arial" panose="020B0604020202020204" pitchFamily="34" charset="0"/>
+              <a:buChar char="•"/>
+            </a:pPr>
+            <a:r>
+              <a:rPr lang="en-IN" sz="2000" b="1" dirty="0"/>
+              <a:t>Automatic Result Calculation</a:t>
+            </a:r>
+            <a:r>
+              <a:rPr lang="en-IN" sz="2000" dirty="0"/>
+              <a:t> – Calculates total, average, percentage, and grade automatically.</a:t>
+            </a:r>
+          </a:p>
+          <a:p>
+            <a:pPr marL="342900" lvl="0" indent="-342900">
+              <a:lnSpc>
+                <a:spcPct val="200000"/>
+              </a:lnSpc>
+              <a:buFont typeface="Arial" panose="020B0604020202020204" pitchFamily="34" charset="0"/>
+              <a:buChar char="•"/>
+            </a:pPr>
+            <a:r>
+              <a:rPr lang="en-IN" sz="2000" b="1" dirty="0"/>
+              <a:t>Multiple Topper Identification</a:t>
+            </a:r>
+            <a:r>
+              <a:rPr lang="en-IN" sz="2000" dirty="0"/>
+              <a:t> – Displays all students who have the highest average when there is a tie.</a:t>
+            </a:r>
+          </a:p>
+          <a:p>
+            <a:pPr marL="342900" lvl="0" indent="-342900">
+              <a:lnSpc>
+                <a:spcPct val="200000"/>
+              </a:lnSpc>
+              <a:buFont typeface="Arial" panose="020B0604020202020204" pitchFamily="34" charset="0"/>
+              <a:buChar char="•"/>
+            </a:pPr>
+            <a:r>
+              <a:rPr lang="en-IN" sz="2000" b="1" dirty="0"/>
+              <a:t>Failed Student Identification</a:t>
+            </a:r>
+            <a:r>
+              <a:rPr lang="en-IN" sz="2000" dirty="0"/>
+              <a:t> – Displays all students who have failed.</a:t>
+            </a:r>
+          </a:p>
+          <a:p>
+            <a:pPr marL="342900" lvl="0" indent="-342900">
+              <a:lnSpc>
+                <a:spcPct val="200000"/>
+              </a:lnSpc>
+              <a:buFont typeface="Arial" panose="020B0604020202020204" pitchFamily="34" charset="0"/>
+              <a:buChar char="•"/>
+            </a:pPr>
+            <a:r>
+              <a:rPr lang="en-IN" sz="2000" b="1" dirty="0"/>
+              <a:t>Quick Student Search</a:t>
+            </a:r>
+            <a:r>
+              <a:rPr lang="en-IN" sz="2000" dirty="0"/>
+              <a:t> – Finds a student's complete result using the roll number.</a:t>
+            </a:r>
+          </a:p>
+          <a:p>
+            <a:pPr marL="342900" lvl="0" indent="-342900">
+              <a:lnSpc>
+                <a:spcPct val="200000"/>
+              </a:lnSpc>
+              <a:buFont typeface="Arial" panose="020B0604020202020204" pitchFamily="34" charset="0"/>
+              <a:buChar char="•"/>
+            </a:pPr>
+            <a:r>
+              <a:rPr lang="en-IN" sz="2000" b="1" dirty="0"/>
+              <a:t>Input Validation</a:t>
+            </a:r>
+            <a:r>
+              <a:rPr lang="en-IN" sz="2000" dirty="0"/>
+              <a:t> – Helps prevent invalid marks and incorrect menu choices.</a:t>
+            </a:r>
+          </a:p>
+          <a:p>
+            <a:pPr marL="342900" lvl="0" indent="-342900">
+              <a:lnSpc>
+                <a:spcPct val="200000"/>
+              </a:lnSpc>
+              <a:buFont typeface="Arial" panose="020B0604020202020204" pitchFamily="34" charset="0"/>
+              <a:buChar char="•"/>
+            </a:pPr>
+            <a:r>
+              <a:rPr lang="en-IN" sz="2000" b="1" dirty="0"/>
+              <a:t>Simple Menu-Driven System</a:t>
+            </a:r>
+            <a:r>
+              <a:rPr lang="en-IN" sz="2000" dirty="0"/>
+              <a:t> – Provides an easy and user-friendly way to manage student results.</a:t>
             </a:r>
           </a:p>
         </p:txBody>
@@ -6383,7 +7939,7 @@
     </p:spTree>
     <p:extLst>
       <p:ext uri="{BB962C8B-B14F-4D97-AF65-F5344CB8AC3E}">
-        <p14:creationId xmlns:p14="http://schemas.microsoft.com/office/powerpoint/2010/main" val="1780977059"/>
+        <p14:creationId xmlns:p14="http://schemas.microsoft.com/office/powerpoint/2010/main" val="2079886802"/>
       </p:ext>
     </p:extLst>
   </p:cSld>
@@ -6433,7 +7989,7 @@
           <a:p>
             <a:fld id="{A4A026F9-4B12-44A3-954F-2C895BB9BCAE}" type="datetime1">
               <a:rPr lang="en-US" smtClean="0"/>
-              <a:t>8/25/2026</a:t>
+              <a:t>10/27/2026</a:t>
             </a:fld>
             <a:endParaRPr lang="en-US" dirty="0"/>
           </a:p>
@@ -6541,17 +8097,17 @@
                 <a:latin typeface="Maiandra GD" panose="020E0502030308020204" pitchFamily="34" charset="0"/>
                 <a:cs typeface="Aharoni" panose="02010803020104030203" pitchFamily="2" charset="-79"/>
               </a:rPr>
-              <a:t>Modules / Functionalities</a:t>
-            </a:r>
-          </a:p>
-        </p:txBody>
-      </p:sp>
-      <p:sp>
-        <p:nvSpPr>
-          <p:cNvPr id="16" name="TextBox 15">
-            <a:extLst>
-              <a:ext uri="{FF2B5EF4-FFF2-40B4-BE49-F238E27FC236}">
-                <a16:creationId xmlns:a16="http://schemas.microsoft.com/office/drawing/2014/main" id="{10813711-7A58-88E0-8F89-04B44827F3F8}"/>
+              <a:t>Planned Modules / Functions</a:t>
+            </a:r>
+          </a:p>
+        </p:txBody>
+      </p:sp>
+      <p:sp>
+        <p:nvSpPr>
+          <p:cNvPr id="12" name="TextBox 11">
+            <a:extLst>
+              <a:ext uri="{FF2B5EF4-FFF2-40B4-BE49-F238E27FC236}">
+                <a16:creationId xmlns:a16="http://schemas.microsoft.com/office/drawing/2014/main" id="{770D4B26-D852-A3FC-B81B-0DCDAC7D19E2}"/>
               </a:ext>
             </a:extLst>
           </p:cNvPr>
@@ -6560,8 +8116,8 @@
         </p:nvSpPr>
         <p:spPr>
           <a:xfrm>
-            <a:off x="217842" y="1447800"/>
-            <a:ext cx="12126558" cy="4401205"/>
+            <a:off x="990600" y="1600200"/>
+            <a:ext cx="11039400" cy="3970318"/>
           </a:xfrm>
           <a:prstGeom prst="rect">
             <a:avLst/>
@@ -6574,151 +8130,207 @@
           </a:bodyPr>
           <a:lstStyle/>
           <a:p>
-            <a:pPr marL="342900" indent="-342900">
+            <a:pPr marL="285750" indent="-285750">
               <a:buFont typeface="Wingdings" panose="05000000000000000000" pitchFamily="2" charset="2"/>
               <a:buChar char="Ø"/>
             </a:pPr>
             <a:r>
-              <a:rPr lang="en-IN" sz="2000" b="1" dirty="0"/>
+              <a:rPr lang="en-IN" b="1" dirty="0">
+                <a:latin typeface="Times New Roman" panose="02020603050405020304" pitchFamily="18" charset="0"/>
+                <a:cs typeface="Times New Roman" panose="02020603050405020304" pitchFamily="18" charset="0"/>
+              </a:rPr>
               <a:t>Student Management</a:t>
             </a:r>
             <a:r>
-              <a:rPr lang="en-IN" sz="2000" dirty="0"/>
+              <a:rPr lang="en-IN" dirty="0">
+                <a:latin typeface="Times New Roman" panose="02020603050405020304" pitchFamily="18" charset="0"/>
+                <a:cs typeface="Times New Roman" panose="02020603050405020304" pitchFamily="18" charset="0"/>
+              </a:rPr>
               <a:t> – Add and store student details such as roll number, name, and subject marks.</a:t>
             </a:r>
           </a:p>
           <a:p>
-            <a:pPr marL="342900" indent="-342900">
+            <a:pPr marL="285750" indent="-285750">
               <a:buFont typeface="Wingdings" panose="05000000000000000000" pitchFamily="2" charset="2"/>
               <a:buChar char="Ø"/>
             </a:pPr>
-            <a:endParaRPr lang="en-IN" sz="2000" dirty="0"/>
-          </a:p>
-          <a:p>
-            <a:pPr marL="342900" indent="-342900">
+            <a:endParaRPr lang="en-IN" dirty="0">
+              <a:latin typeface="Times New Roman" panose="02020603050405020304" pitchFamily="18" charset="0"/>
+              <a:cs typeface="Times New Roman" panose="02020603050405020304" pitchFamily="18" charset="0"/>
+            </a:endParaRPr>
+          </a:p>
+          <a:p>
+            <a:pPr marL="285750" indent="-285750">
               <a:buFont typeface="Wingdings" panose="05000000000000000000" pitchFamily="2" charset="2"/>
               <a:buChar char="Ø"/>
             </a:pPr>
             <a:r>
-              <a:rPr lang="en-IN" sz="2000" b="1" dirty="0"/>
+              <a:rPr lang="en-IN" b="1" dirty="0">
+                <a:latin typeface="Times New Roman" panose="02020603050405020304" pitchFamily="18" charset="0"/>
+                <a:cs typeface="Times New Roman" panose="02020603050405020304" pitchFamily="18" charset="0"/>
+              </a:rPr>
               <a:t>Result Calculation</a:t>
             </a:r>
             <a:r>
-              <a:rPr lang="en-IN" sz="2000" dirty="0"/>
+              <a:rPr lang="en-IN" dirty="0">
+                <a:latin typeface="Times New Roman" panose="02020603050405020304" pitchFamily="18" charset="0"/>
+                <a:cs typeface="Times New Roman" panose="02020603050405020304" pitchFamily="18" charset="0"/>
+              </a:rPr>
               <a:t> – Calculate total marks, average, percentage, grade, and pass/fail status.</a:t>
             </a:r>
           </a:p>
           <a:p>
-            <a:pPr marL="342900" indent="-342900">
+            <a:pPr marL="285750" indent="-285750">
               <a:buFont typeface="Wingdings" panose="05000000000000000000" pitchFamily="2" charset="2"/>
               <a:buChar char="Ø"/>
             </a:pPr>
-            <a:endParaRPr lang="en-IN" sz="2000" dirty="0"/>
-          </a:p>
-          <a:p>
-            <a:pPr marL="342900" indent="-342900">
+            <a:endParaRPr lang="en-IN" dirty="0">
+              <a:latin typeface="Times New Roman" panose="02020603050405020304" pitchFamily="18" charset="0"/>
+              <a:cs typeface="Times New Roman" panose="02020603050405020304" pitchFamily="18" charset="0"/>
+            </a:endParaRPr>
+          </a:p>
+          <a:p>
+            <a:pPr marL="285750" indent="-285750">
               <a:buFont typeface="Wingdings" panose="05000000000000000000" pitchFamily="2" charset="2"/>
               <a:buChar char="Ø"/>
             </a:pPr>
             <a:r>
-              <a:rPr lang="en-IN" sz="2000" b="1" dirty="0"/>
+              <a:rPr lang="en-IN" b="1" dirty="0">
+                <a:latin typeface="Times New Roman" panose="02020603050405020304" pitchFamily="18" charset="0"/>
+                <a:cs typeface="Times New Roman" panose="02020603050405020304" pitchFamily="18" charset="0"/>
+              </a:rPr>
               <a:t>Result Display</a:t>
             </a:r>
             <a:r>
-              <a:rPr lang="en-IN" sz="2000" dirty="0"/>
+              <a:rPr lang="en-IN" dirty="0">
+                <a:latin typeface="Times New Roman" panose="02020603050405020304" pitchFamily="18" charset="0"/>
+                <a:cs typeface="Times New Roman" panose="02020603050405020304" pitchFamily="18" charset="0"/>
+              </a:rPr>
               <a:t> – Display the complete academic results of all students in a clear format.</a:t>
             </a:r>
           </a:p>
           <a:p>
-            <a:pPr marL="342900" indent="-342900">
+            <a:pPr marL="285750" indent="-285750">
               <a:buFont typeface="Wingdings" panose="05000000000000000000" pitchFamily="2" charset="2"/>
               <a:buChar char="Ø"/>
             </a:pPr>
-            <a:endParaRPr lang="en-IN" sz="2000" dirty="0"/>
-          </a:p>
-          <a:p>
-            <a:pPr marL="342900" indent="-342900">
+            <a:endParaRPr lang="en-IN" dirty="0">
+              <a:latin typeface="Times New Roman" panose="02020603050405020304" pitchFamily="18" charset="0"/>
+              <a:cs typeface="Times New Roman" panose="02020603050405020304" pitchFamily="18" charset="0"/>
+            </a:endParaRPr>
+          </a:p>
+          <a:p>
+            <a:pPr marL="285750" indent="-285750">
               <a:buFont typeface="Wingdings" panose="05000000000000000000" pitchFamily="2" charset="2"/>
               <a:buChar char="Ø"/>
             </a:pPr>
             <a:r>
-              <a:rPr lang="en-IN" sz="2000" b="1" dirty="0"/>
+              <a:rPr lang="en-IN" b="1" dirty="0">
+                <a:latin typeface="Times New Roman" panose="02020603050405020304" pitchFamily="18" charset="0"/>
+                <a:cs typeface="Times New Roman" panose="02020603050405020304" pitchFamily="18" charset="0"/>
+              </a:rPr>
               <a:t>Student Search</a:t>
             </a:r>
             <a:r>
-              <a:rPr lang="en-IN" sz="2000" dirty="0"/>
+              <a:rPr lang="en-IN" dirty="0">
+                <a:latin typeface="Times New Roman" panose="02020603050405020304" pitchFamily="18" charset="0"/>
+                <a:cs typeface="Times New Roman" panose="02020603050405020304" pitchFamily="18" charset="0"/>
+              </a:rPr>
               <a:t> – Search and display a particular student's result using the roll number.</a:t>
             </a:r>
           </a:p>
           <a:p>
-            <a:pPr marL="342900" indent="-342900">
+            <a:pPr marL="285750" indent="-285750">
               <a:buFont typeface="Wingdings" panose="05000000000000000000" pitchFamily="2" charset="2"/>
               <a:buChar char="Ø"/>
             </a:pPr>
-            <a:endParaRPr lang="en-IN" sz="2000" dirty="0"/>
-          </a:p>
-          <a:p>
-            <a:pPr marL="342900" indent="-342900">
+            <a:endParaRPr lang="en-IN" dirty="0">
+              <a:latin typeface="Times New Roman" panose="02020603050405020304" pitchFamily="18" charset="0"/>
+              <a:cs typeface="Times New Roman" panose="02020603050405020304" pitchFamily="18" charset="0"/>
+            </a:endParaRPr>
+          </a:p>
+          <a:p>
+            <a:pPr marL="285750" indent="-285750">
               <a:buFont typeface="Wingdings" panose="05000000000000000000" pitchFamily="2" charset="2"/>
               <a:buChar char="Ø"/>
             </a:pPr>
             <a:r>
-              <a:rPr lang="en-IN" sz="2000" b="1" dirty="0"/>
+              <a:rPr lang="en-IN" b="1" dirty="0">
+                <a:latin typeface="Times New Roman" panose="02020603050405020304" pitchFamily="18" charset="0"/>
+                <a:cs typeface="Times New Roman" panose="02020603050405020304" pitchFamily="18" charset="0"/>
+              </a:rPr>
               <a:t>Topper Identification</a:t>
             </a:r>
             <a:r>
-              <a:rPr lang="en-IN" sz="2000" dirty="0"/>
+              <a:rPr lang="en-IN" dirty="0">
+                <a:latin typeface="Times New Roman" panose="02020603050405020304" pitchFamily="18" charset="0"/>
+                <a:cs typeface="Times New Roman" panose="02020603050405020304" pitchFamily="18" charset="0"/>
+              </a:rPr>
               <a:t> – Find and display the student or students who have achieved the highest average marks.</a:t>
             </a:r>
           </a:p>
           <a:p>
-            <a:pPr marL="342900" indent="-342900">
+            <a:pPr marL="285750" indent="-285750">
               <a:buFont typeface="Wingdings" panose="05000000000000000000" pitchFamily="2" charset="2"/>
               <a:buChar char="Ø"/>
             </a:pPr>
-            <a:endParaRPr lang="en-IN" sz="2000" dirty="0"/>
-          </a:p>
-          <a:p>
-            <a:pPr marL="342900" indent="-342900">
+            <a:endParaRPr lang="en-IN" dirty="0">
+              <a:latin typeface="Times New Roman" panose="02020603050405020304" pitchFamily="18" charset="0"/>
+              <a:cs typeface="Times New Roman" panose="02020603050405020304" pitchFamily="18" charset="0"/>
+            </a:endParaRPr>
+          </a:p>
+          <a:p>
+            <a:pPr marL="285750" indent="-285750">
               <a:buFont typeface="Wingdings" panose="05000000000000000000" pitchFamily="2" charset="2"/>
               <a:buChar char="Ø"/>
             </a:pPr>
             <a:r>
-              <a:rPr lang="en-IN" sz="2000" b="1" dirty="0"/>
+              <a:rPr lang="en-IN" b="1" dirty="0">
+                <a:latin typeface="Times New Roman" panose="02020603050405020304" pitchFamily="18" charset="0"/>
+                <a:cs typeface="Times New Roman" panose="02020603050405020304" pitchFamily="18" charset="0"/>
+              </a:rPr>
               <a:t>Failed Student Display</a:t>
             </a:r>
             <a:r>
-              <a:rPr lang="en-IN" sz="2000" dirty="0"/>
+              <a:rPr lang="en-IN" dirty="0">
+                <a:latin typeface="Times New Roman" panose="02020603050405020304" pitchFamily="18" charset="0"/>
+                <a:cs typeface="Times New Roman" panose="02020603050405020304" pitchFamily="18" charset="0"/>
+              </a:rPr>
               <a:t> – Identify and display all students who have failed in the examination.</a:t>
             </a:r>
           </a:p>
           <a:p>
-            <a:pPr marL="342900" indent="-342900">
+            <a:pPr marL="285750" indent="-285750">
               <a:buFont typeface="Wingdings" panose="05000000000000000000" pitchFamily="2" charset="2"/>
               <a:buChar char="Ø"/>
             </a:pPr>
-            <a:endParaRPr lang="en-IN" sz="2000" dirty="0"/>
-          </a:p>
-          <a:p>
-            <a:pPr marL="342900" indent="-342900">
+            <a:endParaRPr lang="en-IN" dirty="0">
+              <a:latin typeface="Times New Roman" panose="02020603050405020304" pitchFamily="18" charset="0"/>
+              <a:cs typeface="Times New Roman" panose="02020603050405020304" pitchFamily="18" charset="0"/>
+            </a:endParaRPr>
+          </a:p>
+          <a:p>
+            <a:pPr marL="285750" indent="-285750">
               <a:buFont typeface="Wingdings" panose="05000000000000000000" pitchFamily="2" charset="2"/>
               <a:buChar char="Ø"/>
             </a:pPr>
             <a:r>
-              <a:rPr lang="en-IN" sz="2000" b="1" dirty="0"/>
+              <a:rPr lang="en-IN" b="1" dirty="0">
+                <a:latin typeface="Times New Roman" panose="02020603050405020304" pitchFamily="18" charset="0"/>
+                <a:cs typeface="Times New Roman" panose="02020603050405020304" pitchFamily="18" charset="0"/>
+              </a:rPr>
               <a:t>Input Validation</a:t>
             </a:r>
             <a:r>
-              <a:rPr lang="en-IN" sz="2000" dirty="0"/>
+              <a:rPr lang="en-IN" dirty="0">
+                <a:latin typeface="Times New Roman" panose="02020603050405020304" pitchFamily="18" charset="0"/>
+                <a:cs typeface="Times New Roman" panose="02020603050405020304" pitchFamily="18" charset="0"/>
+              </a:rPr>
               <a:t> – Validate menu choices, marks, and roll numbers to prevent invalid or duplicate entries.</a:t>
             </a:r>
           </a:p>
           <a:p>
-            <a:pPr marL="342900" indent="-342900">
-              <a:buFont typeface="Wingdings" panose="05000000000000000000" pitchFamily="2" charset="2"/>
-              <a:buChar char="Ø"/>
-            </a:pPr>
-            <a:endParaRPr lang="en-IN" sz="2000" dirty="0"/>
+            <a:endParaRPr lang="en-IN" dirty="0"/>
           </a:p>
         </p:txBody>
       </p:sp>
@@ -6754,6 +8366,150 @@
       </p:grpSpPr>
       <p:sp>
         <p:nvSpPr>
+          <p:cNvPr id="2" name="Content Placeholder 1">
+            <a:extLst>
+              <a:ext uri="{FF2B5EF4-FFF2-40B4-BE49-F238E27FC236}">
+                <a16:creationId xmlns:a16="http://schemas.microsoft.com/office/drawing/2014/main" id="{CCBC3698-B926-FCD8-3E34-A0BCA597160E}"/>
+              </a:ext>
+            </a:extLst>
+          </p:cNvPr>
+          <p:cNvSpPr>
+            <a:spLocks noGrp="1"/>
+          </p:cNvSpPr>
+          <p:nvPr>
+            <p:ph/>
+          </p:nvPr>
+        </p:nvSpPr>
+        <p:spPr>
+          <a:xfrm>
+            <a:off x="695400" y="1371600"/>
+            <a:ext cx="10689285" cy="4721695"/>
+          </a:xfrm>
+        </p:spPr>
+        <p:txBody>
+          <a:bodyPr>
+            <a:normAutofit/>
+          </a:bodyPr>
+          <a:lstStyle/>
+          <a:p>
+            <a:pPr marL="800100" indent="-342900">
+              <a:buFont typeface="Wingdings" panose="05000000000000000000" pitchFamily="2" charset="2"/>
+              <a:buChar char="Ø"/>
+            </a:pPr>
+            <a:r>
+              <a:rPr lang="en-IN" sz="2400" b="1" dirty="0"/>
+              <a:t>Faculty / Teachers</a:t>
+            </a:r>
+          </a:p>
+          <a:p>
+            <a:pPr marL="800100" lvl="0" indent="-342900">
+              <a:buFont typeface="Wingdings" panose="05000000000000000000" pitchFamily="2" charset="2"/>
+              <a:buChar char="q"/>
+            </a:pPr>
+            <a:r>
+              <a:rPr lang="en-IN" sz="2400" dirty="0"/>
+              <a:t>Enter student details and marks. </a:t>
+            </a:r>
+          </a:p>
+          <a:p>
+            <a:pPr marL="800100" lvl="0" indent="-342900">
+              <a:buFont typeface="Wingdings" panose="05000000000000000000" pitchFamily="2" charset="2"/>
+              <a:buChar char="q"/>
+            </a:pPr>
+            <a:r>
+              <a:rPr lang="en-IN" sz="2400" dirty="0"/>
+              <a:t>View complete student results. </a:t>
+            </a:r>
+          </a:p>
+          <a:p>
+            <a:pPr marL="800100" lvl="0" indent="-342900">
+              <a:buFont typeface="Wingdings" panose="05000000000000000000" pitchFamily="2" charset="2"/>
+              <a:buChar char="q"/>
+            </a:pPr>
+            <a:r>
+              <a:rPr lang="en-IN" sz="2400" dirty="0"/>
+              <a:t>Search individual student records. </a:t>
+            </a:r>
+          </a:p>
+          <a:p>
+            <a:pPr marL="800100" lvl="0" indent="-342900">
+              <a:buFont typeface="Wingdings" panose="05000000000000000000" pitchFamily="2" charset="2"/>
+              <a:buChar char="q"/>
+            </a:pPr>
+            <a:r>
+              <a:rPr lang="en-IN" sz="2400" dirty="0"/>
+              <a:t>Identify toppers and failed students. </a:t>
+            </a:r>
+          </a:p>
+          <a:p>
+            <a:pPr marL="800100" indent="-342900">
+              <a:buFont typeface="Wingdings" panose="05000000000000000000" pitchFamily="2" charset="2"/>
+              <a:buChar char="Ø"/>
+            </a:pPr>
+            <a:r>
+              <a:rPr lang="en-IN" sz="2400" b="1" dirty="0"/>
+              <a:t>Academic Staff</a:t>
+            </a:r>
+          </a:p>
+          <a:p>
+            <a:pPr marL="800100" lvl="0" indent="-342900">
+              <a:buFont typeface="Wingdings" panose="05000000000000000000" pitchFamily="2" charset="2"/>
+              <a:buChar char="q"/>
+            </a:pPr>
+            <a:r>
+              <a:rPr lang="en-IN" sz="2400" dirty="0"/>
+              <a:t>Manage student result records. </a:t>
+            </a:r>
+          </a:p>
+          <a:p>
+            <a:pPr marL="800100" lvl="0" indent="-342900">
+              <a:buFont typeface="Wingdings" panose="05000000000000000000" pitchFamily="2" charset="2"/>
+              <a:buChar char="q"/>
+            </a:pPr>
+            <a:r>
+              <a:rPr lang="en-IN" sz="2400" dirty="0"/>
+              <a:t>Review overall student performance. </a:t>
+            </a:r>
+          </a:p>
+          <a:p>
+            <a:pPr marL="800100" indent="-342900">
+              <a:buFont typeface="Wingdings" panose="05000000000000000000" pitchFamily="2" charset="2"/>
+              <a:buChar char="Ø"/>
+            </a:pPr>
+            <a:r>
+              <a:rPr lang="en-IN" sz="2400" b="1"/>
+              <a:t> </a:t>
+            </a:r>
+            <a:r>
+              <a:rPr lang="en-IN" sz="2400" b="1" dirty="0"/>
+              <a:t>Students</a:t>
+            </a:r>
+          </a:p>
+          <a:p>
+            <a:pPr marL="800100" lvl="0" indent="-342900">
+              <a:buFont typeface="Wingdings" panose="05000000000000000000" pitchFamily="2" charset="2"/>
+              <a:buChar char="q"/>
+            </a:pPr>
+            <a:r>
+              <a:rPr lang="en-IN" sz="2400" dirty="0"/>
+              <a:t>View their academic result details.</a:t>
+            </a:r>
+          </a:p>
+          <a:p>
+            <a:pPr algn="just">
+              <a:lnSpc>
+                <a:spcPct val="150000"/>
+              </a:lnSpc>
+            </a:pPr>
+            <a:endParaRPr lang="en-IN" sz="2400" b="0" dirty="0">
+              <a:latin typeface="Times New Roman" panose="02020603050405020304" pitchFamily="18" charset="0"/>
+              <a:cs typeface="Times New Roman" panose="02020603050405020304" pitchFamily="18" charset="0"/>
+            </a:endParaRPr>
+          </a:p>
+        </p:txBody>
+      </p:sp>
+      <p:sp>
+        <p:nvSpPr>
           <p:cNvPr id="3" name="Date Placeholder 2">
             <a:extLst>
               <a:ext uri="{FF2B5EF4-FFF2-40B4-BE49-F238E27FC236}">
@@ -6775,7 +8531,7 @@
           <a:p>
             <a:fld id="{A4A026F9-4B12-44A3-954F-2C895BB9BCAE}" type="datetime1">
               <a:rPr lang="en-US" smtClean="0"/>
-              <a:t>8/25/2026</a:t>
+              <a:t>10/27/2026</a:t>
             </a:fld>
             <a:endParaRPr lang="en-US" dirty="0"/>
           </a:p>
@@ -6883,73 +8639,11 @@
                 <a:latin typeface="Maiandra GD" panose="020E0502030308020204" pitchFamily="34" charset="0"/>
                 <a:cs typeface="Aharoni" panose="02010803020104030203" pitchFamily="2" charset="-79"/>
               </a:rPr>
-              <a:t>Architecture Diagram</a:t>
-            </a:r>
-          </a:p>
-        </p:txBody>
-      </p:sp>
-      <p:sp>
-        <p:nvSpPr>
-          <p:cNvPr id="13" name="TextBox 12">
-            <a:extLst>
-              <a:ext uri="{FF2B5EF4-FFF2-40B4-BE49-F238E27FC236}">
-                <a16:creationId xmlns:a16="http://schemas.microsoft.com/office/drawing/2014/main" id="{774176BE-6834-7BA4-A4E5-892E04C97D83}"/>
-              </a:ext>
-            </a:extLst>
-          </p:cNvPr>
-          <p:cNvSpPr txBox="1"/>
-          <p:nvPr/>
-        </p:nvSpPr>
-        <p:spPr>
-          <a:xfrm>
-            <a:off x="914400" y="1143000"/>
-            <a:ext cx="11125200" cy="5029200"/>
-          </a:xfrm>
-          <a:prstGeom prst="rect">
-            <a:avLst/>
-          </a:prstGeom>
-          <a:noFill/>
-        </p:spPr>
-        <p:txBody>
-          <a:bodyPr wrap="square" rtlCol="0">
-            <a:spAutoFit/>
-          </a:bodyPr>
-          <a:lstStyle/>
-          <a:p>
-            <a:endParaRPr lang="en-IN" dirty="0"/>
-          </a:p>
-        </p:txBody>
-      </p:sp>
-      <p:pic>
-        <p:nvPicPr>
-          <p:cNvPr id="14" name="Picture 13">
-            <a:extLst>
-              <a:ext uri="{FF2B5EF4-FFF2-40B4-BE49-F238E27FC236}">
-                <a16:creationId xmlns:a16="http://schemas.microsoft.com/office/drawing/2014/main" id="{9EB23971-2E20-E2AD-DEC4-EA6847198325}"/>
-              </a:ext>
-            </a:extLst>
-          </p:cNvPr>
-          <p:cNvPicPr>
-            <a:picLocks noChangeAspect="1"/>
-          </p:cNvPicPr>
-          <p:nvPr/>
-        </p:nvPicPr>
-        <p:blipFill>
-          <a:blip r:embed="rId2"/>
-          <a:stretch>
-            <a:fillRect/>
-          </a:stretch>
-        </p:blipFill>
-        <p:spPr>
-          <a:xfrm>
-            <a:off x="3962400" y="1036429"/>
-            <a:ext cx="3882808" cy="4961367"/>
-          </a:xfrm>
-          <a:prstGeom prst="rect">
-            <a:avLst/>
-          </a:prstGeom>
-        </p:spPr>
-      </p:pic>
+              <a:t>Users of the System</a:t>
+            </a:r>
+          </a:p>
+        </p:txBody>
+      </p:sp>
     </p:spTree>
     <p:extLst>
       <p:ext uri="{BB962C8B-B14F-4D97-AF65-F5344CB8AC3E}">
@@ -7003,7 +8697,7 @@
           <a:p>
             <a:fld id="{A4A026F9-4B12-44A3-954F-2C895BB9BCAE}" type="datetime1">
               <a:rPr lang="en-US" smtClean="0"/>
-              <a:t>8/25/2026</a:t>
+              <a:t>10/27/2026</a:t>
             </a:fld>
             <a:endParaRPr lang="en-US" dirty="0"/>
           </a:p>
@@ -7081,8 +8775,8 @@
         </p:nvSpPr>
         <p:spPr>
           <a:xfrm>
-            <a:off x="3886200" y="433845"/>
-            <a:ext cx="5223386" cy="661720"/>
+            <a:off x="1596000" y="433845"/>
+            <a:ext cx="9000000" cy="661720"/>
           </a:xfrm>
           <a:prstGeom prst="rect">
             <a:avLst/>
@@ -7104,251 +8798,34 @@
               </a:spcBef>
             </a:pPr>
             <a:r>
-              <a:rPr lang="en-GB" sz="4000" dirty="0">
+              <a:rPr lang="en-GB" sz="3200" dirty="0">
                 <a:solidFill>
                   <a:srgbClr val="0000FF"/>
                 </a:solidFill>
                 <a:latin typeface="Maiandra GD" panose="020E0502030308020204" pitchFamily="34" charset="0"/>
                 <a:cs typeface="Aharoni" panose="02010803020104030203" pitchFamily="2" charset="-79"/>
               </a:rPr>
-              <a:t>ER Diagram / DFD</a:t>
-            </a:r>
-          </a:p>
-        </p:txBody>
-      </p:sp>
-      <p:sp>
-        <p:nvSpPr>
-          <p:cNvPr id="8" name="Rectangle 7"/>
-          <p:cNvSpPr/>
+              <a:t>Modules / Functionalities</a:t>
+            </a:r>
+          </a:p>
+        </p:txBody>
+      </p:sp>
+      <p:sp>
+        <p:nvSpPr>
+          <p:cNvPr id="16" name="TextBox 15">
+            <a:extLst>
+              <a:ext uri="{FF2B5EF4-FFF2-40B4-BE49-F238E27FC236}">
+                <a16:creationId xmlns:a16="http://schemas.microsoft.com/office/drawing/2014/main" id="{10813711-7A58-88E0-8F89-04B44827F3F8}"/>
+              </a:ext>
+            </a:extLst>
+          </p:cNvPr>
+          <p:cNvSpPr txBox="1"/>
           <p:nvPr/>
         </p:nvSpPr>
         <p:spPr>
           <a:xfrm>
-            <a:off x="1253287" y="1594712"/>
-            <a:ext cx="1752182" cy="599779"/>
-          </a:xfrm>
-          <a:prstGeom prst="rect">
-            <a:avLst/>
-          </a:prstGeom>
-          <a:solidFill>
-            <a:srgbClr val="2E5B8A"/>
-          </a:solidFill>
-          <a:ln w="15875">
-            <a:solidFill>
-              <a:srgbClr val="1F3A5F"/>
-            </a:solidFill>
-          </a:ln>
-          <a:effectLst/>
-        </p:spPr>
-        <p:style>
-          <a:lnRef idx="1">
-            <a:schemeClr val="accent1"/>
-          </a:lnRef>
-          <a:fillRef idx="3">
-            <a:schemeClr val="accent1"/>
-          </a:fillRef>
-          <a:effectRef idx="2">
-            <a:schemeClr val="accent1"/>
-          </a:effectRef>
-          <a:fontRef idx="minor">
-            <a:schemeClr val="lt1"/>
-          </a:fontRef>
-        </p:style>
-        <p:txBody>
-          <a:bodyPr wrap="square" lIns="27432" tIns="18288" rIns="27432" bIns="18288" rtlCol="0" anchor="ctr"/>
-          <a:lstStyle/>
-          <a:p>
-            <a:pPr algn="ctr"/>
-            <a:r>
-              <a:rPr sz="1600" b="1">
-                <a:solidFill>
-                  <a:srgbClr val="FFFFFF"/>
-                </a:solidFill>
-                <a:latin typeface="Times New Roman" panose="02020603050405020304" pitchFamily="18" charset="0"/>
-                <a:cs typeface="Times New Roman" panose="02020603050405020304" pitchFamily="18" charset="0"/>
-              </a:rPr>
-              <a:t>STUDENT</a:t>
-            </a:r>
-          </a:p>
-        </p:txBody>
-      </p:sp>
-      <p:sp>
-        <p:nvSpPr>
-          <p:cNvPr id="10" name="Rectangle 9"/>
-          <p:cNvSpPr/>
-          <p:nvPr/>
-        </p:nvSpPr>
-        <p:spPr>
-          <a:xfrm>
-            <a:off x="9598702" y="1672494"/>
-            <a:ext cx="1755098" cy="565579"/>
-          </a:xfrm>
-          <a:prstGeom prst="rect">
-            <a:avLst/>
-          </a:prstGeom>
-          <a:solidFill>
-            <a:srgbClr val="2E5B8A"/>
-          </a:solidFill>
-          <a:ln w="15875">
-            <a:solidFill>
-              <a:srgbClr val="1F3A5F"/>
-            </a:solidFill>
-          </a:ln>
-          <a:effectLst/>
-        </p:spPr>
-        <p:style>
-          <a:lnRef idx="1">
-            <a:schemeClr val="accent1"/>
-          </a:lnRef>
-          <a:fillRef idx="3">
-            <a:schemeClr val="accent1"/>
-          </a:fillRef>
-          <a:effectRef idx="2">
-            <a:schemeClr val="accent1"/>
-          </a:effectRef>
-          <a:fontRef idx="minor">
-            <a:schemeClr val="lt1"/>
-          </a:fontRef>
-        </p:style>
-        <p:txBody>
-          <a:bodyPr wrap="square" lIns="27432" tIns="18288" rIns="27432" bIns="18288" rtlCol="0" anchor="ctr"/>
-          <a:lstStyle/>
-          <a:p>
-            <a:pPr algn="ctr"/>
-            <a:r>
-              <a:rPr sz="1600" b="1" dirty="0">
-                <a:solidFill>
-                  <a:srgbClr val="FFFFFF"/>
-                </a:solidFill>
-                <a:latin typeface="Times New Roman" panose="02020603050405020304" pitchFamily="18" charset="0"/>
-                <a:cs typeface="Times New Roman" panose="02020603050405020304" pitchFamily="18" charset="0"/>
-              </a:rPr>
-              <a:t>RESULTS</a:t>
-            </a:r>
-          </a:p>
-        </p:txBody>
-      </p:sp>
-      <p:sp>
-        <p:nvSpPr>
-          <p:cNvPr id="11" name="Diamond 10"/>
-          <p:cNvSpPr/>
-          <p:nvPr/>
-        </p:nvSpPr>
-        <p:spPr>
-          <a:xfrm>
-            <a:off x="5168461" y="1347025"/>
-            <a:ext cx="1994336" cy="1154863"/>
-          </a:xfrm>
-          <a:prstGeom prst="diamond">
-            <a:avLst/>
-          </a:prstGeom>
-          <a:solidFill>
-            <a:srgbClr val="C45B2E"/>
-          </a:solidFill>
-          <a:ln w="15875">
-            <a:solidFill>
-              <a:srgbClr val="1F3A5F"/>
-            </a:solidFill>
-          </a:ln>
-          <a:effectLst/>
-        </p:spPr>
-        <p:style>
-          <a:lnRef idx="1">
-            <a:schemeClr val="accent1"/>
-          </a:lnRef>
-          <a:fillRef idx="3">
-            <a:schemeClr val="accent1"/>
-          </a:fillRef>
-          <a:effectRef idx="2">
-            <a:schemeClr val="accent1"/>
-          </a:effectRef>
-          <a:fontRef idx="minor">
-            <a:schemeClr val="lt1"/>
-          </a:fontRef>
-        </p:style>
-        <p:txBody>
-          <a:bodyPr wrap="square" lIns="18288" tIns="0" rIns="18288" bIns="0" rtlCol="0" anchor="ctr"/>
-          <a:lstStyle/>
-          <a:p>
-            <a:pPr algn="ctr"/>
-            <a:r>
-              <a:rPr sz="1400" b="1" dirty="0">
-                <a:solidFill>
-                  <a:srgbClr val="FFFFFF"/>
-                </a:solidFill>
-                <a:latin typeface="Times New Roman" panose="02020603050405020304" pitchFamily="18" charset="0"/>
-                <a:cs typeface="Times New Roman" panose="02020603050405020304" pitchFamily="18" charset="0"/>
-              </a:rPr>
-              <a:t>MANAGES</a:t>
-            </a:r>
-          </a:p>
-        </p:txBody>
-      </p:sp>
-      <p:sp>
-        <p:nvSpPr>
-          <p:cNvPr id="22" name="Rectangle 21"/>
-          <p:cNvSpPr/>
-          <p:nvPr/>
-        </p:nvSpPr>
-        <p:spPr>
-          <a:xfrm>
-            <a:off x="4947677" y="2966042"/>
-            <a:ext cx="2435904" cy="502920"/>
-          </a:xfrm>
-          <a:prstGeom prst="rect">
-            <a:avLst/>
-          </a:prstGeom>
-          <a:solidFill>
-            <a:srgbClr val="2E868A"/>
-          </a:solidFill>
-          <a:ln w="15875">
-            <a:solidFill>
-              <a:srgbClr val="1F3A5F"/>
-            </a:solidFill>
-          </a:ln>
-          <a:effectLst/>
-        </p:spPr>
-        <p:style>
-          <a:lnRef idx="1">
-            <a:schemeClr val="accent1"/>
-          </a:lnRef>
-          <a:fillRef idx="3">
-            <a:schemeClr val="accent1"/>
-          </a:fillRef>
-          <a:effectRef idx="2">
-            <a:schemeClr val="accent1"/>
-          </a:effectRef>
-          <a:fontRef idx="minor">
-            <a:schemeClr val="lt1"/>
-          </a:fontRef>
-        </p:style>
-        <p:txBody>
-          <a:bodyPr wrap="square" lIns="27432" tIns="18288" rIns="27432" bIns="18288" rtlCol="0" anchor="ctr"/>
-          <a:lstStyle/>
-          <a:p>
-            <a:pPr algn="ctr"/>
-            <a:r>
-              <a:rPr sz="1600" b="1" dirty="0">
-                <a:solidFill>
-                  <a:srgbClr val="FFFFFF"/>
-                </a:solidFill>
-                <a:latin typeface="Calibri"/>
-              </a:rPr>
-              <a:t>MENU OPTIONS</a:t>
-            </a:r>
-          </a:p>
-        </p:txBody>
-      </p:sp>
-      <p:sp>
-        <p:nvSpPr>
-          <p:cNvPr id="26" name="TextBox 25"/>
-          <p:cNvSpPr txBox="1"/>
-          <p:nvPr/>
-        </p:nvSpPr>
-        <p:spPr>
-          <a:xfrm>
-            <a:off x="6080760" y="5394960"/>
-            <a:ext cx="457200" cy="261610"/>
+            <a:off x="217842" y="1447800"/>
+            <a:ext cx="12126558" cy="4401205"/>
           </a:xfrm>
           <a:prstGeom prst="rect">
             <a:avLst/>
@@ -7356,1603 +8833,163 @@
           <a:noFill/>
         </p:spPr>
         <p:txBody>
-          <a:bodyPr wrap="square">
+          <a:bodyPr wrap="square" rtlCol="0">
             <a:spAutoFit/>
           </a:bodyPr>
           <a:lstStyle/>
           <a:p>
-            <a:pPr algn="ctr"/>
-            <a:r>
-              <a:rPr sz="1100" b="1">
-                <a:solidFill>
-                  <a:srgbClr val="C45B2E"/>
-                </a:solidFill>
-                <a:latin typeface="Times New Roman" panose="02020603050405020304" pitchFamily="18" charset="0"/>
-                <a:cs typeface="Times New Roman" panose="02020603050405020304" pitchFamily="18" charset="0"/>
-              </a:rPr>
-              <a:t>1</a:t>
-            </a:r>
-          </a:p>
-        </p:txBody>
-      </p:sp>
-      <p:sp>
-        <p:nvSpPr>
-          <p:cNvPr id="27" name="Oval 26"/>
-          <p:cNvSpPr/>
-          <p:nvPr/>
-        </p:nvSpPr>
-        <p:spPr>
-          <a:xfrm>
-            <a:off x="594360" y="3651932"/>
-            <a:ext cx="1234440" cy="502920"/>
-          </a:xfrm>
-          <a:prstGeom prst="ellipse">
-            <a:avLst/>
-          </a:prstGeom>
-          <a:solidFill>
-            <a:srgbClr val="EAF1F7"/>
-          </a:solidFill>
-          <a:ln w="12700">
-            <a:solidFill>
-              <a:srgbClr val="1F3A5F"/>
-            </a:solidFill>
-          </a:ln>
-          <a:effectLst/>
-        </p:spPr>
-        <p:style>
-          <a:lnRef idx="1">
-            <a:schemeClr val="accent1"/>
-          </a:lnRef>
-          <a:fillRef idx="3">
-            <a:schemeClr val="accent1"/>
-          </a:fillRef>
-          <a:effectRef idx="2">
-            <a:schemeClr val="accent1"/>
-          </a:effectRef>
-          <a:fontRef idx="minor">
-            <a:schemeClr val="lt1"/>
-          </a:fontRef>
-        </p:style>
-        <p:txBody>
-          <a:bodyPr wrap="square" lIns="18288" tIns="0" rIns="18288" bIns="0" rtlCol="0" anchor="ctr"/>
-          <a:lstStyle/>
-          <a:p>
-            <a:pPr algn="ctr"/>
-            <a:r>
-              <a:rPr sz="1000" dirty="0">
-                <a:solidFill>
-                  <a:srgbClr val="222222"/>
-                </a:solidFill>
-                <a:latin typeface="Calibri"/>
-              </a:rPr>
-              <a:t>ROLL_NO</a:t>
-            </a:r>
-          </a:p>
-        </p:txBody>
-      </p:sp>
-      <p:sp>
-        <p:nvSpPr>
-          <p:cNvPr id="28" name="Oval 27"/>
-          <p:cNvSpPr/>
-          <p:nvPr/>
-        </p:nvSpPr>
-        <p:spPr>
-          <a:xfrm>
-            <a:off x="2251507" y="3737593"/>
-            <a:ext cx="1051560" cy="502920"/>
-          </a:xfrm>
-          <a:prstGeom prst="ellipse">
-            <a:avLst/>
-          </a:prstGeom>
-          <a:solidFill>
-            <a:srgbClr val="EAF1F7"/>
-          </a:solidFill>
-          <a:ln w="12700">
-            <a:solidFill>
-              <a:srgbClr val="1F3A5F"/>
-            </a:solidFill>
-          </a:ln>
-          <a:effectLst/>
-        </p:spPr>
-        <p:style>
-          <a:lnRef idx="1">
-            <a:schemeClr val="accent1"/>
-          </a:lnRef>
-          <a:fillRef idx="3">
-            <a:schemeClr val="accent1"/>
-          </a:fillRef>
-          <a:effectRef idx="2">
-            <a:schemeClr val="accent1"/>
-          </a:effectRef>
-          <a:fontRef idx="minor">
-            <a:schemeClr val="lt1"/>
-          </a:fontRef>
-        </p:style>
-        <p:txBody>
-          <a:bodyPr wrap="square" lIns="18288" tIns="0" rIns="18288" bIns="0" rtlCol="0" anchor="ctr"/>
-          <a:lstStyle/>
-          <a:p>
-            <a:pPr algn="ctr"/>
-            <a:r>
-              <a:rPr sz="1100" dirty="0">
-                <a:solidFill>
-                  <a:srgbClr val="222222"/>
-                </a:solidFill>
-                <a:latin typeface="Times New Roman" panose="02020603050405020304" pitchFamily="18" charset="0"/>
-                <a:cs typeface="Times New Roman" panose="02020603050405020304" pitchFamily="18" charset="0"/>
-              </a:rPr>
-              <a:t>NAME</a:t>
-            </a:r>
-            <a:endParaRPr sz="1100" u="none" dirty="0">
-              <a:solidFill>
-                <a:srgbClr val="222222"/>
-              </a:solidFill>
-              <a:latin typeface="Times New Roman" panose="02020603050405020304" pitchFamily="18" charset="0"/>
-              <a:cs typeface="Times New Roman" panose="02020603050405020304" pitchFamily="18" charset="0"/>
-            </a:endParaRPr>
-          </a:p>
-        </p:txBody>
-      </p:sp>
-      <p:sp>
-        <p:nvSpPr>
-          <p:cNvPr id="31" name="Oval 30"/>
-          <p:cNvSpPr/>
-          <p:nvPr/>
-        </p:nvSpPr>
-        <p:spPr>
-          <a:xfrm>
-            <a:off x="0" y="2664697"/>
-            <a:ext cx="1188720" cy="502920"/>
-          </a:xfrm>
-          <a:prstGeom prst="ellipse">
-            <a:avLst/>
-          </a:prstGeom>
-          <a:solidFill>
-            <a:srgbClr val="EAF1F7"/>
-          </a:solidFill>
-          <a:ln w="12700">
-            <a:solidFill>
-              <a:srgbClr val="1F3A5F"/>
-            </a:solidFill>
-          </a:ln>
-          <a:effectLst/>
-        </p:spPr>
-        <p:style>
-          <a:lnRef idx="1">
-            <a:schemeClr val="accent1"/>
-          </a:lnRef>
-          <a:fillRef idx="3">
-            <a:schemeClr val="accent1"/>
-          </a:fillRef>
-          <a:effectRef idx="2">
-            <a:schemeClr val="accent1"/>
-          </a:effectRef>
-          <a:fontRef idx="minor">
-            <a:schemeClr val="lt1"/>
-          </a:fontRef>
-        </p:style>
-        <p:txBody>
-          <a:bodyPr wrap="square" lIns="18288" tIns="0" rIns="18288" bIns="0" rtlCol="0" anchor="ctr"/>
-          <a:lstStyle/>
-          <a:p>
-            <a:pPr algn="ctr"/>
-            <a:r>
-              <a:rPr sz="1000" dirty="0">
-                <a:solidFill>
-                  <a:srgbClr val="222222"/>
-                </a:solidFill>
-                <a:latin typeface="Times New Roman" panose="02020603050405020304" pitchFamily="18" charset="0"/>
-                <a:cs typeface="Times New Roman" panose="02020603050405020304" pitchFamily="18" charset="0"/>
-              </a:rPr>
-              <a:t>STUDENT_ID</a:t>
-            </a:r>
-          </a:p>
-        </p:txBody>
-      </p:sp>
-      <p:sp>
-        <p:nvSpPr>
-          <p:cNvPr id="32" name="Oval 31"/>
-          <p:cNvSpPr/>
-          <p:nvPr/>
-        </p:nvSpPr>
-        <p:spPr>
-          <a:xfrm>
-            <a:off x="3204898" y="2859608"/>
-            <a:ext cx="1280160" cy="502920"/>
-          </a:xfrm>
-          <a:prstGeom prst="ellipse">
-            <a:avLst/>
-          </a:prstGeom>
-          <a:solidFill>
-            <a:srgbClr val="EAF1F7"/>
-          </a:solidFill>
-          <a:ln w="12700">
-            <a:solidFill>
-              <a:srgbClr val="1F3A5F"/>
-            </a:solidFill>
-          </a:ln>
-          <a:effectLst/>
-        </p:spPr>
-        <p:style>
-          <a:lnRef idx="1">
-            <a:schemeClr val="accent1"/>
-          </a:lnRef>
-          <a:fillRef idx="3">
-            <a:schemeClr val="accent1"/>
-          </a:fillRef>
-          <a:effectRef idx="2">
-            <a:schemeClr val="accent1"/>
-          </a:effectRef>
-          <a:fontRef idx="minor">
-            <a:schemeClr val="lt1"/>
-          </a:fontRef>
-        </p:style>
-        <p:txBody>
-          <a:bodyPr wrap="square" lIns="18288" tIns="0" rIns="18288" bIns="0" rtlCol="0" anchor="ctr"/>
-          <a:lstStyle/>
-          <a:p>
-            <a:pPr algn="ctr"/>
-            <a:r>
-              <a:rPr sz="1100" dirty="0">
-                <a:solidFill>
-                  <a:srgbClr val="222222"/>
-                </a:solidFill>
-                <a:latin typeface="Times New Roman" panose="02020603050405020304" pitchFamily="18" charset="0"/>
-                <a:cs typeface="Times New Roman" panose="02020603050405020304" pitchFamily="18" charset="0"/>
-              </a:rPr>
-              <a:t>SUBJECT MARKS</a:t>
-            </a:r>
-            <a:endParaRPr sz="1100" u="none" dirty="0">
-              <a:solidFill>
-                <a:srgbClr val="222222"/>
-              </a:solidFill>
-              <a:latin typeface="Times New Roman" panose="02020603050405020304" pitchFamily="18" charset="0"/>
-              <a:cs typeface="Times New Roman" panose="02020603050405020304" pitchFamily="18" charset="0"/>
-            </a:endParaRPr>
-          </a:p>
-        </p:txBody>
-      </p:sp>
-      <p:sp>
-        <p:nvSpPr>
-          <p:cNvPr id="33" name="Oval 32"/>
-          <p:cNvSpPr/>
-          <p:nvPr/>
-        </p:nvSpPr>
-        <p:spPr>
-          <a:xfrm>
-            <a:off x="8380749" y="2926080"/>
-            <a:ext cx="1097280" cy="502920"/>
-          </a:xfrm>
-          <a:prstGeom prst="ellipse">
-            <a:avLst/>
-          </a:prstGeom>
-          <a:solidFill>
-            <a:srgbClr val="EAF1F7"/>
-          </a:solidFill>
-          <a:ln w="12700">
-            <a:solidFill>
-              <a:srgbClr val="1F3A5F"/>
-            </a:solidFill>
-          </a:ln>
-          <a:effectLst/>
-        </p:spPr>
-        <p:style>
-          <a:lnRef idx="1">
-            <a:schemeClr val="accent1"/>
-          </a:lnRef>
-          <a:fillRef idx="3">
-            <a:schemeClr val="accent1"/>
-          </a:fillRef>
-          <a:effectRef idx="2">
-            <a:schemeClr val="accent1"/>
-          </a:effectRef>
-          <a:fontRef idx="minor">
-            <a:schemeClr val="lt1"/>
-          </a:fontRef>
-        </p:style>
-        <p:txBody>
-          <a:bodyPr wrap="square" lIns="18288" tIns="0" rIns="18288" bIns="0" rtlCol="0" anchor="ctr"/>
-          <a:lstStyle/>
-          <a:p>
-            <a:pPr algn="ctr"/>
-            <a:r>
-              <a:rPr sz="1100" dirty="0">
-                <a:solidFill>
-                  <a:srgbClr val="222222"/>
-                </a:solidFill>
-                <a:latin typeface="Times New Roman" panose="02020603050405020304" pitchFamily="18" charset="0"/>
-                <a:cs typeface="Times New Roman" panose="02020603050405020304" pitchFamily="18" charset="0"/>
-              </a:rPr>
-              <a:t>TOTAL</a:t>
-            </a:r>
-            <a:endParaRPr sz="1100" u="none" dirty="0">
-              <a:solidFill>
-                <a:srgbClr val="222222"/>
-              </a:solidFill>
-              <a:latin typeface="Times New Roman" panose="02020603050405020304" pitchFamily="18" charset="0"/>
-              <a:cs typeface="Times New Roman" panose="02020603050405020304" pitchFamily="18" charset="0"/>
-            </a:endParaRPr>
-          </a:p>
-        </p:txBody>
-      </p:sp>
-      <p:sp>
-        <p:nvSpPr>
-          <p:cNvPr id="37" name="Oval 36"/>
-          <p:cNvSpPr/>
-          <p:nvPr/>
-        </p:nvSpPr>
-        <p:spPr>
-          <a:xfrm>
-            <a:off x="11003280" y="2845985"/>
-            <a:ext cx="1188720" cy="502920"/>
-          </a:xfrm>
-          <a:prstGeom prst="ellipse">
-            <a:avLst/>
-          </a:prstGeom>
-          <a:solidFill>
-            <a:srgbClr val="EAF1F7"/>
-          </a:solidFill>
-          <a:ln w="12700">
-            <a:solidFill>
-              <a:srgbClr val="1F3A5F"/>
-            </a:solidFill>
-          </a:ln>
-          <a:effectLst/>
-        </p:spPr>
-        <p:style>
-          <a:lnRef idx="1">
-            <a:schemeClr val="accent1"/>
-          </a:lnRef>
-          <a:fillRef idx="3">
-            <a:schemeClr val="accent1"/>
-          </a:fillRef>
-          <a:effectRef idx="2">
-            <a:schemeClr val="accent1"/>
-          </a:effectRef>
-          <a:fontRef idx="minor">
-            <a:schemeClr val="lt1"/>
-          </a:fontRef>
-        </p:style>
-        <p:txBody>
-          <a:bodyPr wrap="square" lIns="18288" tIns="0" rIns="18288" bIns="0" rtlCol="0" anchor="ctr"/>
-          <a:lstStyle/>
-          <a:p>
-            <a:pPr algn="ctr"/>
-            <a:r>
-              <a:rPr sz="1100" dirty="0">
-                <a:solidFill>
-                  <a:srgbClr val="222222"/>
-                </a:solidFill>
-                <a:latin typeface="Times New Roman" panose="02020603050405020304" pitchFamily="18" charset="0"/>
-                <a:cs typeface="Times New Roman" panose="02020603050405020304" pitchFamily="18" charset="0"/>
-              </a:rPr>
-              <a:t>GRADE</a:t>
-            </a:r>
-          </a:p>
-        </p:txBody>
-      </p:sp>
-      <p:sp>
-        <p:nvSpPr>
-          <p:cNvPr id="38" name="Oval 37"/>
-          <p:cNvSpPr/>
-          <p:nvPr/>
-        </p:nvSpPr>
-        <p:spPr>
-          <a:xfrm>
-            <a:off x="10833452" y="3903392"/>
-            <a:ext cx="1188720" cy="502920"/>
-          </a:xfrm>
-          <a:prstGeom prst="ellipse">
-            <a:avLst/>
-          </a:prstGeom>
-          <a:solidFill>
-            <a:srgbClr val="EAF1F7"/>
-          </a:solidFill>
-          <a:ln w="12700">
-            <a:solidFill>
-              <a:srgbClr val="1F3A5F"/>
-            </a:solidFill>
-          </a:ln>
-          <a:effectLst/>
-        </p:spPr>
-        <p:style>
-          <a:lnRef idx="1">
-            <a:schemeClr val="accent1"/>
-          </a:lnRef>
-          <a:fillRef idx="3">
-            <a:schemeClr val="accent1"/>
-          </a:fillRef>
-          <a:effectRef idx="2">
-            <a:schemeClr val="accent1"/>
-          </a:effectRef>
-          <a:fontRef idx="minor">
-            <a:schemeClr val="lt1"/>
-          </a:fontRef>
-        </p:style>
-        <p:txBody>
-          <a:bodyPr wrap="square" lIns="18288" tIns="0" rIns="18288" bIns="0" rtlCol="0" anchor="ctr"/>
-          <a:lstStyle/>
-          <a:p>
-            <a:pPr algn="ctr"/>
-            <a:r>
-              <a:rPr sz="1100" u="none" dirty="0">
-                <a:solidFill>
-                  <a:srgbClr val="222222"/>
-                </a:solidFill>
-                <a:latin typeface="Times New Roman" panose="02020603050405020304" pitchFamily="18" charset="0"/>
-                <a:cs typeface="Times New Roman" panose="02020603050405020304" pitchFamily="18" charset="0"/>
-              </a:rPr>
-              <a:t>AVERAGE</a:t>
-            </a:r>
-          </a:p>
-        </p:txBody>
-      </p:sp>
-      <p:sp>
-        <p:nvSpPr>
-          <p:cNvPr id="41" name="Oval 40"/>
-          <p:cNvSpPr/>
-          <p:nvPr/>
-        </p:nvSpPr>
-        <p:spPr>
-          <a:xfrm>
-            <a:off x="8698433" y="3773411"/>
-            <a:ext cx="1371600" cy="502920"/>
-          </a:xfrm>
-          <a:prstGeom prst="ellipse">
-            <a:avLst/>
-          </a:prstGeom>
-          <a:solidFill>
-            <a:srgbClr val="EAF1F7"/>
-          </a:solidFill>
-          <a:ln w="12700">
-            <a:solidFill>
-              <a:srgbClr val="1F3A5F"/>
-            </a:solidFill>
-          </a:ln>
-          <a:effectLst/>
-        </p:spPr>
-        <p:style>
-          <a:lnRef idx="1">
-            <a:schemeClr val="accent1"/>
-          </a:lnRef>
-          <a:fillRef idx="3">
-            <a:schemeClr val="accent1"/>
-          </a:fillRef>
-          <a:effectRef idx="2">
-            <a:schemeClr val="accent1"/>
-          </a:effectRef>
-          <a:fontRef idx="minor">
-            <a:schemeClr val="lt1"/>
-          </a:fontRef>
-        </p:style>
-        <p:txBody>
-          <a:bodyPr wrap="square" lIns="18288" tIns="0" rIns="18288" bIns="0" rtlCol="0" anchor="ctr"/>
-          <a:lstStyle/>
-          <a:p>
-            <a:pPr algn="ctr"/>
-            <a:r>
-              <a:rPr sz="1100" dirty="0">
-                <a:solidFill>
-                  <a:srgbClr val="222222"/>
-                </a:solidFill>
-                <a:latin typeface="Calibri"/>
-              </a:rPr>
-              <a:t>PERCENTAGE</a:t>
-            </a:r>
-          </a:p>
-        </p:txBody>
-      </p:sp>
-      <p:cxnSp>
-        <p:nvCxnSpPr>
-          <p:cNvPr id="49" name="Straight Connector 48">
-            <a:extLst>
-              <a:ext uri="{FF2B5EF4-FFF2-40B4-BE49-F238E27FC236}">
-                <a16:creationId xmlns:a16="http://schemas.microsoft.com/office/drawing/2014/main" id="{4A139EAB-4584-CBED-941B-4CC630955D83}"/>
-              </a:ext>
-            </a:extLst>
-          </p:cNvPr>
-          <p:cNvCxnSpPr>
-            <a:stCxn id="8" idx="3"/>
-            <a:endCxn id="11" idx="1"/>
-          </p:cNvCxnSpPr>
-          <p:nvPr/>
-        </p:nvCxnSpPr>
-        <p:spPr>
-          <a:xfrm>
-            <a:off x="3005469" y="1894602"/>
-            <a:ext cx="2162992" cy="29855"/>
-          </a:xfrm>
-          <a:prstGeom prst="line">
-            <a:avLst/>
-          </a:prstGeom>
-        </p:spPr>
-        <p:style>
-          <a:lnRef idx="1">
-            <a:schemeClr val="accent1"/>
-          </a:lnRef>
-          <a:fillRef idx="0">
-            <a:schemeClr val="accent1"/>
-          </a:fillRef>
-          <a:effectRef idx="0">
-            <a:schemeClr val="accent1"/>
-          </a:effectRef>
-          <a:fontRef idx="minor">
-            <a:schemeClr val="tx1"/>
-          </a:fontRef>
-        </p:style>
-      </p:cxnSp>
-      <p:cxnSp>
-        <p:nvCxnSpPr>
-          <p:cNvPr id="51" name="Straight Connector 50">
-            <a:extLst>
-              <a:ext uri="{FF2B5EF4-FFF2-40B4-BE49-F238E27FC236}">
-                <a16:creationId xmlns:a16="http://schemas.microsoft.com/office/drawing/2014/main" id="{EED3954B-FA90-5C36-F417-E3300309062D}"/>
-              </a:ext>
-            </a:extLst>
-          </p:cNvPr>
-          <p:cNvCxnSpPr>
-            <a:stCxn id="11" idx="3"/>
-            <a:endCxn id="10" idx="1"/>
-          </p:cNvCxnSpPr>
-          <p:nvPr/>
-        </p:nvCxnSpPr>
-        <p:spPr>
-          <a:xfrm>
-            <a:off x="7162797" y="1924457"/>
-            <a:ext cx="2435905" cy="30827"/>
-          </a:xfrm>
-          <a:prstGeom prst="line">
-            <a:avLst/>
-          </a:prstGeom>
-        </p:spPr>
-        <p:style>
-          <a:lnRef idx="1">
-            <a:schemeClr val="accent1"/>
-          </a:lnRef>
-          <a:fillRef idx="0">
-            <a:schemeClr val="accent1"/>
-          </a:fillRef>
-          <a:effectRef idx="0">
-            <a:schemeClr val="accent1"/>
-          </a:effectRef>
-          <a:fontRef idx="minor">
-            <a:schemeClr val="tx1"/>
-          </a:fontRef>
-        </p:style>
-      </p:cxnSp>
-      <p:cxnSp>
-        <p:nvCxnSpPr>
-          <p:cNvPr id="53" name="Straight Connector 52">
-            <a:extLst>
-              <a:ext uri="{FF2B5EF4-FFF2-40B4-BE49-F238E27FC236}">
-                <a16:creationId xmlns:a16="http://schemas.microsoft.com/office/drawing/2014/main" id="{6A0EDA84-D2C9-A836-0FDA-DF1E72A87C47}"/>
-              </a:ext>
-            </a:extLst>
-          </p:cNvPr>
-          <p:cNvCxnSpPr>
-            <a:stCxn id="8" idx="2"/>
-            <a:endCxn id="28" idx="0"/>
-          </p:cNvCxnSpPr>
-          <p:nvPr/>
-        </p:nvCxnSpPr>
-        <p:spPr>
-          <a:xfrm>
-            <a:off x="2129378" y="2194491"/>
-            <a:ext cx="647909" cy="1543102"/>
-          </a:xfrm>
-          <a:prstGeom prst="line">
-            <a:avLst/>
-          </a:prstGeom>
-        </p:spPr>
-        <p:style>
-          <a:lnRef idx="1">
-            <a:schemeClr val="dk1"/>
-          </a:lnRef>
-          <a:fillRef idx="0">
-            <a:schemeClr val="dk1"/>
-          </a:fillRef>
-          <a:effectRef idx="0">
-            <a:schemeClr val="dk1"/>
-          </a:effectRef>
-          <a:fontRef idx="minor">
-            <a:schemeClr val="tx1"/>
-          </a:fontRef>
-        </p:style>
-      </p:cxnSp>
-      <p:cxnSp>
-        <p:nvCxnSpPr>
-          <p:cNvPr id="57" name="Straight Connector 56">
-            <a:extLst>
-              <a:ext uri="{FF2B5EF4-FFF2-40B4-BE49-F238E27FC236}">
-                <a16:creationId xmlns:a16="http://schemas.microsoft.com/office/drawing/2014/main" id="{284176A3-04BC-17E1-8C20-2BDE98EDAB92}"/>
-              </a:ext>
-            </a:extLst>
-          </p:cNvPr>
-          <p:cNvCxnSpPr>
-            <a:stCxn id="8" idx="2"/>
-            <a:endCxn id="27" idx="0"/>
-          </p:cNvCxnSpPr>
-          <p:nvPr/>
-        </p:nvCxnSpPr>
-        <p:spPr>
-          <a:xfrm flipH="1">
-            <a:off x="1211580" y="2194491"/>
-            <a:ext cx="917798" cy="1457441"/>
-          </a:xfrm>
-          <a:prstGeom prst="line">
-            <a:avLst/>
-          </a:prstGeom>
-        </p:spPr>
-        <p:style>
-          <a:lnRef idx="1">
-            <a:schemeClr val="dk1"/>
-          </a:lnRef>
-          <a:fillRef idx="0">
-            <a:schemeClr val="dk1"/>
-          </a:fillRef>
-          <a:effectRef idx="0">
-            <a:schemeClr val="dk1"/>
-          </a:effectRef>
-          <a:fontRef idx="minor">
-            <a:schemeClr val="tx1"/>
-          </a:fontRef>
-        </p:style>
-      </p:cxnSp>
-      <p:cxnSp>
-        <p:nvCxnSpPr>
-          <p:cNvPr id="61" name="Straight Connector 60">
-            <a:extLst>
-              <a:ext uri="{FF2B5EF4-FFF2-40B4-BE49-F238E27FC236}">
-                <a16:creationId xmlns:a16="http://schemas.microsoft.com/office/drawing/2014/main" id="{F4D1A526-DFFB-ABB2-A6B8-FD0A0C132059}"/>
-              </a:ext>
-            </a:extLst>
-          </p:cNvPr>
-          <p:cNvCxnSpPr>
-            <a:stCxn id="8" idx="2"/>
-            <a:endCxn id="31" idx="0"/>
-          </p:cNvCxnSpPr>
-          <p:nvPr/>
-        </p:nvCxnSpPr>
-        <p:spPr>
-          <a:xfrm flipH="1">
-            <a:off x="594360" y="2194491"/>
-            <a:ext cx="1535018" cy="470206"/>
-          </a:xfrm>
-          <a:prstGeom prst="line">
-            <a:avLst/>
-          </a:prstGeom>
-        </p:spPr>
-        <p:style>
-          <a:lnRef idx="1">
-            <a:schemeClr val="dk1"/>
-          </a:lnRef>
-          <a:fillRef idx="0">
-            <a:schemeClr val="dk1"/>
-          </a:fillRef>
-          <a:effectRef idx="0">
-            <a:schemeClr val="dk1"/>
-          </a:effectRef>
-          <a:fontRef idx="minor">
-            <a:schemeClr val="tx1"/>
-          </a:fontRef>
-        </p:style>
-      </p:cxnSp>
-      <p:cxnSp>
-        <p:nvCxnSpPr>
-          <p:cNvPr id="63" name="Straight Connector 62">
-            <a:extLst>
-              <a:ext uri="{FF2B5EF4-FFF2-40B4-BE49-F238E27FC236}">
-                <a16:creationId xmlns:a16="http://schemas.microsoft.com/office/drawing/2014/main" id="{EDC9AFCE-E272-F54D-F34E-5225CBD0B864}"/>
-              </a:ext>
-            </a:extLst>
-          </p:cNvPr>
-          <p:cNvCxnSpPr>
-            <a:stCxn id="8" idx="2"/>
-            <a:endCxn id="32" idx="0"/>
-          </p:cNvCxnSpPr>
-          <p:nvPr/>
-        </p:nvCxnSpPr>
-        <p:spPr>
-          <a:xfrm>
-            <a:off x="2129378" y="2194491"/>
-            <a:ext cx="1715600" cy="665117"/>
-          </a:xfrm>
-          <a:prstGeom prst="line">
-            <a:avLst/>
-          </a:prstGeom>
-        </p:spPr>
-        <p:style>
-          <a:lnRef idx="1">
-            <a:schemeClr val="dk1"/>
-          </a:lnRef>
-          <a:fillRef idx="0">
-            <a:schemeClr val="dk1"/>
-          </a:fillRef>
-          <a:effectRef idx="0">
-            <a:schemeClr val="dk1"/>
-          </a:effectRef>
-          <a:fontRef idx="minor">
-            <a:schemeClr val="tx1"/>
-          </a:fontRef>
-        </p:style>
-      </p:cxnSp>
-      <p:sp>
-        <p:nvSpPr>
-          <p:cNvPr id="67" name="Oval 66">
-            <a:extLst>
-              <a:ext uri="{FF2B5EF4-FFF2-40B4-BE49-F238E27FC236}">
-                <a16:creationId xmlns:a16="http://schemas.microsoft.com/office/drawing/2014/main" id="{371FC798-A912-6001-A7BD-8A147ADFA3B7}"/>
-              </a:ext>
-            </a:extLst>
-          </p:cNvPr>
-          <p:cNvSpPr/>
-          <p:nvPr/>
-        </p:nvSpPr>
-        <p:spPr>
-          <a:xfrm>
-            <a:off x="9886633" y="4446849"/>
-            <a:ext cx="1097280" cy="502920"/>
-          </a:xfrm>
-          <a:prstGeom prst="ellipse">
-            <a:avLst/>
-          </a:prstGeom>
-          <a:solidFill>
-            <a:srgbClr val="EAF1F7"/>
-          </a:solidFill>
-          <a:ln w="12700">
-            <a:solidFill>
-              <a:srgbClr val="1F3A5F"/>
-            </a:solidFill>
-          </a:ln>
-          <a:effectLst/>
-        </p:spPr>
-        <p:style>
-          <a:lnRef idx="1">
-            <a:schemeClr val="accent1"/>
-          </a:lnRef>
-          <a:fillRef idx="3">
-            <a:schemeClr val="accent1"/>
-          </a:fillRef>
-          <a:effectRef idx="2">
-            <a:schemeClr val="accent1"/>
-          </a:effectRef>
-          <a:fontRef idx="minor">
-            <a:schemeClr val="lt1"/>
-          </a:fontRef>
-        </p:style>
-        <p:txBody>
-          <a:bodyPr wrap="square" lIns="18288" tIns="0" rIns="18288" bIns="0" rtlCol="0" anchor="ctr"/>
-          <a:lstStyle/>
-          <a:p>
-            <a:pPr algn="ctr"/>
-            <a:r>
-              <a:rPr sz="1100" u="none" dirty="0">
-                <a:solidFill>
-                  <a:srgbClr val="222222"/>
-                </a:solidFill>
-                <a:latin typeface="Times New Roman" panose="02020603050405020304" pitchFamily="18" charset="0"/>
-                <a:cs typeface="Times New Roman" panose="02020603050405020304" pitchFamily="18" charset="0"/>
-              </a:rPr>
-              <a:t>STATUS</a:t>
-            </a:r>
-            <a:endParaRPr lang="en-IN" sz="1100" u="none" dirty="0">
-              <a:solidFill>
-                <a:srgbClr val="222222"/>
-              </a:solidFill>
-              <a:latin typeface="Times New Roman" panose="02020603050405020304" pitchFamily="18" charset="0"/>
-              <a:cs typeface="Times New Roman" panose="02020603050405020304" pitchFamily="18" charset="0"/>
-            </a:endParaRPr>
-          </a:p>
-          <a:p>
-            <a:pPr algn="ctr"/>
-            <a:r>
-              <a:rPr lang="en-IN" sz="1100" dirty="0">
-                <a:solidFill>
-                  <a:srgbClr val="222222"/>
-                </a:solidFill>
-                <a:latin typeface="Times New Roman" panose="02020603050405020304" pitchFamily="18" charset="0"/>
-                <a:cs typeface="Times New Roman" panose="02020603050405020304" pitchFamily="18" charset="0"/>
-              </a:rPr>
-              <a:t>PASS/FAIL)</a:t>
-            </a:r>
-            <a:endParaRPr lang="en-IN" sz="1100" u="none" dirty="0">
-              <a:solidFill>
-                <a:srgbClr val="222222"/>
-              </a:solidFill>
-              <a:latin typeface="Times New Roman" panose="02020603050405020304" pitchFamily="18" charset="0"/>
-              <a:cs typeface="Times New Roman" panose="02020603050405020304" pitchFamily="18" charset="0"/>
-            </a:endParaRPr>
-          </a:p>
-        </p:txBody>
-      </p:sp>
-      <p:cxnSp>
-        <p:nvCxnSpPr>
-          <p:cNvPr id="69" name="Straight Connector 68">
-            <a:extLst>
-              <a:ext uri="{FF2B5EF4-FFF2-40B4-BE49-F238E27FC236}">
-                <a16:creationId xmlns:a16="http://schemas.microsoft.com/office/drawing/2014/main" id="{D059A8BD-F4DC-8866-78A8-9285AD8B9369}"/>
-              </a:ext>
-            </a:extLst>
-          </p:cNvPr>
-          <p:cNvCxnSpPr>
-            <a:stCxn id="11" idx="2"/>
-            <a:endCxn id="22" idx="0"/>
-          </p:cNvCxnSpPr>
-          <p:nvPr/>
-        </p:nvCxnSpPr>
-        <p:spPr>
-          <a:xfrm>
-            <a:off x="6165629" y="2501888"/>
-            <a:ext cx="0" cy="464154"/>
-          </a:xfrm>
-          <a:prstGeom prst="line">
-            <a:avLst/>
-          </a:prstGeom>
-        </p:spPr>
-        <p:style>
-          <a:lnRef idx="1">
-            <a:schemeClr val="dk1"/>
-          </a:lnRef>
-          <a:fillRef idx="0">
-            <a:schemeClr val="dk1"/>
-          </a:fillRef>
-          <a:effectRef idx="0">
-            <a:schemeClr val="dk1"/>
-          </a:effectRef>
-          <a:fontRef idx="minor">
-            <a:schemeClr val="tx1"/>
-          </a:fontRef>
-        </p:style>
-      </p:cxnSp>
-      <p:cxnSp>
-        <p:nvCxnSpPr>
-          <p:cNvPr id="71" name="Straight Connector 70">
-            <a:extLst>
-              <a:ext uri="{FF2B5EF4-FFF2-40B4-BE49-F238E27FC236}">
-                <a16:creationId xmlns:a16="http://schemas.microsoft.com/office/drawing/2014/main" id="{10DE129B-5C47-94EF-0A77-4E2B90568B3A}"/>
-              </a:ext>
-            </a:extLst>
-          </p:cNvPr>
-          <p:cNvCxnSpPr>
-            <a:stCxn id="10" idx="2"/>
-            <a:endCxn id="33" idx="7"/>
-          </p:cNvCxnSpPr>
-          <p:nvPr/>
-        </p:nvCxnSpPr>
-        <p:spPr>
-          <a:xfrm flipH="1">
-            <a:off x="9317336" y="2238073"/>
-            <a:ext cx="1158915" cy="761658"/>
-          </a:xfrm>
-          <a:prstGeom prst="line">
-            <a:avLst/>
-          </a:prstGeom>
-        </p:spPr>
-        <p:style>
-          <a:lnRef idx="1">
-            <a:schemeClr val="dk1"/>
-          </a:lnRef>
-          <a:fillRef idx="0">
-            <a:schemeClr val="dk1"/>
-          </a:fillRef>
-          <a:effectRef idx="0">
-            <a:schemeClr val="dk1"/>
-          </a:effectRef>
-          <a:fontRef idx="minor">
-            <a:schemeClr val="tx1"/>
-          </a:fontRef>
-        </p:style>
-      </p:cxnSp>
-      <p:cxnSp>
-        <p:nvCxnSpPr>
-          <p:cNvPr id="73" name="Straight Connector 72">
-            <a:extLst>
-              <a:ext uri="{FF2B5EF4-FFF2-40B4-BE49-F238E27FC236}">
-                <a16:creationId xmlns:a16="http://schemas.microsoft.com/office/drawing/2014/main" id="{E1FA370C-D82A-936C-192B-FBE2F590F935}"/>
-              </a:ext>
-            </a:extLst>
-          </p:cNvPr>
-          <p:cNvCxnSpPr>
-            <a:cxnSpLocks/>
-            <a:stCxn id="10" idx="2"/>
-            <a:endCxn id="37" idx="0"/>
-          </p:cNvCxnSpPr>
-          <p:nvPr/>
-        </p:nvCxnSpPr>
-        <p:spPr>
-          <a:xfrm>
-            <a:off x="10476251" y="2238073"/>
-            <a:ext cx="1121389" cy="607912"/>
-          </a:xfrm>
-          <a:prstGeom prst="line">
-            <a:avLst/>
-          </a:prstGeom>
-        </p:spPr>
-        <p:style>
-          <a:lnRef idx="1">
-            <a:schemeClr val="dk1"/>
-          </a:lnRef>
-          <a:fillRef idx="0">
-            <a:schemeClr val="dk1"/>
-          </a:fillRef>
-          <a:effectRef idx="0">
-            <a:schemeClr val="dk1"/>
-          </a:effectRef>
-          <a:fontRef idx="minor">
-            <a:schemeClr val="tx1"/>
-          </a:fontRef>
-        </p:style>
-      </p:cxnSp>
-      <p:cxnSp>
-        <p:nvCxnSpPr>
-          <p:cNvPr id="75" name="Straight Connector 74">
-            <a:extLst>
-              <a:ext uri="{FF2B5EF4-FFF2-40B4-BE49-F238E27FC236}">
-                <a16:creationId xmlns:a16="http://schemas.microsoft.com/office/drawing/2014/main" id="{179E09D1-F5CB-B6B1-8433-DD3F5DE07215}"/>
-              </a:ext>
-            </a:extLst>
-          </p:cNvPr>
-          <p:cNvCxnSpPr>
-            <a:stCxn id="10" idx="2"/>
-            <a:endCxn id="38" idx="1"/>
-          </p:cNvCxnSpPr>
-          <p:nvPr/>
-        </p:nvCxnSpPr>
-        <p:spPr>
-          <a:xfrm>
-            <a:off x="10476251" y="2238073"/>
-            <a:ext cx="531285" cy="1738970"/>
-          </a:xfrm>
-          <a:prstGeom prst="line">
-            <a:avLst/>
-          </a:prstGeom>
-        </p:spPr>
-        <p:style>
-          <a:lnRef idx="1">
-            <a:schemeClr val="dk1"/>
-          </a:lnRef>
-          <a:fillRef idx="0">
-            <a:schemeClr val="dk1"/>
-          </a:fillRef>
-          <a:effectRef idx="0">
-            <a:schemeClr val="dk1"/>
-          </a:effectRef>
-          <a:fontRef idx="minor">
-            <a:schemeClr val="tx1"/>
-          </a:fontRef>
-        </p:style>
-      </p:cxnSp>
-      <p:cxnSp>
-        <p:nvCxnSpPr>
-          <p:cNvPr id="77" name="Straight Connector 76">
-            <a:extLst>
-              <a:ext uri="{FF2B5EF4-FFF2-40B4-BE49-F238E27FC236}">
-                <a16:creationId xmlns:a16="http://schemas.microsoft.com/office/drawing/2014/main" id="{AE974CAC-F0B4-16B4-A8EA-F97BF19F039A}"/>
-              </a:ext>
-            </a:extLst>
-          </p:cNvPr>
-          <p:cNvCxnSpPr>
-            <a:stCxn id="10" idx="2"/>
-            <a:endCxn id="41" idx="7"/>
-          </p:cNvCxnSpPr>
-          <p:nvPr/>
-        </p:nvCxnSpPr>
-        <p:spPr>
-          <a:xfrm flipH="1">
-            <a:off x="9869167" y="2238073"/>
-            <a:ext cx="607084" cy="1608989"/>
-          </a:xfrm>
-          <a:prstGeom prst="line">
-            <a:avLst/>
-          </a:prstGeom>
-        </p:spPr>
-        <p:style>
-          <a:lnRef idx="1">
-            <a:schemeClr val="dk1"/>
-          </a:lnRef>
-          <a:fillRef idx="0">
-            <a:schemeClr val="dk1"/>
-          </a:fillRef>
-          <a:effectRef idx="0">
-            <a:schemeClr val="dk1"/>
-          </a:effectRef>
-          <a:fontRef idx="minor">
-            <a:schemeClr val="tx1"/>
-          </a:fontRef>
-        </p:style>
-      </p:cxnSp>
-      <p:cxnSp>
-        <p:nvCxnSpPr>
-          <p:cNvPr id="79" name="Straight Connector 78">
-            <a:extLst>
-              <a:ext uri="{FF2B5EF4-FFF2-40B4-BE49-F238E27FC236}">
-                <a16:creationId xmlns:a16="http://schemas.microsoft.com/office/drawing/2014/main" id="{A6AA7C59-E17E-773E-7AAB-CEB81FDC86A1}"/>
-              </a:ext>
-            </a:extLst>
-          </p:cNvPr>
-          <p:cNvCxnSpPr>
-            <a:stCxn id="10" idx="2"/>
-            <a:endCxn id="67" idx="0"/>
-          </p:cNvCxnSpPr>
-          <p:nvPr/>
-        </p:nvCxnSpPr>
-        <p:spPr>
-          <a:xfrm flipH="1">
-            <a:off x="10435273" y="2238073"/>
-            <a:ext cx="40978" cy="2208776"/>
-          </a:xfrm>
-          <a:prstGeom prst="line">
-            <a:avLst/>
-          </a:prstGeom>
-        </p:spPr>
-        <p:style>
-          <a:lnRef idx="1">
-            <a:schemeClr val="dk1"/>
-          </a:lnRef>
-          <a:fillRef idx="0">
-            <a:schemeClr val="dk1"/>
-          </a:fillRef>
-          <a:effectRef idx="0">
-            <a:schemeClr val="dk1"/>
-          </a:effectRef>
-          <a:fontRef idx="minor">
-            <a:schemeClr val="tx1"/>
-          </a:fontRef>
-        </p:style>
-      </p:cxnSp>
-      <p:sp>
-        <p:nvSpPr>
-          <p:cNvPr id="81" name="Rectangle 80">
-            <a:extLst>
-              <a:ext uri="{FF2B5EF4-FFF2-40B4-BE49-F238E27FC236}">
-                <a16:creationId xmlns:a16="http://schemas.microsoft.com/office/drawing/2014/main" id="{ECD71292-0814-C0FB-F398-AA1BBBACD106}"/>
-              </a:ext>
-            </a:extLst>
-          </p:cNvPr>
-          <p:cNvSpPr/>
-          <p:nvPr/>
-        </p:nvSpPr>
-        <p:spPr>
-          <a:xfrm>
-            <a:off x="5168461" y="3773411"/>
-            <a:ext cx="1994336" cy="261610"/>
-          </a:xfrm>
-          <a:prstGeom prst="rect">
-            <a:avLst/>
-          </a:prstGeom>
-        </p:spPr>
-        <p:style>
-          <a:lnRef idx="1">
-            <a:schemeClr val="accent1"/>
-          </a:lnRef>
-          <a:fillRef idx="2">
-            <a:schemeClr val="accent1"/>
-          </a:fillRef>
-          <a:effectRef idx="1">
-            <a:schemeClr val="accent1"/>
-          </a:effectRef>
-          <a:fontRef idx="minor">
-            <a:schemeClr val="dk1"/>
-          </a:fontRef>
-        </p:style>
-        <p:txBody>
-          <a:bodyPr rtlCol="0" anchor="ctr"/>
-          <a:lstStyle/>
-          <a:p>
-            <a:pPr algn="just"/>
-            <a:r>
-              <a:rPr lang="en-US" sz="1400" dirty="0"/>
-              <a:t>1.ADD STUDENTS</a:t>
-            </a:r>
-            <a:endParaRPr lang="en-IN" sz="1400" dirty="0"/>
-          </a:p>
-        </p:txBody>
-      </p:sp>
-      <p:sp>
-        <p:nvSpPr>
-          <p:cNvPr id="84" name="Rectangle 83">
-            <a:extLst>
-              <a:ext uri="{FF2B5EF4-FFF2-40B4-BE49-F238E27FC236}">
-                <a16:creationId xmlns:a16="http://schemas.microsoft.com/office/drawing/2014/main" id="{C2E550DC-1123-0707-9E41-A40DFF8F8C14}"/>
-              </a:ext>
-            </a:extLst>
-          </p:cNvPr>
-          <p:cNvSpPr/>
-          <p:nvPr/>
-        </p:nvSpPr>
-        <p:spPr>
-          <a:xfrm>
-            <a:off x="5181600" y="4174584"/>
-            <a:ext cx="1994336" cy="261610"/>
-          </a:xfrm>
-          <a:prstGeom prst="rect">
-            <a:avLst/>
-          </a:prstGeom>
-        </p:spPr>
-        <p:style>
-          <a:lnRef idx="1">
-            <a:schemeClr val="accent1"/>
-          </a:lnRef>
-          <a:fillRef idx="2">
-            <a:schemeClr val="accent1"/>
-          </a:fillRef>
-          <a:effectRef idx="1">
-            <a:schemeClr val="accent1"/>
-          </a:effectRef>
-          <a:fontRef idx="minor">
-            <a:schemeClr val="dk1"/>
-          </a:fontRef>
-        </p:style>
-        <p:txBody>
-          <a:bodyPr rtlCol="0" anchor="ctr"/>
-          <a:lstStyle/>
-          <a:p>
-            <a:pPr algn="just"/>
-            <a:r>
-              <a:rPr lang="en-US" sz="1400" dirty="0"/>
-              <a:t>2.DISPLAY STUDENTS</a:t>
-            </a:r>
-            <a:endParaRPr lang="en-IN" sz="1400" dirty="0"/>
-          </a:p>
-        </p:txBody>
-      </p:sp>
-      <p:sp>
-        <p:nvSpPr>
-          <p:cNvPr id="86" name="Rectangle 85">
-            <a:extLst>
-              <a:ext uri="{FF2B5EF4-FFF2-40B4-BE49-F238E27FC236}">
-                <a16:creationId xmlns:a16="http://schemas.microsoft.com/office/drawing/2014/main" id="{618BB2AA-5F46-5241-F067-FE137B66FCFD}"/>
-              </a:ext>
-            </a:extLst>
-          </p:cNvPr>
-          <p:cNvSpPr/>
-          <p:nvPr/>
-        </p:nvSpPr>
-        <p:spPr>
-          <a:xfrm>
-            <a:off x="5183701" y="4641954"/>
-            <a:ext cx="1994336" cy="261610"/>
-          </a:xfrm>
-          <a:prstGeom prst="rect">
-            <a:avLst/>
-          </a:prstGeom>
-        </p:spPr>
-        <p:style>
-          <a:lnRef idx="1">
-            <a:schemeClr val="accent1"/>
-          </a:lnRef>
-          <a:fillRef idx="2">
-            <a:schemeClr val="accent1"/>
-          </a:fillRef>
-          <a:effectRef idx="1">
-            <a:schemeClr val="accent1"/>
-          </a:effectRef>
-          <a:fontRef idx="minor">
-            <a:schemeClr val="dk1"/>
-          </a:fontRef>
-        </p:style>
-        <p:txBody>
-          <a:bodyPr rtlCol="0" anchor="ctr"/>
-          <a:lstStyle/>
-          <a:p>
-            <a:r>
-              <a:rPr lang="en-US" sz="1400" dirty="0"/>
-              <a:t>3.SEARCH STUDENTS</a:t>
-            </a:r>
-            <a:endParaRPr lang="en-IN" sz="1400" dirty="0"/>
-          </a:p>
-        </p:txBody>
-      </p:sp>
-      <p:sp>
-        <p:nvSpPr>
-          <p:cNvPr id="88" name="Rectangle 87">
-            <a:extLst>
-              <a:ext uri="{FF2B5EF4-FFF2-40B4-BE49-F238E27FC236}">
-                <a16:creationId xmlns:a16="http://schemas.microsoft.com/office/drawing/2014/main" id="{276D2753-340F-8A13-5963-653A50C771B6}"/>
-              </a:ext>
-            </a:extLst>
-          </p:cNvPr>
-          <p:cNvSpPr/>
-          <p:nvPr/>
-        </p:nvSpPr>
-        <p:spPr>
-          <a:xfrm>
-            <a:off x="5168461" y="5083859"/>
-            <a:ext cx="1994336" cy="261610"/>
-          </a:xfrm>
-          <a:prstGeom prst="rect">
-            <a:avLst/>
-          </a:prstGeom>
-        </p:spPr>
-        <p:style>
-          <a:lnRef idx="1">
-            <a:schemeClr val="accent1"/>
-          </a:lnRef>
-          <a:fillRef idx="2">
-            <a:schemeClr val="accent1"/>
-          </a:fillRef>
-          <a:effectRef idx="1">
-            <a:schemeClr val="accent1"/>
-          </a:effectRef>
-          <a:fontRef idx="minor">
-            <a:schemeClr val="dk1"/>
-          </a:fontRef>
-        </p:style>
-        <p:txBody>
-          <a:bodyPr rtlCol="0" anchor="ctr"/>
-          <a:lstStyle/>
-          <a:p>
-            <a:r>
-              <a:rPr lang="en-US" sz="1400" dirty="0"/>
-              <a:t>4.DISPLAY TOPPER(S)</a:t>
-            </a:r>
-            <a:endParaRPr lang="en-IN" sz="1400" dirty="0"/>
-          </a:p>
-        </p:txBody>
-      </p:sp>
-      <p:sp>
-        <p:nvSpPr>
-          <p:cNvPr id="90" name="Rectangle 89">
-            <a:extLst>
-              <a:ext uri="{FF2B5EF4-FFF2-40B4-BE49-F238E27FC236}">
-                <a16:creationId xmlns:a16="http://schemas.microsoft.com/office/drawing/2014/main" id="{DCCAF9F4-0700-84A6-B772-146F1DD1A4EE}"/>
-              </a:ext>
-            </a:extLst>
-          </p:cNvPr>
-          <p:cNvSpPr/>
-          <p:nvPr/>
-        </p:nvSpPr>
-        <p:spPr>
-          <a:xfrm>
-            <a:off x="5168461" y="5500414"/>
-            <a:ext cx="1994336" cy="261610"/>
-          </a:xfrm>
-          <a:prstGeom prst="rect">
-            <a:avLst/>
-          </a:prstGeom>
-        </p:spPr>
-        <p:style>
-          <a:lnRef idx="1">
-            <a:schemeClr val="accent1"/>
-          </a:lnRef>
-          <a:fillRef idx="2">
-            <a:schemeClr val="accent1"/>
-          </a:fillRef>
-          <a:effectRef idx="1">
-            <a:schemeClr val="accent1"/>
-          </a:effectRef>
-          <a:fontRef idx="minor">
-            <a:schemeClr val="dk1"/>
-          </a:fontRef>
-        </p:style>
-        <p:txBody>
-          <a:bodyPr rtlCol="0" anchor="ctr"/>
-          <a:lstStyle/>
-          <a:p>
-            <a:pPr algn="ctr"/>
-            <a:r>
-              <a:rPr lang="en-US" sz="1200" dirty="0"/>
-              <a:t>5.DISPLAY FAILED STUDENTS</a:t>
-            </a:r>
-            <a:endParaRPr lang="en-IN" sz="1200" dirty="0"/>
-          </a:p>
-        </p:txBody>
-      </p:sp>
-      <p:sp>
-        <p:nvSpPr>
-          <p:cNvPr id="92" name="Rectangle 91">
-            <a:extLst>
-              <a:ext uri="{FF2B5EF4-FFF2-40B4-BE49-F238E27FC236}">
-                <a16:creationId xmlns:a16="http://schemas.microsoft.com/office/drawing/2014/main" id="{66DA8FE2-BECB-2D04-4562-A6AB10602C7A}"/>
-              </a:ext>
-            </a:extLst>
-          </p:cNvPr>
-          <p:cNvSpPr/>
-          <p:nvPr/>
-        </p:nvSpPr>
-        <p:spPr>
-          <a:xfrm>
-            <a:off x="5193861" y="5926350"/>
-            <a:ext cx="1994336" cy="261610"/>
-          </a:xfrm>
-          <a:prstGeom prst="rect">
-            <a:avLst/>
-          </a:prstGeom>
-        </p:spPr>
-        <p:style>
-          <a:lnRef idx="1">
-            <a:schemeClr val="accent1"/>
-          </a:lnRef>
-          <a:fillRef idx="2">
-            <a:schemeClr val="accent1"/>
-          </a:fillRef>
-          <a:effectRef idx="1">
-            <a:schemeClr val="accent1"/>
-          </a:effectRef>
-          <a:fontRef idx="minor">
-            <a:schemeClr val="dk1"/>
-          </a:fontRef>
-        </p:style>
-        <p:txBody>
-          <a:bodyPr rtlCol="0" anchor="ctr"/>
-          <a:lstStyle/>
-          <a:p>
-            <a:r>
-              <a:rPr lang="en-US" sz="1400" dirty="0"/>
-              <a:t>6.EXIT</a:t>
-            </a:r>
-            <a:endParaRPr lang="en-IN" sz="1400" dirty="0"/>
-          </a:p>
-        </p:txBody>
-      </p:sp>
-      <p:cxnSp>
-        <p:nvCxnSpPr>
-          <p:cNvPr id="94" name="Straight Connector 93">
-            <a:extLst>
-              <a:ext uri="{FF2B5EF4-FFF2-40B4-BE49-F238E27FC236}">
-                <a16:creationId xmlns:a16="http://schemas.microsoft.com/office/drawing/2014/main" id="{83063A4D-8D5E-781E-62EB-B36F2ED4E5C7}"/>
-              </a:ext>
-            </a:extLst>
-          </p:cNvPr>
-          <p:cNvCxnSpPr/>
-          <p:nvPr/>
-        </p:nvCxnSpPr>
-        <p:spPr>
-          <a:xfrm>
-            <a:off x="5029200" y="3468962"/>
-            <a:ext cx="0" cy="2588193"/>
-          </a:xfrm>
-          <a:prstGeom prst="line">
-            <a:avLst/>
-          </a:prstGeom>
-        </p:spPr>
-        <p:style>
-          <a:lnRef idx="1">
-            <a:schemeClr val="dk1"/>
-          </a:lnRef>
-          <a:fillRef idx="0">
-            <a:schemeClr val="dk1"/>
-          </a:fillRef>
-          <a:effectRef idx="0">
-            <a:schemeClr val="dk1"/>
-          </a:effectRef>
-          <a:fontRef idx="minor">
-            <a:schemeClr val="tx1"/>
-          </a:fontRef>
-        </p:style>
-      </p:cxnSp>
-      <p:cxnSp>
-        <p:nvCxnSpPr>
-          <p:cNvPr id="96" name="Straight Connector 95">
-            <a:extLst>
-              <a:ext uri="{FF2B5EF4-FFF2-40B4-BE49-F238E27FC236}">
-                <a16:creationId xmlns:a16="http://schemas.microsoft.com/office/drawing/2014/main" id="{F214F75D-C811-5B50-1FDE-CF56CD70436E}"/>
-              </a:ext>
-            </a:extLst>
-          </p:cNvPr>
-          <p:cNvCxnSpPr>
-            <a:endCxn id="92" idx="1"/>
-          </p:cNvCxnSpPr>
-          <p:nvPr/>
-        </p:nvCxnSpPr>
-        <p:spPr>
-          <a:xfrm>
-            <a:off x="5029200" y="6057155"/>
-            <a:ext cx="164661" cy="0"/>
-          </a:xfrm>
-          <a:prstGeom prst="line">
-            <a:avLst/>
-          </a:prstGeom>
-        </p:spPr>
-        <p:style>
-          <a:lnRef idx="1">
-            <a:schemeClr val="accent1"/>
-          </a:lnRef>
-          <a:fillRef idx="0">
-            <a:schemeClr val="accent1"/>
-          </a:fillRef>
-          <a:effectRef idx="0">
-            <a:schemeClr val="accent1"/>
-          </a:effectRef>
-          <a:fontRef idx="minor">
-            <a:schemeClr val="tx1"/>
-          </a:fontRef>
-        </p:style>
-      </p:cxnSp>
-      <p:cxnSp>
-        <p:nvCxnSpPr>
-          <p:cNvPr id="98" name="Straight Connector 97">
-            <a:extLst>
-              <a:ext uri="{FF2B5EF4-FFF2-40B4-BE49-F238E27FC236}">
-                <a16:creationId xmlns:a16="http://schemas.microsoft.com/office/drawing/2014/main" id="{7B35E031-AF14-CA83-C2BE-A392A571F0E5}"/>
-              </a:ext>
-            </a:extLst>
-          </p:cNvPr>
-          <p:cNvCxnSpPr>
-            <a:stCxn id="81" idx="1"/>
-          </p:cNvCxnSpPr>
-          <p:nvPr/>
-        </p:nvCxnSpPr>
-        <p:spPr>
-          <a:xfrm flipH="1" flipV="1">
-            <a:off x="5029200" y="3903392"/>
-            <a:ext cx="139261" cy="824"/>
-          </a:xfrm>
-          <a:prstGeom prst="line">
-            <a:avLst/>
-          </a:prstGeom>
-        </p:spPr>
-        <p:style>
-          <a:lnRef idx="1">
-            <a:schemeClr val="dk1"/>
-          </a:lnRef>
-          <a:fillRef idx="0">
-            <a:schemeClr val="dk1"/>
-          </a:fillRef>
-          <a:effectRef idx="0">
-            <a:schemeClr val="dk1"/>
-          </a:effectRef>
-          <a:fontRef idx="minor">
-            <a:schemeClr val="tx1"/>
-          </a:fontRef>
-        </p:style>
-      </p:cxnSp>
-      <p:cxnSp>
-        <p:nvCxnSpPr>
-          <p:cNvPr id="100" name="Straight Connector 99">
-            <a:extLst>
-              <a:ext uri="{FF2B5EF4-FFF2-40B4-BE49-F238E27FC236}">
-                <a16:creationId xmlns:a16="http://schemas.microsoft.com/office/drawing/2014/main" id="{71C8CAD7-C285-9EAD-DAD0-CE5522035331}"/>
-              </a:ext>
-            </a:extLst>
-          </p:cNvPr>
-          <p:cNvCxnSpPr>
-            <a:stCxn id="84" idx="1"/>
-          </p:cNvCxnSpPr>
-          <p:nvPr/>
-        </p:nvCxnSpPr>
-        <p:spPr>
-          <a:xfrm flipH="1">
-            <a:off x="5042339" y="4305389"/>
-            <a:ext cx="139261" cy="0"/>
-          </a:xfrm>
-          <a:prstGeom prst="line">
-            <a:avLst/>
-          </a:prstGeom>
-        </p:spPr>
-        <p:style>
-          <a:lnRef idx="1">
-            <a:schemeClr val="dk1"/>
-          </a:lnRef>
-          <a:fillRef idx="0">
-            <a:schemeClr val="dk1"/>
-          </a:fillRef>
-          <a:effectRef idx="0">
-            <a:schemeClr val="dk1"/>
-          </a:effectRef>
-          <a:fontRef idx="minor">
-            <a:schemeClr val="tx1"/>
-          </a:fontRef>
-        </p:style>
-      </p:cxnSp>
-      <p:cxnSp>
-        <p:nvCxnSpPr>
-          <p:cNvPr id="102" name="Straight Connector 101">
-            <a:extLst>
-              <a:ext uri="{FF2B5EF4-FFF2-40B4-BE49-F238E27FC236}">
-                <a16:creationId xmlns:a16="http://schemas.microsoft.com/office/drawing/2014/main" id="{C3A6DFBE-7A90-9DB8-6B00-AA3323A79148}"/>
-              </a:ext>
-            </a:extLst>
-          </p:cNvPr>
-          <p:cNvCxnSpPr>
-            <a:stCxn id="86" idx="1"/>
-          </p:cNvCxnSpPr>
-          <p:nvPr/>
-        </p:nvCxnSpPr>
-        <p:spPr>
-          <a:xfrm flipH="1">
-            <a:off x="5029200" y="4772759"/>
-            <a:ext cx="154501" cy="0"/>
-          </a:xfrm>
-          <a:prstGeom prst="line">
-            <a:avLst/>
-          </a:prstGeom>
-        </p:spPr>
-        <p:style>
-          <a:lnRef idx="1">
-            <a:schemeClr val="dk1"/>
-          </a:lnRef>
-          <a:fillRef idx="0">
-            <a:schemeClr val="dk1"/>
-          </a:fillRef>
-          <a:effectRef idx="0">
-            <a:schemeClr val="dk1"/>
-          </a:effectRef>
-          <a:fontRef idx="minor">
-            <a:schemeClr val="tx1"/>
-          </a:fontRef>
-        </p:style>
-      </p:cxnSp>
-      <p:cxnSp>
-        <p:nvCxnSpPr>
-          <p:cNvPr id="104" name="Straight Connector 103">
-            <a:extLst>
-              <a:ext uri="{FF2B5EF4-FFF2-40B4-BE49-F238E27FC236}">
-                <a16:creationId xmlns:a16="http://schemas.microsoft.com/office/drawing/2014/main" id="{CD94A741-21CF-DFC6-E8B6-7B11B96B8342}"/>
-              </a:ext>
-            </a:extLst>
-          </p:cNvPr>
-          <p:cNvCxnSpPr>
-            <a:stCxn id="88" idx="1"/>
-          </p:cNvCxnSpPr>
-          <p:nvPr/>
-        </p:nvCxnSpPr>
-        <p:spPr>
-          <a:xfrm flipH="1">
-            <a:off x="5029200" y="5214664"/>
-            <a:ext cx="139261" cy="0"/>
-          </a:xfrm>
-          <a:prstGeom prst="line">
-            <a:avLst/>
-          </a:prstGeom>
-        </p:spPr>
-        <p:style>
-          <a:lnRef idx="1">
-            <a:schemeClr val="dk1"/>
-          </a:lnRef>
-          <a:fillRef idx="0">
-            <a:schemeClr val="dk1"/>
-          </a:fillRef>
-          <a:effectRef idx="0">
-            <a:schemeClr val="dk1"/>
-          </a:effectRef>
-          <a:fontRef idx="minor">
-            <a:schemeClr val="tx1"/>
-          </a:fontRef>
-        </p:style>
-      </p:cxnSp>
-      <p:cxnSp>
-        <p:nvCxnSpPr>
-          <p:cNvPr id="106" name="Straight Connector 105">
-            <a:extLst>
-              <a:ext uri="{FF2B5EF4-FFF2-40B4-BE49-F238E27FC236}">
-                <a16:creationId xmlns:a16="http://schemas.microsoft.com/office/drawing/2014/main" id="{F6E8806F-6F63-F0E0-0841-22CBD5450CD1}"/>
-              </a:ext>
-            </a:extLst>
-          </p:cNvPr>
-          <p:cNvCxnSpPr>
-            <a:stCxn id="90" idx="1"/>
-          </p:cNvCxnSpPr>
-          <p:nvPr/>
-        </p:nvCxnSpPr>
-        <p:spPr>
-          <a:xfrm flipH="1">
-            <a:off x="5029200" y="5631219"/>
-            <a:ext cx="139261" cy="0"/>
-          </a:xfrm>
-          <a:prstGeom prst="line">
-            <a:avLst/>
-          </a:prstGeom>
-        </p:spPr>
-        <p:style>
-          <a:lnRef idx="1">
-            <a:schemeClr val="dk1"/>
-          </a:lnRef>
-          <a:fillRef idx="0">
-            <a:schemeClr val="dk1"/>
-          </a:fillRef>
-          <a:effectRef idx="0">
-            <a:schemeClr val="dk1"/>
-          </a:effectRef>
-          <a:fontRef idx="minor">
-            <a:schemeClr val="tx1"/>
-          </a:fontRef>
-        </p:style>
-      </p:cxnSp>
+            <a:pPr marL="342900" indent="-342900">
+              <a:buFont typeface="Arial" panose="020B0604020202020204" pitchFamily="34" charset="0"/>
+              <a:buChar char="•"/>
+            </a:pPr>
+            <a:r>
+              <a:rPr lang="en-IN" sz="2000" b="1" dirty="0"/>
+              <a:t>Student Management</a:t>
+            </a:r>
+            <a:br>
+              <a:rPr lang="en-IN" sz="2000" dirty="0"/>
+            </a:br>
+            <a:r>
+              <a:rPr lang="en-IN" dirty="0"/>
+              <a:t>addStudent()</a:t>
+            </a:r>
+            <a:r>
+              <a:rPr lang="en-IN" sz="2000" dirty="0"/>
+              <a:t> – Adds and stores student details and marks.</a:t>
+            </a:r>
+          </a:p>
+          <a:p>
+            <a:pPr marL="342900" indent="-342900">
+              <a:buFont typeface="Arial" panose="020B0604020202020204" pitchFamily="34" charset="0"/>
+              <a:buChar char="•"/>
+            </a:pPr>
+            <a:r>
+              <a:rPr lang="en-IN" sz="2000" b="1" dirty="0"/>
+              <a:t>Result Processing</a:t>
+            </a:r>
+            <a:br>
+              <a:rPr lang="en-IN" sz="2000" dirty="0"/>
+            </a:br>
+            <a:r>
+              <a:rPr lang="en-IN" dirty="0"/>
+              <a:t>calculateResult()</a:t>
+            </a:r>
+            <a:r>
+              <a:rPr lang="en-IN" sz="2000" dirty="0"/>
+              <a:t> – Calculates total, average, percentage, grade, and PASS/FAIL status.</a:t>
+            </a:r>
+          </a:p>
+          <a:p>
+            <a:pPr marL="342900" indent="-342900">
+              <a:buFont typeface="Arial" panose="020B0604020202020204" pitchFamily="34" charset="0"/>
+              <a:buChar char="•"/>
+            </a:pPr>
+            <a:r>
+              <a:rPr lang="en-IN" sz="2000" b="1" dirty="0"/>
+              <a:t>Result Display</a:t>
+            </a:r>
+            <a:br>
+              <a:rPr lang="en-IN" sz="2000" dirty="0"/>
+            </a:br>
+            <a:r>
+              <a:rPr lang="en-IN" dirty="0"/>
+              <a:t>displayAllResults()</a:t>
+            </a:r>
+            <a:r>
+              <a:rPr lang="en-IN" sz="2000" dirty="0"/>
+              <a:t> – Displays the complete results of all students.</a:t>
+            </a:r>
+          </a:p>
+          <a:p>
+            <a:pPr marL="342900" indent="-342900">
+              <a:buFont typeface="Arial" panose="020B0604020202020204" pitchFamily="34" charset="0"/>
+              <a:buChar char="•"/>
+            </a:pPr>
+            <a:r>
+              <a:rPr lang="en-IN" sz="2000" b="1" dirty="0"/>
+              <a:t>Search Module</a:t>
+            </a:r>
+            <a:br>
+              <a:rPr lang="en-IN" sz="2000" dirty="0"/>
+            </a:br>
+            <a:r>
+              <a:rPr lang="en-IN" dirty="0" err="1"/>
+              <a:t>searchStudent</a:t>
+            </a:r>
+            <a:r>
+              <a:rPr lang="en-IN" dirty="0"/>
+              <a:t>()</a:t>
+            </a:r>
+            <a:r>
+              <a:rPr lang="en-IN" sz="2000" dirty="0"/>
+              <a:t> – Searches for a student using the roll number.</a:t>
+            </a:r>
+          </a:p>
+          <a:p>
+            <a:pPr marL="342900" indent="-342900">
+              <a:buFont typeface="Arial" panose="020B0604020202020204" pitchFamily="34" charset="0"/>
+              <a:buChar char="•"/>
+            </a:pPr>
+            <a:r>
+              <a:rPr lang="en-IN" sz="2000" b="1" dirty="0"/>
+              <a:t>Topper Module</a:t>
+            </a:r>
+            <a:br>
+              <a:rPr lang="en-IN" sz="2000" dirty="0"/>
+            </a:br>
+            <a:r>
+              <a:rPr lang="en-IN" dirty="0"/>
+              <a:t>displayTopper()</a:t>
+            </a:r>
+            <a:r>
+              <a:rPr lang="en-IN" sz="2000" dirty="0"/>
+              <a:t> – Finds and displays the student or students with the highest average.</a:t>
+            </a:r>
+          </a:p>
+          <a:p>
+            <a:pPr marL="342900" indent="-342900">
+              <a:buFont typeface="Arial" panose="020B0604020202020204" pitchFamily="34" charset="0"/>
+              <a:buChar char="•"/>
+            </a:pPr>
+            <a:r>
+              <a:rPr lang="en-IN" sz="2000" b="1" dirty="0"/>
+              <a:t>Failed Student Module</a:t>
+            </a:r>
+            <a:br>
+              <a:rPr lang="en-IN" sz="2000" dirty="0"/>
+            </a:br>
+            <a:r>
+              <a:rPr lang="en-IN" dirty="0"/>
+              <a:t>displayFailedStudents()</a:t>
+            </a:r>
+            <a:r>
+              <a:rPr lang="en-IN" sz="2000" dirty="0"/>
+              <a:t> – Displays all students who have failed.</a:t>
+            </a:r>
+          </a:p>
+          <a:p>
+            <a:pPr marL="342900" indent="-342900">
+              <a:buFont typeface="Arial" panose="020B0604020202020204" pitchFamily="34" charset="0"/>
+              <a:buChar char="•"/>
+            </a:pPr>
+            <a:r>
+              <a:rPr lang="en-IN" sz="2000" b="1" dirty="0"/>
+              <a:t>Validation Module</a:t>
+            </a:r>
+            <a:br>
+              <a:rPr lang="en-IN" sz="2000" dirty="0"/>
+            </a:br>
+            <a:r>
+              <a:rPr lang="en-IN" sz="2000" dirty="0"/>
+              <a:t>Validates marks, roll numbers, and menu choices.</a:t>
+            </a:r>
+          </a:p>
+        </p:txBody>
+      </p:sp>
     </p:spTree>
     <p:extLst>
       <p:ext uri="{BB962C8B-B14F-4D97-AF65-F5344CB8AC3E}">
-        <p14:creationId xmlns:p14="http://schemas.microsoft.com/office/powerpoint/2010/main" val="2026700312"/>
+        <p14:creationId xmlns:p14="http://schemas.microsoft.com/office/powerpoint/2010/main" val="1780977059"/>
       </p:ext>
     </p:extLst>
   </p:cSld>
